--- a/folien/06-docker-aufbau.pptx
+++ b/folien/06-docker-aufbau.pptx
@@ -23,9 +23,15 @@
     <p:sldId id="271" r:id="rId17"/>
     <p:sldId id="272" r:id="rId18"/>
     <p:sldId id="273" r:id="rId19"/>
+    <p:sldId id="274" r:id="rId20"/>
+    <p:sldId id="275" r:id="rId21"/>
+    <p:sldId id="276" r:id="rId22"/>
+    <p:sldId id="277" r:id="rId23"/>
+    <p:sldId id="278" r:id="rId24"/>
+    <p:sldId id="279" r:id="rId25"/>
   </p:sldIdLst>
   <p:notesMasterIdLst>
-    <p:notesMasterId r:id="rId20"/>
+    <p:notesMasterId r:id="rId26"/>
   </p:notesMasterIdLst>
   <p:sldSz cx="9144000" cy="5143500"/>
   <p:notesSz cx="5143500" cy="9144000"/>
@@ -1353,6 +1359,94 @@
 </p:notes>
 </file>
 
+<file path=ppt/notesSlides/notesSlide19.xml><?xml version="1.0" encoding="utf-8"?>
+<p:notes xmlns:a="http://schemas.openxmlformats.org/drawingml/2006/main" xmlns:r="http://schemas.openxmlformats.org/officeDocument/2006/relationships" xmlns:p="http://schemas.openxmlformats.org/presentationml/2006/main">
+  <p:cSld>
+    <p:spTree>
+      <p:nvGrpSpPr>
+        <p:cNvPr id="1" name=""/>
+        <p:cNvGrpSpPr/>
+        <p:nvPr/>
+      </p:nvGrpSpPr>
+      <p:grpSpPr>
+        <a:xfrm>
+          <a:off x="0" y="0"/>
+          <a:ext cx="0" cy="0"/>
+          <a:chOff x="0" y="0"/>
+          <a:chExt cx="0" cy="0"/>
+        </a:xfrm>
+      </p:grpSpPr>
+      <p:sp>
+        <p:nvSpPr>
+          <p:cNvPr id="2" name="Slide Image Placeholder 1"/>
+          <p:cNvSpPr>
+            <a:spLocks noGrp="1" noRot="1" noChangeAspect="1"/>
+          </p:cNvSpPr>
+          <p:nvPr>
+            <p:ph type="sldImg"/>
+          </p:nvPr>
+        </p:nvSpPr>
+        <p:spPr/>
+      </p:sp>
+      <p:sp>
+        <p:nvSpPr>
+          <p:cNvPr id="3" name="Notes Placeholder 2"/>
+          <p:cNvSpPr>
+            <a:spLocks noGrp="1"/>
+          </p:cNvSpPr>
+          <p:nvPr>
+            <p:ph type="body" idx="1"/>
+          </p:nvPr>
+        </p:nvSpPr>
+        <p:spPr/>
+        <p:txBody>
+          <a:bodyPr/>
+          <a:lstStyle/>
+          <a:p>
+            <a:r>
+              <a:rPr lang="en-US" dirty="0"/>
+              <a:t/>
+            </a:r>
+            <a:endParaRPr lang="en-US" dirty="0"/>
+          </a:p>
+        </p:txBody>
+      </p:sp>
+      <p:sp>
+        <p:nvSpPr>
+          <p:cNvPr id="4" name="Slide Number Placeholder 3"/>
+          <p:cNvSpPr>
+            <a:spLocks noGrp="1"/>
+          </p:cNvSpPr>
+          <p:nvPr>
+            <p:ph type="sldNum" sz="quarter" idx="10"/>
+          </p:nvPr>
+        </p:nvSpPr>
+        <p:spPr/>
+        <p:txBody>
+          <a:bodyPr/>
+          <a:lstStyle/>
+          <a:p>
+            <a:fld id="{F7021451-1387-4CA6-816F-3879F97B5CBC}" type="slidenum">
+              <a:rPr lang="en-US"/>
+              <a:t>19</a:t>
+            </a:fld>
+            <a:endParaRPr lang="en-US"/>
+          </a:p>
+        </p:txBody>
+      </p:sp>
+    </p:spTree>
+    <p:extLst>
+      <p:ext uri="{BB962C8B-B14F-4D97-AF65-F5344CB8AC3E}">
+        <p14:creationId xmlns:p14="http://schemas.microsoft.com/office/powerpoint/2010/main" val="1024086991"/>
+      </p:ext>
+    </p:extLst>
+  </p:cSld>
+  <p:clrMapOvr>
+    <a:masterClrMapping/>
+  </p:clrMapOvr>
+</p:notes>
+</file>
+
 <file path=ppt/notesSlides/notesSlide2.xml><?xml version="1.0" encoding="utf-8"?>
 <p:notes xmlns:a="http://schemas.openxmlformats.org/drawingml/2006/main" xmlns:r="http://schemas.openxmlformats.org/officeDocument/2006/relationships" xmlns:p="http://schemas.openxmlformats.org/presentationml/2006/main">
   <p:cSld>
@@ -1423,6 +1517,446 @@
             <a:fld id="{F7021451-1387-4CA6-816F-3879F97B5CBC}" type="slidenum">
               <a:rPr lang="en-US"/>
               <a:t>2</a:t>
+            </a:fld>
+            <a:endParaRPr lang="en-US"/>
+          </a:p>
+        </p:txBody>
+      </p:sp>
+    </p:spTree>
+    <p:extLst>
+      <p:ext uri="{BB962C8B-B14F-4D97-AF65-F5344CB8AC3E}">
+        <p14:creationId xmlns:p14="http://schemas.microsoft.com/office/powerpoint/2010/main" val="1024086991"/>
+      </p:ext>
+    </p:extLst>
+  </p:cSld>
+  <p:clrMapOvr>
+    <a:masterClrMapping/>
+  </p:clrMapOvr>
+</p:notes>
+</file>
+
+<file path=ppt/notesSlides/notesSlide20.xml><?xml version="1.0" encoding="utf-8"?>
+<p:notes xmlns:a="http://schemas.openxmlformats.org/drawingml/2006/main" xmlns:r="http://schemas.openxmlformats.org/officeDocument/2006/relationships" xmlns:p="http://schemas.openxmlformats.org/presentationml/2006/main">
+  <p:cSld>
+    <p:spTree>
+      <p:nvGrpSpPr>
+        <p:cNvPr id="1" name=""/>
+        <p:cNvGrpSpPr/>
+        <p:nvPr/>
+      </p:nvGrpSpPr>
+      <p:grpSpPr>
+        <a:xfrm>
+          <a:off x="0" y="0"/>
+          <a:ext cx="0" cy="0"/>
+          <a:chOff x="0" y="0"/>
+          <a:chExt cx="0" cy="0"/>
+        </a:xfrm>
+      </p:grpSpPr>
+      <p:sp>
+        <p:nvSpPr>
+          <p:cNvPr id="2" name="Slide Image Placeholder 1"/>
+          <p:cNvSpPr>
+            <a:spLocks noGrp="1" noRot="1" noChangeAspect="1"/>
+          </p:cNvSpPr>
+          <p:nvPr>
+            <p:ph type="sldImg"/>
+          </p:nvPr>
+        </p:nvSpPr>
+        <p:spPr/>
+      </p:sp>
+      <p:sp>
+        <p:nvSpPr>
+          <p:cNvPr id="3" name="Notes Placeholder 2"/>
+          <p:cNvSpPr>
+            <a:spLocks noGrp="1"/>
+          </p:cNvSpPr>
+          <p:nvPr>
+            <p:ph type="body" idx="1"/>
+          </p:nvPr>
+        </p:nvSpPr>
+        <p:spPr/>
+        <p:txBody>
+          <a:bodyPr/>
+          <a:lstStyle/>
+          <a:p>
+            <a:r>
+              <a:rPr lang="en-US" dirty="0"/>
+              <a:t/>
+            </a:r>
+            <a:endParaRPr lang="en-US" dirty="0"/>
+          </a:p>
+        </p:txBody>
+      </p:sp>
+      <p:sp>
+        <p:nvSpPr>
+          <p:cNvPr id="4" name="Slide Number Placeholder 3"/>
+          <p:cNvSpPr>
+            <a:spLocks noGrp="1"/>
+          </p:cNvSpPr>
+          <p:nvPr>
+            <p:ph type="sldNum" sz="quarter" idx="10"/>
+          </p:nvPr>
+        </p:nvSpPr>
+        <p:spPr/>
+        <p:txBody>
+          <a:bodyPr/>
+          <a:lstStyle/>
+          <a:p>
+            <a:fld id="{F7021451-1387-4CA6-816F-3879F97B5CBC}" type="slidenum">
+              <a:rPr lang="en-US"/>
+              <a:t>20</a:t>
+            </a:fld>
+            <a:endParaRPr lang="en-US"/>
+          </a:p>
+        </p:txBody>
+      </p:sp>
+    </p:spTree>
+    <p:extLst>
+      <p:ext uri="{BB962C8B-B14F-4D97-AF65-F5344CB8AC3E}">
+        <p14:creationId xmlns:p14="http://schemas.microsoft.com/office/powerpoint/2010/main" val="1024086991"/>
+      </p:ext>
+    </p:extLst>
+  </p:cSld>
+  <p:clrMapOvr>
+    <a:masterClrMapping/>
+  </p:clrMapOvr>
+</p:notes>
+</file>
+
+<file path=ppt/notesSlides/notesSlide21.xml><?xml version="1.0" encoding="utf-8"?>
+<p:notes xmlns:a="http://schemas.openxmlformats.org/drawingml/2006/main" xmlns:r="http://schemas.openxmlformats.org/officeDocument/2006/relationships" xmlns:p="http://schemas.openxmlformats.org/presentationml/2006/main">
+  <p:cSld>
+    <p:spTree>
+      <p:nvGrpSpPr>
+        <p:cNvPr id="1" name=""/>
+        <p:cNvGrpSpPr/>
+        <p:nvPr/>
+      </p:nvGrpSpPr>
+      <p:grpSpPr>
+        <a:xfrm>
+          <a:off x="0" y="0"/>
+          <a:ext cx="0" cy="0"/>
+          <a:chOff x="0" y="0"/>
+          <a:chExt cx="0" cy="0"/>
+        </a:xfrm>
+      </p:grpSpPr>
+      <p:sp>
+        <p:nvSpPr>
+          <p:cNvPr id="2" name="Slide Image Placeholder 1"/>
+          <p:cNvSpPr>
+            <a:spLocks noGrp="1" noRot="1" noChangeAspect="1"/>
+          </p:cNvSpPr>
+          <p:nvPr>
+            <p:ph type="sldImg"/>
+          </p:nvPr>
+        </p:nvSpPr>
+        <p:spPr/>
+      </p:sp>
+      <p:sp>
+        <p:nvSpPr>
+          <p:cNvPr id="3" name="Notes Placeholder 2"/>
+          <p:cNvSpPr>
+            <a:spLocks noGrp="1"/>
+          </p:cNvSpPr>
+          <p:nvPr>
+            <p:ph type="body" idx="1"/>
+          </p:nvPr>
+        </p:nvSpPr>
+        <p:spPr/>
+        <p:txBody>
+          <a:bodyPr/>
+          <a:lstStyle/>
+          <a:p>
+            <a:r>
+              <a:rPr lang="en-US" dirty="0"/>
+              <a:t/>
+            </a:r>
+            <a:endParaRPr lang="en-US" dirty="0"/>
+          </a:p>
+        </p:txBody>
+      </p:sp>
+      <p:sp>
+        <p:nvSpPr>
+          <p:cNvPr id="4" name="Slide Number Placeholder 3"/>
+          <p:cNvSpPr>
+            <a:spLocks noGrp="1"/>
+          </p:cNvSpPr>
+          <p:nvPr>
+            <p:ph type="sldNum" sz="quarter" idx="10"/>
+          </p:nvPr>
+        </p:nvSpPr>
+        <p:spPr/>
+        <p:txBody>
+          <a:bodyPr/>
+          <a:lstStyle/>
+          <a:p>
+            <a:fld id="{F7021451-1387-4CA6-816F-3879F97B5CBC}" type="slidenum">
+              <a:rPr lang="en-US"/>
+              <a:t>21</a:t>
+            </a:fld>
+            <a:endParaRPr lang="en-US"/>
+          </a:p>
+        </p:txBody>
+      </p:sp>
+    </p:spTree>
+    <p:extLst>
+      <p:ext uri="{BB962C8B-B14F-4D97-AF65-F5344CB8AC3E}">
+        <p14:creationId xmlns:p14="http://schemas.microsoft.com/office/powerpoint/2010/main" val="1024086991"/>
+      </p:ext>
+    </p:extLst>
+  </p:cSld>
+  <p:clrMapOvr>
+    <a:masterClrMapping/>
+  </p:clrMapOvr>
+</p:notes>
+</file>
+
+<file path=ppt/notesSlides/notesSlide22.xml><?xml version="1.0" encoding="utf-8"?>
+<p:notes xmlns:a="http://schemas.openxmlformats.org/drawingml/2006/main" xmlns:r="http://schemas.openxmlformats.org/officeDocument/2006/relationships" xmlns:p="http://schemas.openxmlformats.org/presentationml/2006/main">
+  <p:cSld>
+    <p:spTree>
+      <p:nvGrpSpPr>
+        <p:cNvPr id="1" name=""/>
+        <p:cNvGrpSpPr/>
+        <p:nvPr/>
+      </p:nvGrpSpPr>
+      <p:grpSpPr>
+        <a:xfrm>
+          <a:off x="0" y="0"/>
+          <a:ext cx="0" cy="0"/>
+          <a:chOff x="0" y="0"/>
+          <a:chExt cx="0" cy="0"/>
+        </a:xfrm>
+      </p:grpSpPr>
+      <p:sp>
+        <p:nvSpPr>
+          <p:cNvPr id="2" name="Slide Image Placeholder 1"/>
+          <p:cNvSpPr>
+            <a:spLocks noGrp="1" noRot="1" noChangeAspect="1"/>
+          </p:cNvSpPr>
+          <p:nvPr>
+            <p:ph type="sldImg"/>
+          </p:nvPr>
+        </p:nvSpPr>
+        <p:spPr/>
+      </p:sp>
+      <p:sp>
+        <p:nvSpPr>
+          <p:cNvPr id="3" name="Notes Placeholder 2"/>
+          <p:cNvSpPr>
+            <a:spLocks noGrp="1"/>
+          </p:cNvSpPr>
+          <p:nvPr>
+            <p:ph type="body" idx="1"/>
+          </p:nvPr>
+        </p:nvSpPr>
+        <p:spPr/>
+        <p:txBody>
+          <a:bodyPr/>
+          <a:lstStyle/>
+          <a:p>
+            <a:r>
+              <a:rPr lang="en-US" dirty="0"/>
+              <a:t/>
+            </a:r>
+            <a:endParaRPr lang="en-US" dirty="0"/>
+          </a:p>
+        </p:txBody>
+      </p:sp>
+      <p:sp>
+        <p:nvSpPr>
+          <p:cNvPr id="4" name="Slide Number Placeholder 3"/>
+          <p:cNvSpPr>
+            <a:spLocks noGrp="1"/>
+          </p:cNvSpPr>
+          <p:nvPr>
+            <p:ph type="sldNum" sz="quarter" idx="10"/>
+          </p:nvPr>
+        </p:nvSpPr>
+        <p:spPr/>
+        <p:txBody>
+          <a:bodyPr/>
+          <a:lstStyle/>
+          <a:p>
+            <a:fld id="{F7021451-1387-4CA6-816F-3879F97B5CBC}" type="slidenum">
+              <a:rPr lang="en-US"/>
+              <a:t>22</a:t>
+            </a:fld>
+            <a:endParaRPr lang="en-US"/>
+          </a:p>
+        </p:txBody>
+      </p:sp>
+    </p:spTree>
+    <p:extLst>
+      <p:ext uri="{BB962C8B-B14F-4D97-AF65-F5344CB8AC3E}">
+        <p14:creationId xmlns:p14="http://schemas.microsoft.com/office/powerpoint/2010/main" val="1024086991"/>
+      </p:ext>
+    </p:extLst>
+  </p:cSld>
+  <p:clrMapOvr>
+    <a:masterClrMapping/>
+  </p:clrMapOvr>
+</p:notes>
+</file>
+
+<file path=ppt/notesSlides/notesSlide23.xml><?xml version="1.0" encoding="utf-8"?>
+<p:notes xmlns:a="http://schemas.openxmlformats.org/drawingml/2006/main" xmlns:r="http://schemas.openxmlformats.org/officeDocument/2006/relationships" xmlns:p="http://schemas.openxmlformats.org/presentationml/2006/main">
+  <p:cSld>
+    <p:spTree>
+      <p:nvGrpSpPr>
+        <p:cNvPr id="1" name=""/>
+        <p:cNvGrpSpPr/>
+        <p:nvPr/>
+      </p:nvGrpSpPr>
+      <p:grpSpPr>
+        <a:xfrm>
+          <a:off x="0" y="0"/>
+          <a:ext cx="0" cy="0"/>
+          <a:chOff x="0" y="0"/>
+          <a:chExt cx="0" cy="0"/>
+        </a:xfrm>
+      </p:grpSpPr>
+      <p:sp>
+        <p:nvSpPr>
+          <p:cNvPr id="2" name="Slide Image Placeholder 1"/>
+          <p:cNvSpPr>
+            <a:spLocks noGrp="1" noRot="1" noChangeAspect="1"/>
+          </p:cNvSpPr>
+          <p:nvPr>
+            <p:ph type="sldImg"/>
+          </p:nvPr>
+        </p:nvSpPr>
+        <p:spPr/>
+      </p:sp>
+      <p:sp>
+        <p:nvSpPr>
+          <p:cNvPr id="3" name="Notes Placeholder 2"/>
+          <p:cNvSpPr>
+            <a:spLocks noGrp="1"/>
+          </p:cNvSpPr>
+          <p:nvPr>
+            <p:ph type="body" idx="1"/>
+          </p:nvPr>
+        </p:nvSpPr>
+        <p:spPr/>
+        <p:txBody>
+          <a:bodyPr/>
+          <a:lstStyle/>
+          <a:p>
+            <a:r>
+              <a:rPr lang="en-US" dirty="0"/>
+              <a:t/>
+            </a:r>
+            <a:endParaRPr lang="en-US" dirty="0"/>
+          </a:p>
+        </p:txBody>
+      </p:sp>
+      <p:sp>
+        <p:nvSpPr>
+          <p:cNvPr id="4" name="Slide Number Placeholder 3"/>
+          <p:cNvSpPr>
+            <a:spLocks noGrp="1"/>
+          </p:cNvSpPr>
+          <p:nvPr>
+            <p:ph type="sldNum" sz="quarter" idx="10"/>
+          </p:nvPr>
+        </p:nvSpPr>
+        <p:spPr/>
+        <p:txBody>
+          <a:bodyPr/>
+          <a:lstStyle/>
+          <a:p>
+            <a:fld id="{F7021451-1387-4CA6-816F-3879F97B5CBC}" type="slidenum">
+              <a:rPr lang="en-US"/>
+              <a:t>23</a:t>
+            </a:fld>
+            <a:endParaRPr lang="en-US"/>
+          </a:p>
+        </p:txBody>
+      </p:sp>
+    </p:spTree>
+    <p:extLst>
+      <p:ext uri="{BB962C8B-B14F-4D97-AF65-F5344CB8AC3E}">
+        <p14:creationId xmlns:p14="http://schemas.microsoft.com/office/powerpoint/2010/main" val="1024086991"/>
+      </p:ext>
+    </p:extLst>
+  </p:cSld>
+  <p:clrMapOvr>
+    <a:masterClrMapping/>
+  </p:clrMapOvr>
+</p:notes>
+</file>
+
+<file path=ppt/notesSlides/notesSlide24.xml><?xml version="1.0" encoding="utf-8"?>
+<p:notes xmlns:a="http://schemas.openxmlformats.org/drawingml/2006/main" xmlns:r="http://schemas.openxmlformats.org/officeDocument/2006/relationships" xmlns:p="http://schemas.openxmlformats.org/presentationml/2006/main">
+  <p:cSld>
+    <p:spTree>
+      <p:nvGrpSpPr>
+        <p:cNvPr id="1" name=""/>
+        <p:cNvGrpSpPr/>
+        <p:nvPr/>
+      </p:nvGrpSpPr>
+      <p:grpSpPr>
+        <a:xfrm>
+          <a:off x="0" y="0"/>
+          <a:ext cx="0" cy="0"/>
+          <a:chOff x="0" y="0"/>
+          <a:chExt cx="0" cy="0"/>
+        </a:xfrm>
+      </p:grpSpPr>
+      <p:sp>
+        <p:nvSpPr>
+          <p:cNvPr id="2" name="Slide Image Placeholder 1"/>
+          <p:cNvSpPr>
+            <a:spLocks noGrp="1" noRot="1" noChangeAspect="1"/>
+          </p:cNvSpPr>
+          <p:nvPr>
+            <p:ph type="sldImg"/>
+          </p:nvPr>
+        </p:nvSpPr>
+        <p:spPr/>
+      </p:sp>
+      <p:sp>
+        <p:nvSpPr>
+          <p:cNvPr id="3" name="Notes Placeholder 2"/>
+          <p:cNvSpPr>
+            <a:spLocks noGrp="1"/>
+          </p:cNvSpPr>
+          <p:nvPr>
+            <p:ph type="body" idx="1"/>
+          </p:nvPr>
+        </p:nvSpPr>
+        <p:spPr/>
+        <p:txBody>
+          <a:bodyPr/>
+          <a:lstStyle/>
+          <a:p>
+            <a:r>
+              <a:rPr lang="en-US" dirty="0"/>
+              <a:t/>
+            </a:r>
+            <a:endParaRPr lang="en-US" dirty="0"/>
+          </a:p>
+        </p:txBody>
+      </p:sp>
+      <p:sp>
+        <p:nvSpPr>
+          <p:cNvPr id="4" name="Slide Number Placeholder 3"/>
+          <p:cNvSpPr>
+            <a:spLocks noGrp="1"/>
+          </p:cNvSpPr>
+          <p:nvPr>
+            <p:ph type="sldNum" sz="quarter" idx="10"/>
+          </p:nvPr>
+        </p:nvSpPr>
+        <p:spPr/>
+        <p:txBody>
+          <a:bodyPr/>
+          <a:lstStyle/>
+          <a:p>
+            <a:fld id="{F7021451-1387-4CA6-816F-3879F97B5CBC}" type="slidenum">
+              <a:rPr lang="en-US"/>
+              <a:t>24</a:t>
             </a:fld>
             <a:endParaRPr lang="en-US"/>
           </a:p>
@@ -2657,7 +3191,7 @@
                 <a:ea typeface="Arial" pitchFamily="34" charset="-122"/>
                 <a:cs typeface="Arial" pitchFamily="34" charset="-120"/>
               </a:rPr>
-              <a:t>DAS EIGENE CONTAINER-NETZ</a:t>
+              <a:t>DER UNTERSCHIED</a:t>
             </a:r>
             <a:endParaRPr lang="en-US" sz="1150" dirty="0"/>
           </a:p>
@@ -2696,7 +3230,7 @@
                 <a:ea typeface="Arial" pitchFamily="34" charset="-122"/>
                 <a:cs typeface="Arial" pitchFamily="34" charset="-120"/>
               </a:rPr>
-              <a:t>Wie findet Adminer die Datenbank?</a:t>
+              <a:t>Volume oder eigener Ordner?</a:t>
             </a:r>
             <a:endParaRPr lang="en-US" sz="2600" dirty="0"/>
           </a:p>
@@ -2704,7 +3238,7 @@
       </p:sp>
       <p:pic>
         <p:nvPicPr>
-          <p:cNvPr id="5" name="Image 0" descr="/Users/jacobmenge/Desktop/kurs-26.2b-orga/folienwerkstatt/assets/diagramme/container-netz.png">    </p:cNvPr>
+          <p:cNvPr id="5" name="Image 0" descr="/Users/jacobmenge/Desktop/kurs-26.2b-orga/folienwerkstatt/assets/diagramme/bind-volume-mechanik.png">    </p:cNvPr>
           <p:cNvPicPr>
             <a:picLocks noChangeAspect="1"/>
           </p:cNvPicPr>
@@ -2718,8 +3252,8 @@
         </p:blipFill>
         <p:spPr>
           <a:xfrm>
-            <a:off x="566928" y="1444752"/>
-            <a:ext cx="8010144" cy="2450592"/>
+            <a:off x="566928" y="1408176"/>
+            <a:ext cx="8010144" cy="2523744"/>
           </a:xfrm>
           <a:prstGeom prst="rect">
             <a:avLst/>
@@ -2734,7 +3268,7 @@
         </p:nvSpPr>
         <p:spPr>
           <a:xfrm>
-            <a:off x="566928" y="4087368"/>
+            <a:off x="566928" y="4105656"/>
             <a:ext cx="32004" cy="256032"/>
           </a:xfrm>
           <a:prstGeom prst="rect">
@@ -2754,7 +3288,7 @@
         </p:nvSpPr>
         <p:spPr>
           <a:xfrm>
-            <a:off x="749808" y="4041648"/>
+            <a:off x="749808" y="4059936"/>
             <a:ext cx="7827264" cy="402336"/>
           </a:xfrm>
           <a:prstGeom prst="rect">
@@ -2779,7 +3313,7 @@
                 <a:ea typeface="Arial" pitchFamily="34" charset="-122"/>
                 <a:cs typeface="Arial" pitchFamily="34" charset="-120"/>
               </a:rPr>
-              <a:t>Adminer ist eine kleine Weboberfläche für Datenbanken. Die Namensauflösung kennt ihr längst: DNS, hier eingebaut und im Kleinen.</a:t>
+              <a:t>Ein Blick vor den Doppelpunkt genügt: Schrägstriche heißen euer Ordner, ein bloßer Name heißt Docker-Volume.</a:t>
             </a:r>
             <a:endParaRPr lang="en-US" sz="1200" dirty="0"/>
           </a:p>
@@ -2841,7 +3375,7 @@
                 <a:ea typeface="Arial" pitchFamily="34" charset="-122"/>
                 <a:cs typeface="Arial" pitchFamily="34" charset="-120"/>
               </a:rPr>
-              <a:t>Netze, die verbinden</a:t>
+              <a:t>Daten, die bleiben</a:t>
             </a:r>
             <a:endParaRPr lang="en-US" sz="1050" dirty="0"/>
           </a:p>
@@ -2880,7 +3414,7 @@
                 <a:ea typeface="Arial" pitchFamily="34" charset="-122"/>
                 <a:cs typeface="Arial" pitchFamily="34" charset="-120"/>
               </a:rPr>
-              <a:t>8/14</a:t>
+              <a:t>8/20</a:t>
             </a:r>
             <a:endParaRPr lang="en-US" sz="1050" dirty="0"/>
           </a:p>
@@ -2971,7 +3505,7 @@
                 <a:ea typeface="Arial" pitchFamily="34" charset="-122"/>
                 <a:cs typeface="Arial" pitchFamily="34" charset="-120"/>
               </a:rPr>
-              <a:t>UMGEBUNGSVARIABLEN</a:t>
+              <a:t>NAMED VOLUME UND BIND MOUNT</a:t>
             </a:r>
             <a:endParaRPr lang="en-US" sz="1150" dirty="0"/>
           </a:p>
@@ -3010,7 +3544,7 @@
                 <a:ea typeface="Arial" pitchFamily="34" charset="-122"/>
                 <a:cs typeface="Arial" pitchFamily="34" charset="-120"/>
               </a:rPr>
-              <a:t>Ein Image, drei Umgebungen</a:t>
+              <a:t>Wann nehmt ihr was?</a:t>
             </a:r>
             <a:endParaRPr lang="en-US" sz="2600" dirty="0"/>
           </a:p>
@@ -3018,7 +3552,7 @@
       </p:sp>
       <p:pic>
         <p:nvPicPr>
-          <p:cNvPr id="5" name="Image 0" descr="/Users/jacobmenge/Desktop/kurs-26.2b-orga/folienwerkstatt/assets/diagramme/env-drei.png">    </p:cNvPr>
+          <p:cNvPr id="5" name="Image 0" descr="/Users/jacobmenge/Desktop/kurs-26.2b-orga/folienwerkstatt/assets/diagramme/bind-vs-volume.png">    </p:cNvPr>
           <p:cNvPicPr>
             <a:picLocks noChangeAspect="1"/>
           </p:cNvPicPr>
@@ -3033,7 +3567,7 @@
         <p:spPr>
           <a:xfrm>
             <a:off x="566928" y="1481328"/>
-            <a:ext cx="8010144" cy="2267712"/>
+            <a:ext cx="8010144" cy="2304288"/>
           </a:xfrm>
           <a:prstGeom prst="rect">
             <a:avLst/>
@@ -3048,7 +3582,7 @@
         </p:nvSpPr>
         <p:spPr>
           <a:xfrm>
-            <a:off x="566928" y="4050792"/>
+            <a:off x="566928" y="4069080"/>
             <a:ext cx="32004" cy="256032"/>
           </a:xfrm>
           <a:prstGeom prst="rect">
@@ -3068,7 +3602,7 @@
         </p:nvSpPr>
         <p:spPr>
           <a:xfrm>
-            <a:off x="749808" y="4005072"/>
+            <a:off x="749808" y="4023360"/>
             <a:ext cx="7827264" cy="402336"/>
           </a:xfrm>
           <a:prstGeom prst="rect">
@@ -3093,7 +3627,7 @@
                 <a:ea typeface="Arial" pitchFamily="34" charset="-122"/>
                 <a:cs typeface="Arial" pitchFamily="34" charset="-120"/>
               </a:rPr>
-              <a:t>Eine Umgebungsvariable ist ein benannter Wert, den ein Programm beim Start ausliest. Postgres liest so Benutzer, Passwort und Datenbankname.</a:t>
+              <a:t>Heute Abend nutzt ihr das Volume. Der Bind Mount kommt wieder, sobald ihr eigenen Code in Container bringt.</a:t>
             </a:r>
             <a:endParaRPr lang="en-US" sz="1200" dirty="0"/>
           </a:p>
@@ -3155,7 +3689,7 @@
                 <a:ea typeface="Arial" pitchFamily="34" charset="-122"/>
                 <a:cs typeface="Arial" pitchFamily="34" charset="-120"/>
               </a:rPr>
-              <a:t>Konfiguration von außen</a:t>
+              <a:t>Daten, die bleiben</a:t>
             </a:r>
             <a:endParaRPr lang="en-US" sz="1050" dirty="0"/>
           </a:p>
@@ -3194,7 +3728,7 @@
                 <a:ea typeface="Arial" pitchFamily="34" charset="-122"/>
                 <a:cs typeface="Arial" pitchFamily="34" charset="-120"/>
               </a:rPr>
-              <a:t>9/14</a:t>
+              <a:t>9/20</a:t>
             </a:r>
             <a:endParaRPr lang="en-US" sz="1050" dirty="0"/>
           </a:p>
@@ -3285,7 +3819,7 @@
                 <a:ea typeface="Arial" pitchFamily="34" charset="-122"/>
                 <a:cs typeface="Arial" pitchFamily="34" charset="-120"/>
               </a:rPr>
-              <a:t>DIE ANATOMIE</a:t>
+              <a:t>DAS EIGENE CONTAINER-NETZ</a:t>
             </a:r>
             <a:endParaRPr lang="en-US" sz="1150" dirty="0"/>
           </a:p>
@@ -3324,7 +3858,7 @@
                 <a:ea typeface="Arial" pitchFamily="34" charset="-122"/>
                 <a:cs typeface="Arial" pitchFamily="34" charset="-120"/>
               </a:rPr>
-              <a:t>Alles zusammen in einem Befehl</a:t>
+              <a:t>Wie findet Adminer die Datenbank?</a:t>
             </a:r>
             <a:endParaRPr lang="en-US" sz="2600" dirty="0"/>
           </a:p>
@@ -3332,7 +3866,7 @@
       </p:sp>
       <p:pic>
         <p:nvPicPr>
-          <p:cNvPr id="5" name="Image 0" descr="/Users/jacobmenge/Desktop/kurs-26.2b-orga/folienwerkstatt/assets/diagramme/run-anatomie.png">    </p:cNvPr>
+          <p:cNvPr id="5" name="Image 0" descr="/Users/jacobmenge/Desktop/kurs-26.2b-orga/folienwerkstatt/assets/diagramme/container-netz.png">    </p:cNvPr>
           <p:cNvPicPr>
             <a:picLocks noChangeAspect="1"/>
           </p:cNvPicPr>
@@ -3346,8 +3880,8 @@
         </p:blipFill>
         <p:spPr>
           <a:xfrm>
-            <a:off x="566928" y="1737360"/>
-            <a:ext cx="8010144" cy="1737360"/>
+            <a:off x="566928" y="1426464"/>
+            <a:ext cx="8010144" cy="2487168"/>
           </a:xfrm>
           <a:prstGeom prst="rect">
             <a:avLst/>
@@ -3362,7 +3896,7 @@
         </p:nvSpPr>
         <p:spPr>
           <a:xfrm>
-            <a:off x="566928" y="3931920"/>
+            <a:off x="566928" y="4087368"/>
             <a:ext cx="32004" cy="256032"/>
           </a:xfrm>
           <a:prstGeom prst="rect">
@@ -3382,7 +3916,7 @@
         </p:nvSpPr>
         <p:spPr>
           <a:xfrm>
-            <a:off x="749808" y="3886200"/>
+            <a:off x="749808" y="4041648"/>
             <a:ext cx="7827264" cy="402336"/>
           </a:xfrm>
           <a:prstGeom prst="rect">
@@ -3407,7 +3941,7 @@
                 <a:ea typeface="Arial" pitchFamily="34" charset="-122"/>
                 <a:cs typeface="Arial" pitchFamily="34" charset="-120"/>
               </a:rPr>
-              <a:t>Lest den Befehl einmal laut von links nach rechts. Wenn jeder Baustein einen Sinn ergibt, seid ihr bereit für die Übung.</a:t>
+              <a:t>Zwei Arten von Türen: Der Port im Netz ist für Nachbarn immer offen. -p baut die zusätzliche Tür durch die Wand, und die braucht nur, wen der Browser erreichen soll.</a:t>
             </a:r>
             <a:endParaRPr lang="en-US" sz="1200" dirty="0"/>
           </a:p>
@@ -3469,7 +4003,7 @@
                 <a:ea typeface="Arial" pitchFamily="34" charset="-122"/>
                 <a:cs typeface="Arial" pitchFamily="34" charset="-120"/>
               </a:rPr>
-              <a:t>Konfiguration von außen</a:t>
+              <a:t>Netze, die verbinden</a:t>
             </a:r>
             <a:endParaRPr lang="en-US" sz="1050" dirty="0"/>
           </a:p>
@@ -3508,7 +4042,7 @@
                 <a:ea typeface="Arial" pitchFamily="34" charset="-122"/>
                 <a:cs typeface="Arial" pitchFamily="34" charset="-120"/>
               </a:rPr>
-              <a:t>10/14</a:t>
+              <a:t>10/20</a:t>
             </a:r>
             <a:endParaRPr lang="en-US" sz="1050" dirty="0"/>
           </a:p>
@@ -3554,48 +4088,150 @@
         </p:nvSpPr>
         <p:spPr>
           <a:xfrm>
-            <a:off x="6355080" y="0"/>
-            <a:ext cx="2788920" cy="5143500"/>
+            <a:off x="566928" y="201168"/>
+            <a:ext cx="475488" cy="50292"/>
           </a:xfrm>
           <a:prstGeom prst="rect">
             <a:avLst/>
           </a:prstGeom>
           <a:solidFill>
-            <a:srgbClr val="FBF2E3"/>
+            <a:srgbClr val="0F7C86"/>
           </a:solidFill>
           <a:ln/>
         </p:spPr>
       </p:sp>
       <p:sp>
         <p:nvSpPr>
-          <p:cNvPr id="3" name="Shape 1"/>
-          <p:cNvSpPr/>
-          <p:nvPr/>
-        </p:nvSpPr>
-        <p:spPr>
-          <a:xfrm>
-            <a:off x="6355080" y="0"/>
-            <a:ext cx="45720" cy="5143500"/>
+          <p:cNvPr id="3" name="Text 1"/>
+          <p:cNvSpPr/>
+          <p:nvPr/>
+        </p:nvSpPr>
+        <p:spPr>
+          <a:xfrm>
+            <a:off x="566928" y="384048"/>
+            <a:ext cx="8010144" cy="237744"/>
+          </a:xfrm>
+          <a:prstGeom prst="rect">
+            <a:avLst/>
+          </a:prstGeom>
+          <a:noFill/>
+          <a:ln/>
+        </p:spPr>
+        <p:txBody>
+          <a:bodyPr wrap="square" lIns="0" tIns="0" rIns="0" bIns="0" rtlCol="0" anchor="ctr"/>
+          <a:lstStyle/>
+          <a:p>
+            <a:pPr indent="0" marL="0">
+              <a:buNone/>
+            </a:pPr>
+            <a:r>
+              <a:rPr lang="en-US" sz="1150" b="1" spc="180" kern="0" dirty="0">
+                <a:solidFill>
+                  <a:srgbClr val="0F7C86"/>
+                </a:solidFill>
+                <a:latin typeface="Arial" pitchFamily="34" charset="0"/>
+                <a:ea typeface="Arial" pitchFamily="34" charset="-122"/>
+                <a:cs typeface="Arial" pitchFamily="34" charset="-120"/>
+              </a:rPr>
+              <a:t>KONFIGURATION VON AUSSEN</a:t>
+            </a:r>
+            <a:endParaRPr lang="en-US" sz="1150" dirty="0"/>
+          </a:p>
+        </p:txBody>
+      </p:sp>
+      <p:sp>
+        <p:nvSpPr>
+          <p:cNvPr id="4" name="Text 2"/>
+          <p:cNvSpPr/>
+          <p:nvPr/>
+        </p:nvSpPr>
+        <p:spPr>
+          <a:xfrm>
+            <a:off x="566928" y="731520"/>
+            <a:ext cx="8010144" cy="603504"/>
+          </a:xfrm>
+          <a:prstGeom prst="rect">
+            <a:avLst/>
+          </a:prstGeom>
+          <a:noFill/>
+          <a:ln/>
+        </p:spPr>
+        <p:txBody>
+          <a:bodyPr wrap="square" lIns="0" tIns="0" rIns="0" bIns="0" rtlCol="0" anchor="t"/>
+          <a:lstStyle/>
+          <a:p>
+            <a:pPr indent="0" marL="0">
+              <a:buNone/>
+            </a:pPr>
+            <a:r>
+              <a:rPr lang="en-US" sz="2600" b="1" dirty="0">
+                <a:solidFill>
+                  <a:srgbClr val="272E52"/>
+                </a:solidFill>
+                <a:latin typeface="Arial" pitchFamily="34" charset="0"/>
+                <a:ea typeface="Arial" pitchFamily="34" charset="-122"/>
+                <a:cs typeface="Arial" pitchFamily="34" charset="-120"/>
+              </a:rPr>
+              <a:t>Was ist eine Umgebungsvariable?</a:t>
+            </a:r>
+            <a:endParaRPr lang="en-US" sz="2600" dirty="0"/>
+          </a:p>
+        </p:txBody>
+      </p:sp>
+      <p:pic>
+        <p:nvPicPr>
+          <p:cNvPr id="5" name="Image 0" descr="/Users/jacobmenge/Desktop/kurs-26.2b-orga/folienwerkstatt/assets/diagramme/umgebungsvariable.png">    </p:cNvPr>
+          <p:cNvPicPr>
+            <a:picLocks noChangeAspect="1"/>
+          </p:cNvPicPr>
+          <p:nvPr/>
+        </p:nvPicPr>
+        <p:blipFill>
+          <a:blip r:embed="rId1"/>
+          <a:stretch>
+            <a:fillRect/>
+          </a:stretch>
+        </p:blipFill>
+        <p:spPr>
+          <a:xfrm>
+            <a:off x="566928" y="1536192"/>
+            <a:ext cx="8010144" cy="2157984"/>
+          </a:xfrm>
+          <a:prstGeom prst="rect">
+            <a:avLst/>
+          </a:prstGeom>
+        </p:spPr>
+      </p:pic>
+      <p:sp>
+        <p:nvSpPr>
+          <p:cNvPr id="6" name="Shape 3"/>
+          <p:cNvSpPr/>
+          <p:nvPr/>
+        </p:nvSpPr>
+        <p:spPr>
+          <a:xfrm>
+            <a:off x="566928" y="4023360"/>
+            <a:ext cx="32004" cy="256032"/>
           </a:xfrm>
           <a:prstGeom prst="rect">
             <a:avLst/>
           </a:prstGeom>
           <a:solidFill>
-            <a:srgbClr val="9A6310"/>
+            <a:srgbClr val="0F7C86"/>
           </a:solidFill>
           <a:ln/>
         </p:spPr>
       </p:sp>
       <p:sp>
         <p:nvSpPr>
-          <p:cNvPr id="4" name="Text 2"/>
-          <p:cNvSpPr/>
-          <p:nvPr/>
-        </p:nvSpPr>
-        <p:spPr>
-          <a:xfrm>
-            <a:off x="6629400" y="1463040"/>
-            <a:ext cx="2194560" cy="1737360"/>
+          <p:cNvPr id="7" name="Text 4"/>
+          <p:cNvSpPr/>
+          <p:nvPr/>
+        </p:nvSpPr>
+        <p:spPr>
+          <a:xfrm>
+            <a:off x="749808" y="3977640"/>
+            <a:ext cx="7827264" cy="402336"/>
           </a:xfrm>
           <a:prstGeom prst="rect">
             <a:avLst/>
@@ -3607,109 +4243,73 @@
           <a:bodyPr wrap="square" lIns="0" tIns="0" rIns="0" bIns="0" rtlCol="0" anchor="ctr"/>
           <a:lstStyle/>
           <a:p>
-            <a:pPr algn="ctr" indent="0" marL="0">
-              <a:buNone/>
-            </a:pPr>
-            <a:r>
-              <a:rPr lang="en-US" sz="8400" b="1" dirty="0">
-                <a:solidFill>
-                  <a:srgbClr val="9A6310"/>
-                </a:solidFill>
-                <a:latin typeface="Arial" pitchFamily="34" charset="0"/>
-                <a:ea typeface="Arial" pitchFamily="34" charset="-122"/>
-                <a:cs typeface="Arial" pitchFamily="34" charset="-120"/>
-              </a:rPr>
-              <a:t>02</a:t>
-            </a:r>
-            <a:endParaRPr lang="en-US" sz="8400" dirty="0"/>
-          </a:p>
-        </p:txBody>
-      </p:sp>
-      <p:sp>
-        <p:nvSpPr>
-          <p:cNvPr id="5" name="Shape 3"/>
-          <p:cNvSpPr/>
-          <p:nvPr/>
-        </p:nvSpPr>
-        <p:spPr>
-          <a:xfrm>
-            <a:off x="566928" y="1883664"/>
-            <a:ext cx="475488" cy="50292"/>
-          </a:xfrm>
-          <a:prstGeom prst="rect">
-            <a:avLst/>
-          </a:prstGeom>
-          <a:solidFill>
-            <a:srgbClr val="9A6310"/>
-          </a:solidFill>
-          <a:ln/>
-        </p:spPr>
-      </p:sp>
-      <p:sp>
-        <p:nvSpPr>
-          <p:cNvPr id="6" name="Text 4"/>
-          <p:cNvSpPr/>
-          <p:nvPr/>
-        </p:nvSpPr>
-        <p:spPr>
-          <a:xfrm>
-            <a:off x="566928" y="2084832"/>
-            <a:ext cx="5394960" cy="868680"/>
-          </a:xfrm>
-          <a:prstGeom prst="rect">
-            <a:avLst/>
-          </a:prstGeom>
-          <a:noFill/>
-          <a:ln/>
-        </p:spPr>
-        <p:txBody>
-          <a:bodyPr wrap="square" lIns="0" tIns="0" rIns="0" bIns="0" rtlCol="0" anchor="t"/>
-          <a:lstStyle/>
-          <a:p>
-            <a:pPr indent="0" marL="0">
-              <a:buNone/>
-            </a:pPr>
-            <a:r>
-              <a:rPr lang="en-US" sz="3000" b="1" dirty="0">
-                <a:solidFill>
-                  <a:srgbClr val="272E52"/>
-                </a:solidFill>
-                <a:latin typeface="Arial" pitchFamily="34" charset="0"/>
-                <a:ea typeface="Arial" pitchFamily="34" charset="-122"/>
-                <a:cs typeface="Arial" pitchFamily="34" charset="-120"/>
-              </a:rPr>
-              <a:t>Datenbank mit Gedächtnis</a:t>
-            </a:r>
-            <a:endParaRPr lang="en-US" sz="3000" dirty="0"/>
-          </a:p>
-        </p:txBody>
-      </p:sp>
-      <p:sp>
-        <p:nvSpPr>
-          <p:cNvPr id="7" name="Text 5"/>
-          <p:cNvSpPr/>
-          <p:nvPr/>
-        </p:nvSpPr>
-        <p:spPr>
-          <a:xfrm>
-            <a:off x="566928" y="3017520"/>
-            <a:ext cx="5394960" cy="548640"/>
-          </a:xfrm>
-          <a:prstGeom prst="rect">
-            <a:avLst/>
-          </a:prstGeom>
-          <a:noFill/>
-          <a:ln/>
-        </p:spPr>
-        <p:txBody>
-          <a:bodyPr wrap="square" lIns="0" tIns="0" rIns="0" bIns="0" rtlCol="0" anchor="t"/>
-          <a:lstStyle/>
-          <a:p>
-            <a:pPr indent="0" marL="0">
-              <a:buNone/>
-            </a:pPr>
-            <a:r>
-              <a:rPr lang="en-US" sz="1350" dirty="0">
+            <a:pPr indent="0" marL="0">
+              <a:buNone/>
+            </a:pPr>
+            <a:r>
+              <a:rPr lang="en-US" sz="1200" b="1" dirty="0">
+                <a:solidFill>
+                  <a:srgbClr val="434A63"/>
+                </a:solidFill>
+                <a:latin typeface="Arial" pitchFamily="34" charset="0"/>
+                <a:ea typeface="Arial" pitchFamily="34" charset="-122"/>
+                <a:cs typeface="Arial" pitchFamily="34" charset="-120"/>
+              </a:rPr>
+              <a:t>Der Name ist frei wählbar, entscheidend ist die Absprache: Das Programm dokumentiert, nach welchen Namen es fragt.</a:t>
+            </a:r>
+            <a:endParaRPr lang="en-US" sz="1200" dirty="0"/>
+          </a:p>
+        </p:txBody>
+      </p:sp>
+      <p:sp>
+        <p:nvSpPr>
+          <p:cNvPr id="8" name="Shape 5"/>
+          <p:cNvSpPr/>
+          <p:nvPr/>
+        </p:nvSpPr>
+        <p:spPr>
+          <a:xfrm>
+            <a:off x="566928" y="4631436"/>
+            <a:ext cx="8010144" cy="0"/>
+          </a:xfrm>
+          <a:prstGeom prst="line">
+            <a:avLst/>
+          </a:prstGeom>
+          <a:noFill/>
+          <a:ln w="9525">
+            <a:solidFill>
+              <a:srgbClr val="DFE3F0"/>
+            </a:solidFill>
+            <a:prstDash val="solid"/>
+          </a:ln>
+        </p:spPr>
+      </p:sp>
+      <p:sp>
+        <p:nvSpPr>
+          <p:cNvPr id="9" name="Text 6"/>
+          <p:cNvSpPr/>
+          <p:nvPr/>
+        </p:nvSpPr>
+        <p:spPr>
+          <a:xfrm>
+            <a:off x="566928" y="4722876"/>
+            <a:ext cx="5029200" cy="237744"/>
+          </a:xfrm>
+          <a:prstGeom prst="rect">
+            <a:avLst/>
+          </a:prstGeom>
+          <a:noFill/>
+          <a:ln/>
+        </p:spPr>
+        <p:txBody>
+          <a:bodyPr wrap="square" lIns="0" tIns="0" rIns="0" bIns="0" rtlCol="0" anchor="ctr"/>
+          <a:lstStyle/>
+          <a:p>
+            <a:pPr indent="0" marL="0">
+              <a:buNone/>
+            </a:pPr>
+            <a:r>
+              <a:rPr lang="en-US" sz="1050" spc="30" kern="0" dirty="0">
                 <a:solidFill>
                   <a:srgbClr val="5C6377"/>
                 </a:solidFill>
@@ -3717,9 +4317,48 @@
                 <a:ea typeface="Arial" pitchFamily="34" charset="-122"/>
                 <a:cs typeface="Arial" pitchFamily="34" charset="-120"/>
               </a:rPr>
-              <a:t>60 Minuten in Gruppen: Postgres und Adminer, am Ende der Härtetest</a:t>
-            </a:r>
-            <a:endParaRPr lang="en-US" sz="1350" dirty="0"/>
+              <a:t>Konfiguration von außen</a:t>
+            </a:r>
+            <a:endParaRPr lang="en-US" sz="1050" dirty="0"/>
+          </a:p>
+        </p:txBody>
+      </p:sp>
+      <p:sp>
+        <p:nvSpPr>
+          <p:cNvPr id="10" name="Text 7"/>
+          <p:cNvSpPr/>
+          <p:nvPr/>
+        </p:nvSpPr>
+        <p:spPr>
+          <a:xfrm>
+            <a:off x="8028432" y="4722876"/>
+            <a:ext cx="548640" cy="237744"/>
+          </a:xfrm>
+          <a:prstGeom prst="rect">
+            <a:avLst/>
+          </a:prstGeom>
+          <a:noFill/>
+          <a:ln/>
+        </p:spPr>
+        <p:txBody>
+          <a:bodyPr wrap="square" lIns="0" tIns="0" rIns="0" bIns="0" rtlCol="0" anchor="ctr"/>
+          <a:lstStyle/>
+          <a:p>
+            <a:pPr algn="r" indent="0" marL="0">
+              <a:buNone/>
+            </a:pPr>
+            <a:r>
+              <a:rPr lang="en-US" sz="1050" dirty="0">
+                <a:solidFill>
+                  <a:srgbClr val="5C6377"/>
+                </a:solidFill>
+                <a:latin typeface="Arial" pitchFamily="34" charset="0"/>
+                <a:ea typeface="Arial" pitchFamily="34" charset="-122"/>
+                <a:cs typeface="Arial" pitchFamily="34" charset="-120"/>
+              </a:rPr>
+              <a:t>11/20</a:t>
+            </a:r>
+            <a:endParaRPr lang="en-US" sz="1050" dirty="0"/>
           </a:p>
         </p:txBody>
       </p:sp>
@@ -3770,7 +4409,7 @@
             <a:avLst/>
           </a:prstGeom>
           <a:solidFill>
-            <a:srgbClr val="9A6310"/>
+            <a:srgbClr val="0F7C86"/>
           </a:solidFill>
           <a:ln/>
         </p:spPr>
@@ -3802,13 +4441,13 @@
             <a:r>
               <a:rPr lang="en-US" sz="1150" b="1" spc="180" kern="0" dirty="0">
                 <a:solidFill>
-                  <a:srgbClr val="9A6310"/>
-                </a:solidFill>
-                <a:latin typeface="Arial" pitchFamily="34" charset="0"/>
-                <a:ea typeface="Arial" pitchFamily="34" charset="-122"/>
-                <a:cs typeface="Arial" pitchFamily="34" charset="-120"/>
-              </a:rPr>
-              <a:t>BREAKOUT · 60 MINUTEN</a:t>
+                  <a:srgbClr val="0F7C86"/>
+                </a:solidFill>
+                <a:latin typeface="Arial" pitchFamily="34" charset="0"/>
+                <a:ea typeface="Arial" pitchFamily="34" charset="-122"/>
+                <a:cs typeface="Arial" pitchFamily="34" charset="-120"/>
+              </a:rPr>
+              <a:t>UMGEBUNGSVARIABLEN</a:t>
             </a:r>
             <a:endParaRPr lang="en-US" sz="1150" dirty="0"/>
           </a:p>
@@ -3847,42 +4486,66 @@
                 <a:ea typeface="Arial" pitchFamily="34" charset="-122"/>
                 <a:cs typeface="Arial" pitchFamily="34" charset="-120"/>
               </a:rPr>
-              <a:t>Der Auftrag</a:t>
+              <a:t>Ein Image, drei Umgebungen</a:t>
             </a:r>
             <a:endParaRPr lang="en-US" sz="2600" dirty="0"/>
           </a:p>
         </p:txBody>
       </p:sp>
-      <p:sp>
-        <p:nvSpPr>
-          <p:cNvPr id="5" name="Shape 3"/>
-          <p:cNvSpPr/>
-          <p:nvPr/>
-        </p:nvSpPr>
-        <p:spPr>
-          <a:xfrm>
-            <a:off x="438912" y="1792224"/>
-            <a:ext cx="8266176" cy="329184"/>
+      <p:pic>
+        <p:nvPicPr>
+          <p:cNvPr id="5" name="Image 0" descr="/Users/jacobmenge/Desktop/kurs-26.2b-orga/folienwerkstatt/assets/diagramme/env-drei.png">    </p:cNvPr>
+          <p:cNvPicPr>
+            <a:picLocks noChangeAspect="1"/>
+          </p:cNvPicPr>
+          <p:nvPr/>
+        </p:nvPicPr>
+        <p:blipFill>
+          <a:blip r:embed="rId1"/>
+          <a:stretch>
+            <a:fillRect/>
+          </a:stretch>
+        </p:blipFill>
+        <p:spPr>
+          <a:xfrm>
+            <a:off x="566928" y="1481328"/>
+            <a:ext cx="8010144" cy="2267712"/>
+          </a:xfrm>
+          <a:prstGeom prst="rect">
+            <a:avLst/>
+          </a:prstGeom>
+        </p:spPr>
+      </p:pic>
+      <p:sp>
+        <p:nvSpPr>
+          <p:cNvPr id="6" name="Shape 3"/>
+          <p:cNvSpPr/>
+          <p:nvPr/>
+        </p:nvSpPr>
+        <p:spPr>
+          <a:xfrm>
+            <a:off x="566928" y="4050792"/>
+            <a:ext cx="32004" cy="256032"/>
           </a:xfrm>
           <a:prstGeom prst="rect">
             <a:avLst/>
           </a:prstGeom>
           <a:solidFill>
-            <a:srgbClr val="F5F6FC"/>
+            <a:srgbClr val="0F7C86"/>
           </a:solidFill>
           <a:ln/>
         </p:spPr>
       </p:sp>
       <p:sp>
         <p:nvSpPr>
-          <p:cNvPr id="6" name="Text 4"/>
-          <p:cNvSpPr/>
-          <p:nvPr/>
-        </p:nvSpPr>
-        <p:spPr>
-          <a:xfrm>
-            <a:off x="566928" y="1792224"/>
-            <a:ext cx="914400" cy="329184"/>
+          <p:cNvPr id="7" name="Text 4"/>
+          <p:cNvSpPr/>
+          <p:nvPr/>
+        </p:nvSpPr>
+        <p:spPr>
+          <a:xfrm>
+            <a:off x="749808" y="4005072"/>
+            <a:ext cx="7827264" cy="402336"/>
           </a:xfrm>
           <a:prstGeom prst="rect">
             <a:avLst/>
@@ -3898,46 +4561,7 @@
               <a:buNone/>
             </a:pPr>
             <a:r>
-              <a:rPr lang="en-US" sz="1100" b="1" dirty="0">
-                <a:solidFill>
-                  <a:srgbClr val="9A6310"/>
-                </a:solidFill>
-                <a:latin typeface="Courier New" pitchFamily="34" charset="0"/>
-                <a:ea typeface="Courier New" pitchFamily="34" charset="-122"/>
-                <a:cs typeface="Courier New" pitchFamily="34" charset="-120"/>
-              </a:rPr>
-              <a:t>Teil 1</a:t>
-            </a:r>
-            <a:endParaRPr lang="en-US" sz="1100" dirty="0"/>
-          </a:p>
-        </p:txBody>
-      </p:sp>
-      <p:sp>
-        <p:nvSpPr>
-          <p:cNvPr id="7" name="Text 5"/>
-          <p:cNvSpPr/>
-          <p:nvPr/>
-        </p:nvSpPr>
-        <p:spPr>
-          <a:xfrm>
-            <a:off x="1481328" y="1792224"/>
-            <a:ext cx="7095744" cy="329184"/>
-          </a:xfrm>
-          <a:prstGeom prst="rect">
-            <a:avLst/>
-          </a:prstGeom>
-          <a:noFill/>
-          <a:ln/>
-        </p:spPr>
-        <p:txBody>
-          <a:bodyPr wrap="square" lIns="0" tIns="0" rIns="0" bIns="0" rtlCol="0" anchor="ctr"/>
-          <a:lstStyle/>
-          <a:p>
-            <a:pPr indent="0" marL="0">
-              <a:buNone/>
-            </a:pPr>
-            <a:r>
-              <a:rPr lang="en-US" sz="1100" dirty="0">
+              <a:rPr lang="en-US" sz="1200" b="1" dirty="0">
                 <a:solidFill>
                   <a:srgbClr val="434A63"/>
                 </a:solidFill>
@@ -3945,537 +4569,15 @@
                 <a:ea typeface="Arial" pitchFamily="34" charset="-122"/>
                 <a:cs typeface="Arial" pitchFamily="34" charset="-120"/>
               </a:rPr>
-              <a:t>Postgres starten: mit Volume und den drei Variablen</a:t>
-            </a:r>
-            <a:endParaRPr lang="en-US" sz="1100" dirty="0"/>
-          </a:p>
-        </p:txBody>
-      </p:sp>
-      <p:sp>
-        <p:nvSpPr>
-          <p:cNvPr id="8" name="Text 6"/>
-          <p:cNvSpPr/>
-          <p:nvPr/>
-        </p:nvSpPr>
-        <p:spPr>
-          <a:xfrm>
-            <a:off x="566928" y="2121408"/>
-            <a:ext cx="914400" cy="329184"/>
-          </a:xfrm>
-          <a:prstGeom prst="rect">
-            <a:avLst/>
-          </a:prstGeom>
-          <a:noFill/>
-          <a:ln/>
-        </p:spPr>
-        <p:txBody>
-          <a:bodyPr wrap="square" lIns="0" tIns="0" rIns="0" bIns="0" rtlCol="0" anchor="ctr"/>
-          <a:lstStyle/>
-          <a:p>
-            <a:pPr indent="0" marL="0">
-              <a:buNone/>
-            </a:pPr>
-            <a:r>
-              <a:rPr lang="en-US" sz="1100" b="1" dirty="0">
-                <a:solidFill>
-                  <a:srgbClr val="9A6310"/>
-                </a:solidFill>
-                <a:latin typeface="Courier New" pitchFamily="34" charset="0"/>
-                <a:ea typeface="Courier New" pitchFamily="34" charset="-122"/>
-                <a:cs typeface="Courier New" pitchFamily="34" charset="-120"/>
-              </a:rPr>
-              <a:t>Teil 2</a:t>
-            </a:r>
-            <a:endParaRPr lang="en-US" sz="1100" dirty="0"/>
-          </a:p>
-        </p:txBody>
-      </p:sp>
-      <p:sp>
-        <p:nvSpPr>
-          <p:cNvPr id="9" name="Text 7"/>
-          <p:cNvSpPr/>
-          <p:nvPr/>
-        </p:nvSpPr>
-        <p:spPr>
-          <a:xfrm>
-            <a:off x="1481328" y="2121408"/>
-            <a:ext cx="7095744" cy="329184"/>
-          </a:xfrm>
-          <a:prstGeom prst="rect">
-            <a:avLst/>
-          </a:prstGeom>
-          <a:noFill/>
-          <a:ln/>
-        </p:spPr>
-        <p:txBody>
-          <a:bodyPr wrap="square" lIns="0" tIns="0" rIns="0" bIns="0" rtlCol="0" anchor="ctr"/>
-          <a:lstStyle/>
-          <a:p>
-            <a:pPr indent="0" marL="0">
-              <a:buNone/>
-            </a:pPr>
-            <a:r>
-              <a:rPr lang="en-US" sz="1100" dirty="0">
-                <a:solidFill>
-                  <a:srgbClr val="434A63"/>
-                </a:solidFill>
-                <a:latin typeface="Arial" pitchFamily="34" charset="0"/>
-                <a:ea typeface="Arial" pitchFamily="34" charset="-122"/>
-                <a:cs typeface="Arial" pitchFamily="34" charset="-120"/>
-              </a:rPr>
-              <a:t>Eigenes Netz anlegen, Adminer dazu, im Browser anmelden</a:t>
-            </a:r>
-            <a:endParaRPr lang="en-US" sz="1100" dirty="0"/>
-          </a:p>
-        </p:txBody>
-      </p:sp>
-      <p:sp>
-        <p:nvSpPr>
-          <p:cNvPr id="10" name="Shape 8"/>
-          <p:cNvSpPr/>
-          <p:nvPr/>
-        </p:nvSpPr>
-        <p:spPr>
-          <a:xfrm>
-            <a:off x="438912" y="2450592"/>
-            <a:ext cx="8266176" cy="329184"/>
-          </a:xfrm>
-          <a:prstGeom prst="rect">
-            <a:avLst/>
-          </a:prstGeom>
-          <a:solidFill>
-            <a:srgbClr val="F5F6FC"/>
-          </a:solidFill>
-          <a:ln/>
-        </p:spPr>
-      </p:sp>
-      <p:sp>
-        <p:nvSpPr>
-          <p:cNvPr id="11" name="Text 9"/>
-          <p:cNvSpPr/>
-          <p:nvPr/>
-        </p:nvSpPr>
-        <p:spPr>
-          <a:xfrm>
-            <a:off x="566928" y="2450592"/>
-            <a:ext cx="914400" cy="329184"/>
-          </a:xfrm>
-          <a:prstGeom prst="rect">
-            <a:avLst/>
-          </a:prstGeom>
-          <a:noFill/>
-          <a:ln/>
-        </p:spPr>
-        <p:txBody>
-          <a:bodyPr wrap="square" lIns="0" tIns="0" rIns="0" bIns="0" rtlCol="0" anchor="ctr"/>
-          <a:lstStyle/>
-          <a:p>
-            <a:pPr indent="0" marL="0">
-              <a:buNone/>
-            </a:pPr>
-            <a:r>
-              <a:rPr lang="en-US" sz="1100" b="1" dirty="0">
-                <a:solidFill>
-                  <a:srgbClr val="9A6310"/>
-                </a:solidFill>
-                <a:latin typeface="Courier New" pitchFamily="34" charset="0"/>
-                <a:ea typeface="Courier New" pitchFamily="34" charset="-122"/>
-                <a:cs typeface="Courier New" pitchFamily="34" charset="-120"/>
-              </a:rPr>
-              <a:t>Teil 3</a:t>
-            </a:r>
-            <a:endParaRPr lang="en-US" sz="1100" dirty="0"/>
-          </a:p>
-        </p:txBody>
-      </p:sp>
-      <p:sp>
-        <p:nvSpPr>
-          <p:cNvPr id="12" name="Text 10"/>
-          <p:cNvSpPr/>
-          <p:nvPr/>
-        </p:nvSpPr>
-        <p:spPr>
-          <a:xfrm>
-            <a:off x="1481328" y="2450592"/>
-            <a:ext cx="7095744" cy="329184"/>
-          </a:xfrm>
-          <a:prstGeom prst="rect">
-            <a:avLst/>
-          </a:prstGeom>
-          <a:noFill/>
-          <a:ln/>
-        </p:spPr>
-        <p:txBody>
-          <a:bodyPr wrap="square" lIns="0" tIns="0" rIns="0" bIns="0" rtlCol="0" anchor="ctr"/>
-          <a:lstStyle/>
-          <a:p>
-            <a:pPr indent="0" marL="0">
-              <a:buNone/>
-            </a:pPr>
-            <a:r>
-              <a:rPr lang="en-US" sz="1100" dirty="0">
-                <a:solidFill>
-                  <a:srgbClr val="434A63"/>
-                </a:solidFill>
-                <a:latin typeface="Arial" pitchFamily="34" charset="0"/>
-                <a:ea typeface="Arial" pitchFamily="34" charset="-122"/>
-                <a:cs typeface="Arial" pitchFamily="34" charset="-120"/>
-              </a:rPr>
-              <a:t>Härtetest: Tabelle anlegen, Container zerstören, wiederbeleben</a:t>
-            </a:r>
-            <a:endParaRPr lang="en-US" sz="1100" dirty="0"/>
-          </a:p>
-        </p:txBody>
-      </p:sp>
-      <p:sp>
-        <p:nvSpPr>
-          <p:cNvPr id="13" name="Text 11"/>
-          <p:cNvSpPr/>
-          <p:nvPr/>
-        </p:nvSpPr>
-        <p:spPr>
-          <a:xfrm>
-            <a:off x="566928" y="2779776"/>
-            <a:ext cx="914400" cy="329184"/>
-          </a:xfrm>
-          <a:prstGeom prst="rect">
-            <a:avLst/>
-          </a:prstGeom>
-          <a:noFill/>
-          <a:ln/>
-        </p:spPr>
-        <p:txBody>
-          <a:bodyPr wrap="square" lIns="0" tIns="0" rIns="0" bIns="0" rtlCol="0" anchor="ctr"/>
-          <a:lstStyle/>
-          <a:p>
-            <a:pPr indent="0" marL="0">
-              <a:buNone/>
-            </a:pPr>
-            <a:r>
-              <a:rPr lang="en-US" sz="1100" b="1" dirty="0">
-                <a:solidFill>
-                  <a:srgbClr val="9A6310"/>
-                </a:solidFill>
-                <a:latin typeface="Courier New" pitchFamily="34" charset="0"/>
-                <a:ea typeface="Courier New" pitchFamily="34" charset="-122"/>
-                <a:cs typeface="Courier New" pitchFamily="34" charset="-120"/>
-              </a:rPr>
-              <a:t>Bonus</a:t>
-            </a:r>
-            <a:endParaRPr lang="en-US" sz="1100" dirty="0"/>
-          </a:p>
-        </p:txBody>
-      </p:sp>
-      <p:sp>
-        <p:nvSpPr>
-          <p:cNvPr id="14" name="Text 12"/>
-          <p:cNvSpPr/>
-          <p:nvPr/>
-        </p:nvSpPr>
-        <p:spPr>
-          <a:xfrm>
-            <a:off x="1481328" y="2779776"/>
-            <a:ext cx="7095744" cy="329184"/>
-          </a:xfrm>
-          <a:prstGeom prst="rect">
-            <a:avLst/>
-          </a:prstGeom>
-          <a:noFill/>
-          <a:ln/>
-        </p:spPr>
-        <p:txBody>
-          <a:bodyPr wrap="square" lIns="0" tIns="0" rIns="0" bIns="0" rtlCol="0" anchor="ctr"/>
-          <a:lstStyle/>
-          <a:p>
-            <a:pPr indent="0" marL="0">
-              <a:buNone/>
-            </a:pPr>
-            <a:r>
-              <a:rPr lang="en-US" sz="1100" dirty="0">
-                <a:solidFill>
-                  <a:srgbClr val="434A63"/>
-                </a:solidFill>
-                <a:latin typeface="Arial" pitchFamily="34" charset="0"/>
-                <a:ea typeface="Arial" pitchFamily="34" charset="-122"/>
-                <a:cs typeface="Arial" pitchFamily="34" charset="-120"/>
-              </a:rPr>
-              <a:t>Vier Experimente: ins Volume schauen, zweiter Adminer, DNS-Beweis, Variablen prüfen</a:t>
-            </a:r>
-            <a:endParaRPr lang="en-US" sz="1100" dirty="0"/>
-          </a:p>
-        </p:txBody>
-      </p:sp>
-      <p:sp>
-        <p:nvSpPr>
-          <p:cNvPr id="15" name="Shape 13"/>
-          <p:cNvSpPr/>
-          <p:nvPr/>
-        </p:nvSpPr>
-        <p:spPr>
-          <a:xfrm>
-            <a:off x="438912" y="3108960"/>
-            <a:ext cx="8266176" cy="329184"/>
-          </a:xfrm>
-          <a:prstGeom prst="rect">
-            <a:avLst/>
-          </a:prstGeom>
-          <a:solidFill>
-            <a:srgbClr val="F5F6FC"/>
-          </a:solidFill>
-          <a:ln/>
-        </p:spPr>
-      </p:sp>
-      <p:sp>
-        <p:nvSpPr>
-          <p:cNvPr id="16" name="Text 14"/>
-          <p:cNvSpPr/>
-          <p:nvPr/>
-        </p:nvSpPr>
-        <p:spPr>
-          <a:xfrm>
-            <a:off x="566928" y="3108960"/>
-            <a:ext cx="914400" cy="329184"/>
-          </a:xfrm>
-          <a:prstGeom prst="rect">
-            <a:avLst/>
-          </a:prstGeom>
-          <a:noFill/>
-          <a:ln/>
-        </p:spPr>
-        <p:txBody>
-          <a:bodyPr wrap="square" lIns="0" tIns="0" rIns="0" bIns="0" rtlCol="0" anchor="ctr"/>
-          <a:lstStyle/>
-          <a:p>
-            <a:pPr indent="0" marL="0">
-              <a:buNone/>
-            </a:pPr>
-            <a:r>
-              <a:rPr lang="en-US" sz="1100" b="1" dirty="0">
-                <a:solidFill>
-                  <a:srgbClr val="9A6310"/>
-                </a:solidFill>
-                <a:latin typeface="Courier New" pitchFamily="34" charset="0"/>
-                <a:ea typeface="Courier New" pitchFamily="34" charset="-122"/>
-                <a:cs typeface="Courier New" pitchFamily="34" charset="-120"/>
-              </a:rPr>
-              <a:t>Notieren</a:t>
-            </a:r>
-            <a:endParaRPr lang="en-US" sz="1100" dirty="0"/>
-          </a:p>
-        </p:txBody>
-      </p:sp>
-      <p:sp>
-        <p:nvSpPr>
-          <p:cNvPr id="17" name="Text 15"/>
-          <p:cNvSpPr/>
-          <p:nvPr/>
-        </p:nvSpPr>
-        <p:spPr>
-          <a:xfrm>
-            <a:off x="1481328" y="3108960"/>
-            <a:ext cx="7095744" cy="329184"/>
-          </a:xfrm>
-          <a:prstGeom prst="rect">
-            <a:avLst/>
-          </a:prstGeom>
-          <a:noFill/>
-          <a:ln/>
-        </p:spPr>
-        <p:txBody>
-          <a:bodyPr wrap="square" lIns="0" tIns="0" rIns="0" bIns="0" rtlCol="0" anchor="ctr"/>
-          <a:lstStyle/>
-          <a:p>
-            <a:pPr indent="0" marL="0">
-              <a:buNone/>
-            </a:pPr>
-            <a:r>
-              <a:rPr lang="en-US" sz="1100" dirty="0">
-                <a:solidFill>
-                  <a:srgbClr val="434A63"/>
-                </a:solidFill>
-                <a:latin typeface="Arial" pitchFamily="34" charset="0"/>
-                <a:ea typeface="Arial" pitchFamily="34" charset="-122"/>
-                <a:cs typeface="Arial" pitchFamily="34" charset="-120"/>
-              </a:rPr>
-              <a:t>Das Ergebnis eures Härtetests und euer docker volume ls</a:t>
-            </a:r>
-            <a:endParaRPr lang="en-US" sz="1100" dirty="0"/>
-          </a:p>
-        </p:txBody>
-      </p:sp>
-      <p:sp>
-        <p:nvSpPr>
-          <p:cNvPr id="18" name="Shape 16"/>
-          <p:cNvSpPr/>
-          <p:nvPr/>
-        </p:nvSpPr>
-        <p:spPr>
-          <a:xfrm>
-            <a:off x="566928" y="3456432"/>
-            <a:ext cx="8010144" cy="1097280"/>
-          </a:xfrm>
-          <a:prstGeom prst="rect">
-            <a:avLst/>
-          </a:prstGeom>
-          <a:solidFill>
-            <a:srgbClr val="EEF0FB"/>
-          </a:solidFill>
-          <a:ln/>
-        </p:spPr>
-      </p:sp>
-      <p:sp>
-        <p:nvSpPr>
-          <p:cNvPr id="19" name="Shape 17"/>
-          <p:cNvSpPr/>
-          <p:nvPr/>
-        </p:nvSpPr>
-        <p:spPr>
-          <a:xfrm>
-            <a:off x="566928" y="3456432"/>
-            <a:ext cx="41148" cy="1097280"/>
-          </a:xfrm>
-          <a:prstGeom prst="rect">
-            <a:avLst/>
-          </a:prstGeom>
-          <a:solidFill>
-            <a:srgbClr val="9A6310"/>
-          </a:solidFill>
-          <a:ln/>
-        </p:spPr>
-      </p:sp>
-      <p:sp>
-        <p:nvSpPr>
-          <p:cNvPr id="20" name="Text 18"/>
-          <p:cNvSpPr/>
-          <p:nvPr/>
-        </p:nvSpPr>
-        <p:spPr>
-          <a:xfrm>
-            <a:off x="804672" y="3602736"/>
-            <a:ext cx="7607808" cy="242062"/>
-          </a:xfrm>
-          <a:prstGeom prst="rect">
-            <a:avLst/>
-          </a:prstGeom>
-          <a:noFill/>
-          <a:ln/>
-        </p:spPr>
-        <p:txBody>
-          <a:bodyPr wrap="square" lIns="0" tIns="0" rIns="0" bIns="0" rtlCol="0" anchor="t"/>
-          <a:lstStyle/>
-          <a:p>
-            <a:pPr indent="0" marL="0">
-              <a:buNone/>
-            </a:pPr>
-            <a:r>
-              <a:rPr lang="en-US" sz="1300" b="1" dirty="0">
-                <a:solidFill>
-                  <a:srgbClr val="272E52"/>
-                </a:solidFill>
-                <a:latin typeface="Arial" pitchFamily="34" charset="0"/>
-                <a:ea typeface="Arial" pitchFamily="34" charset="-122"/>
-                <a:cs typeface="Arial" pitchFamily="34" charset="-120"/>
-              </a:rPr>
-              <a:t>Jetzt öffnen, alles braucht ihr gleich im Raum</a:t>
-            </a:r>
-            <a:endParaRPr lang="en-US" sz="1300" dirty="0"/>
-          </a:p>
-        </p:txBody>
-      </p:sp>
-      <p:sp>
-        <p:nvSpPr>
-          <p:cNvPr id="21" name="Text 19"/>
-          <p:cNvSpPr/>
-          <p:nvPr/>
-        </p:nvSpPr>
-        <p:spPr>
-          <a:xfrm>
-            <a:off x="804672" y="3890518"/>
-            <a:ext cx="7607808" cy="544322"/>
-          </a:xfrm>
-          <a:prstGeom prst="rect">
-            <a:avLst/>
-          </a:prstGeom>
-          <a:noFill/>
-          <a:ln/>
-        </p:spPr>
-        <p:txBody>
-          <a:bodyPr wrap="square" lIns="0" tIns="0" rIns="0" bIns="0" rtlCol="0" anchor="t"/>
-          <a:lstStyle/>
-          <a:p>
-            <a:pPr indent="0" marL="0">
-              <a:lnSpc>
-                <a:spcPct val="92000"/>
-              </a:lnSpc>
-              <a:spcAft>
-                <a:spcPts val="500"/>
-              </a:spcAft>
-              <a:buNone/>
-            </a:pPr>
-            <a:r>
-              <a:rPr lang="en-US" sz="1000" dirty="0">
-                <a:solidFill>
-                  <a:srgbClr val="434A63"/>
-                </a:solidFill>
-                <a:latin typeface="Arial" pitchFamily="34" charset="0"/>
-                <a:ea typeface="Arial" pitchFamily="34" charset="-122"/>
-                <a:cs typeface="Arial" pitchFamily="34" charset="-120"/>
-              </a:rPr>
-              <a:t>Übung:  jacobmenge.github.io/kurs-unterlagen/docker-aufbau/praxis-multi-container/</a:t>
-            </a:r>
-            <a:endParaRPr lang="en-US" sz="1000" dirty="0"/>
-          </a:p>
-          <a:p>
-            <a:pPr indent="0" marL="0">
-              <a:lnSpc>
-                <a:spcPct val="92000"/>
-              </a:lnSpc>
-              <a:spcAft>
-                <a:spcPts val="500"/>
-              </a:spcAft>
-              <a:buNone/>
-            </a:pPr>
-            <a:r>
-              <a:rPr lang="en-US" sz="1000" dirty="0">
-                <a:solidFill>
-                  <a:srgbClr val="434A63"/>
-                </a:solidFill>
-                <a:latin typeface="Arial" pitchFamily="34" charset="0"/>
-                <a:ea typeface="Arial" pitchFamily="34" charset="-122"/>
-                <a:cs typeface="Arial" pitchFamily="34" charset="-120"/>
-              </a:rPr>
-              <a:t>Wenn es klemmt:  jacobmenge.github.io/kurs-unterlagen/docker-aufbau/stolpersteine/</a:t>
-            </a:r>
-            <a:endParaRPr lang="en-US" sz="1000" dirty="0"/>
-          </a:p>
-          <a:p>
-            <a:pPr indent="0" marL="0">
-              <a:lnSpc>
-                <a:spcPct val="92000"/>
-              </a:lnSpc>
-              <a:spcAft>
-                <a:spcPts val="500"/>
-              </a:spcAft>
-              <a:buNone/>
-            </a:pPr>
-            <a:r>
-              <a:rPr lang="en-US" sz="1000" dirty="0">
-                <a:solidFill>
-                  <a:srgbClr val="434A63"/>
-                </a:solidFill>
-                <a:latin typeface="Arial" pitchFamily="34" charset="0"/>
-                <a:ea typeface="Arial" pitchFamily="34" charset="-122"/>
-                <a:cs typeface="Arial" pitchFamily="34" charset="-120"/>
-              </a:rPr>
-              <a:t>Ergebnisse eintragen:  &lt;Link zum Ergebnis-Dokument hier eintragen&gt;</a:t>
-            </a:r>
-            <a:endParaRPr lang="en-US" sz="1000" dirty="0"/>
-          </a:p>
-        </p:txBody>
-      </p:sp>
-      <p:sp>
-        <p:nvSpPr>
-          <p:cNvPr id="22" name="Shape 20"/>
+              <a:t>Postgres liest beim ersten Start Benutzer, Passwort und Datenbankname aus genau diesen Variablen. Andere Werte, andere Umgebung, gleiches Image.</a:t>
+            </a:r>
+            <a:endParaRPr lang="en-US" sz="1200" dirty="0"/>
+          </a:p>
+        </p:txBody>
+      </p:sp>
+      <p:sp>
+        <p:nvSpPr>
+          <p:cNvPr id="8" name="Shape 5"/>
           <p:cNvSpPr/>
           <p:nvPr/>
         </p:nvSpPr>
@@ -4498,7 +4600,7 @@
       </p:sp>
       <p:sp>
         <p:nvSpPr>
-          <p:cNvPr id="23" name="Text 21"/>
+          <p:cNvPr id="9" name="Text 6"/>
           <p:cNvSpPr/>
           <p:nvPr/>
         </p:nvSpPr>
@@ -4529,7 +4631,7 @@
                 <a:ea typeface="Arial" pitchFamily="34" charset="-122"/>
                 <a:cs typeface="Arial" pitchFamily="34" charset="-120"/>
               </a:rPr>
-              <a:t>Breakout</a:t>
+              <a:t>Konfiguration von außen</a:t>
             </a:r>
             <a:endParaRPr lang="en-US" sz="1050" dirty="0"/>
           </a:p>
@@ -4537,7 +4639,7 @@
       </p:sp>
       <p:sp>
         <p:nvSpPr>
-          <p:cNvPr id="24" name="Text 22"/>
+          <p:cNvPr id="10" name="Text 7"/>
           <p:cNvSpPr/>
           <p:nvPr/>
         </p:nvSpPr>
@@ -4568,7 +4670,7 @@
                 <a:ea typeface="Arial" pitchFamily="34" charset="-122"/>
                 <a:cs typeface="Arial" pitchFamily="34" charset="-120"/>
               </a:rPr>
-              <a:t>11/14</a:t>
+              <a:t>12/20</a:t>
             </a:r>
             <a:endParaRPr lang="en-US" sz="1050" dirty="0"/>
           </a:p>
@@ -4621,7 +4723,7 @@
             <a:avLst/>
           </a:prstGeom>
           <a:solidFill>
-            <a:srgbClr val="9A6310"/>
+            <a:srgbClr val="0F7C86"/>
           </a:solidFill>
           <a:ln/>
         </p:spPr>
@@ -4653,13 +4755,13 @@
             <a:r>
               <a:rPr lang="en-US" sz="1150" b="1" spc="180" kern="0" dirty="0">
                 <a:solidFill>
-                  <a:srgbClr val="9A6310"/>
-                </a:solidFill>
-                <a:latin typeface="Arial" pitchFamily="34" charset="0"/>
-                <a:ea typeface="Arial" pitchFamily="34" charset="-122"/>
-                <a:cs typeface="Arial" pitchFamily="34" charset="-120"/>
-              </a:rPr>
-              <a:t>SPIELREGELN</a:t>
+                  <a:srgbClr val="0F7C86"/>
+                </a:solidFill>
+                <a:latin typeface="Arial" pitchFamily="34" charset="0"/>
+                <a:ea typeface="Arial" pitchFamily="34" charset="-122"/>
+                <a:cs typeface="Arial" pitchFamily="34" charset="-120"/>
+              </a:rPr>
+              <a:t>DIE ANATOMIE</a:t>
             </a:r>
             <a:endParaRPr lang="en-US" sz="1150" dirty="0"/>
           </a:p>
@@ -4698,48 +4800,82 @@
                 <a:ea typeface="Arial" pitchFamily="34" charset="-122"/>
                 <a:cs typeface="Arial" pitchFamily="34" charset="-120"/>
               </a:rPr>
-              <a:t>So arbeitet ihr</a:t>
+              <a:t>Alles zusammen in einem Befehl</a:t>
             </a:r>
             <a:endParaRPr lang="en-US" sz="2600" dirty="0"/>
           </a:p>
         </p:txBody>
       </p:sp>
-      <p:sp>
-        <p:nvSpPr>
-          <p:cNvPr id="5" name="Text 3"/>
-          <p:cNvSpPr/>
-          <p:nvPr/>
-        </p:nvSpPr>
-        <p:spPr>
-          <a:xfrm>
-            <a:off x="566928" y="1700784"/>
-            <a:ext cx="8010144" cy="1828800"/>
-          </a:xfrm>
-          <a:prstGeom prst="rect">
-            <a:avLst/>
-          </a:prstGeom>
-          <a:noFill/>
-          <a:ln/>
-        </p:spPr>
-        <p:txBody>
-          <a:bodyPr wrap="square" lIns="0" tIns="0" rIns="0" bIns="0" rtlCol="0" anchor="t"/>
-          <a:lstStyle/>
-          <a:p>
-            <a:pPr marL="254000" indent="-254000">
-              <a:lnSpc>
-                <a:spcPct val="100000"/>
-              </a:lnSpc>
-              <a:spcAft>
-                <a:spcPts val="900"/>
-              </a:spcAft>
-              <a:buClr>
-                <a:srgbClr val="0F7C86"/>
-              </a:buClr>
-              <a:buSzPct val="100000"/>
-              <a:buChar char="▸"/>
-            </a:pPr>
-            <a:r>
-              <a:rPr lang="en-US" sz="1250" dirty="0">
+      <p:pic>
+        <p:nvPicPr>
+          <p:cNvPr id="5" name="Image 0" descr="/Users/jacobmenge/Desktop/kurs-26.2b-orga/folienwerkstatt/assets/diagramme/run-anatomie.png">    </p:cNvPr>
+          <p:cNvPicPr>
+            <a:picLocks noChangeAspect="1"/>
+          </p:cNvPicPr>
+          <p:nvPr/>
+        </p:nvPicPr>
+        <p:blipFill>
+          <a:blip r:embed="rId1"/>
+          <a:stretch>
+            <a:fillRect/>
+          </a:stretch>
+        </p:blipFill>
+        <p:spPr>
+          <a:xfrm>
+            <a:off x="566928" y="1737360"/>
+            <a:ext cx="8010144" cy="1737360"/>
+          </a:xfrm>
+          <a:prstGeom prst="rect">
+            <a:avLst/>
+          </a:prstGeom>
+        </p:spPr>
+      </p:pic>
+      <p:sp>
+        <p:nvSpPr>
+          <p:cNvPr id="6" name="Shape 3"/>
+          <p:cNvSpPr/>
+          <p:nvPr/>
+        </p:nvSpPr>
+        <p:spPr>
+          <a:xfrm>
+            <a:off x="566928" y="3931920"/>
+            <a:ext cx="32004" cy="256032"/>
+          </a:xfrm>
+          <a:prstGeom prst="rect">
+            <a:avLst/>
+          </a:prstGeom>
+          <a:solidFill>
+            <a:srgbClr val="0F7C86"/>
+          </a:solidFill>
+          <a:ln/>
+        </p:spPr>
+      </p:sp>
+      <p:sp>
+        <p:nvSpPr>
+          <p:cNvPr id="7" name="Text 4"/>
+          <p:cNvSpPr/>
+          <p:nvPr/>
+        </p:nvSpPr>
+        <p:spPr>
+          <a:xfrm>
+            <a:off x="749808" y="3886200"/>
+            <a:ext cx="7827264" cy="402336"/>
+          </a:xfrm>
+          <a:prstGeom prst="rect">
+            <a:avLst/>
+          </a:prstGeom>
+          <a:noFill/>
+          <a:ln/>
+        </p:spPr>
+        <p:txBody>
+          <a:bodyPr wrap="square" lIns="0" tIns="0" rIns="0" bIns="0" rtlCol="0" anchor="ctr"/>
+          <a:lstStyle/>
+          <a:p>
+            <a:pPr indent="0" marL="0">
+              <a:buNone/>
+            </a:pPr>
+            <a:r>
+              <a:rPr lang="en-US" sz="1200" b="1" dirty="0">
                 <a:solidFill>
                   <a:srgbClr val="434A63"/>
                 </a:solidFill>
@@ -4747,244 +4883,15 @@
                 <a:ea typeface="Arial" pitchFamily="34" charset="-122"/>
                 <a:cs typeface="Arial" pitchFamily="34" charset="-120"/>
               </a:rPr>
-              <a:t>Gleiche Gruppen, eine Person teilt den Bildschirm, alle tippen selbst mit.</a:t>
-            </a:r>
-            <a:endParaRPr lang="en-US" sz="1250" dirty="0"/>
-          </a:p>
-          <a:p>
-            <a:pPr marL="254000" indent="-254000">
-              <a:lnSpc>
-                <a:spcPct val="100000"/>
-              </a:lnSpc>
-              <a:spcAft>
-                <a:spcPts val="900"/>
-              </a:spcAft>
-              <a:buClr>
-                <a:srgbClr val="0F7C86"/>
-              </a:buClr>
-              <a:buSzPct val="100000"/>
-              <a:buChar char="▸"/>
-            </a:pPr>
-            <a:r>
-              <a:rPr lang="en-US" sz="1250" dirty="0">
-                <a:solidFill>
-                  <a:srgbClr val="434A63"/>
-                </a:solidFill>
-                <a:latin typeface="Arial" pitchFamily="34" charset="0"/>
-                <a:ea typeface="Arial" pitchFamily="34" charset="-122"/>
-                <a:cs typeface="Arial" pitchFamily="34" charset="-120"/>
-              </a:rPr>
-              <a:t>Jeder Befehl steht mit erwarteter Ausgabe in der Anleitung. Windows nutzt die PowerShell, Unterschiede stehen in Tabs.</a:t>
-            </a:r>
-            <a:endParaRPr lang="en-US" sz="1250" dirty="0"/>
-          </a:p>
-          <a:p>
-            <a:pPr marL="254000" indent="-254000">
-              <a:lnSpc>
-                <a:spcPct val="100000"/>
-              </a:lnSpc>
-              <a:spcAft>
-                <a:spcPts val="900"/>
-              </a:spcAft>
-              <a:buClr>
-                <a:srgbClr val="0F7C86"/>
-              </a:buClr>
-              <a:buSzPct val="100000"/>
-              <a:buChar char="▸"/>
-            </a:pPr>
-            <a:r>
-              <a:rPr lang="en-US" sz="1250" dirty="0">
-                <a:solidFill>
-                  <a:srgbClr val="434A63"/>
-                </a:solidFill>
-                <a:latin typeface="Arial" pitchFamily="34" charset="0"/>
-                <a:ea typeface="Arial" pitchFamily="34" charset="-122"/>
-                <a:cs typeface="Arial" pitchFamily="34" charset="-120"/>
-              </a:rPr>
-              <a:t>Teil 1 bis 3 sind das Ziel, der Härtetest ist der Beweis.</a:t>
-            </a:r>
-            <a:endParaRPr lang="en-US" sz="1250" dirty="0"/>
-          </a:p>
-          <a:p>
-            <a:pPr marL="254000" indent="-254000">
-              <a:lnSpc>
-                <a:spcPct val="100000"/>
-              </a:lnSpc>
-              <a:spcAft>
-                <a:spcPts val="900"/>
-              </a:spcAft>
-              <a:buClr>
-                <a:srgbClr val="0F7C86"/>
-              </a:buClr>
-              <a:buSzPct val="100000"/>
-              <a:buChar char="▸"/>
-            </a:pPr>
-            <a:r>
-              <a:rPr lang="en-US" sz="1250" dirty="0">
-                <a:solidFill>
-                  <a:srgbClr val="434A63"/>
-                </a:solidFill>
-                <a:latin typeface="Arial" pitchFamily="34" charset="0"/>
-                <a:ea typeface="Arial" pitchFamily="34" charset="-122"/>
-                <a:cs typeface="Arial" pitchFamily="34" charset="-120"/>
-              </a:rPr>
-              <a:t>Schnell durch? Am Ende der Seite warten vier Bonus-Experimente.</a:t>
-            </a:r>
-            <a:endParaRPr lang="en-US" sz="1250" dirty="0"/>
-          </a:p>
-          <a:p>
-            <a:pPr marL="254000" indent="-254000">
-              <a:lnSpc>
-                <a:spcPct val="100000"/>
-              </a:lnSpc>
-              <a:spcAft>
-                <a:spcPts val="900"/>
-              </a:spcAft>
-              <a:buClr>
-                <a:srgbClr val="0F7C86"/>
-              </a:buClr>
-              <a:buSzPct val="100000"/>
-              <a:buChar char="▸"/>
-            </a:pPr>
-            <a:r>
-              <a:rPr lang="en-US" sz="1250" dirty="0">
-                <a:solidFill>
-                  <a:srgbClr val="434A63"/>
-                </a:solidFill>
-                <a:latin typeface="Arial" pitchFamily="34" charset="0"/>
-                <a:ea typeface="Arial" pitchFamily="34" charset="-122"/>
-                <a:cs typeface="Arial" pitchFamily="34" charset="-120"/>
-              </a:rPr>
-              <a:t>Wenn es klemmt: erst die Stolpersteine-Seite, dann um Hilfe bitten.</a:t>
-            </a:r>
-            <a:endParaRPr lang="en-US" sz="1250" dirty="0"/>
-          </a:p>
-        </p:txBody>
-      </p:sp>
-      <p:sp>
-        <p:nvSpPr>
-          <p:cNvPr id="6" name="Shape 4"/>
-          <p:cNvSpPr/>
-          <p:nvPr/>
-        </p:nvSpPr>
-        <p:spPr>
-          <a:xfrm>
-            <a:off x="566928" y="3602736"/>
-            <a:ext cx="8010144" cy="822960"/>
-          </a:xfrm>
-          <a:prstGeom prst="rect">
-            <a:avLst/>
-          </a:prstGeom>
-          <a:solidFill>
-            <a:srgbClr val="F5F6FC"/>
-          </a:solidFill>
-          <a:ln/>
-        </p:spPr>
-      </p:sp>
-      <p:sp>
-        <p:nvSpPr>
-          <p:cNvPr id="7" name="Shape 5"/>
-          <p:cNvSpPr/>
-          <p:nvPr/>
-        </p:nvSpPr>
-        <p:spPr>
-          <a:xfrm>
-            <a:off x="566928" y="3602736"/>
-            <a:ext cx="41148" cy="822960"/>
-          </a:xfrm>
-          <a:prstGeom prst="rect">
-            <a:avLst/>
-          </a:prstGeom>
-          <a:solidFill>
-            <a:srgbClr val="9A6310"/>
-          </a:solidFill>
-          <a:ln/>
-        </p:spPr>
-      </p:sp>
-      <p:sp>
-        <p:nvSpPr>
-          <p:cNvPr id="8" name="Text 6"/>
-          <p:cNvSpPr/>
-          <p:nvPr/>
-        </p:nvSpPr>
-        <p:spPr>
-          <a:xfrm>
-            <a:off x="804672" y="3749040"/>
-            <a:ext cx="7607808" cy="242062"/>
-          </a:xfrm>
-          <a:prstGeom prst="rect">
-            <a:avLst/>
-          </a:prstGeom>
-          <a:noFill/>
-          <a:ln/>
-        </p:spPr>
-        <p:txBody>
-          <a:bodyPr wrap="square" lIns="0" tIns="0" rIns="0" bIns="0" rtlCol="0" anchor="t"/>
-          <a:lstStyle/>
-          <a:p>
-            <a:pPr indent="0" marL="0">
-              <a:buNone/>
-            </a:pPr>
-            <a:r>
-              <a:rPr lang="en-US" sz="1300" b="1" dirty="0">
-                <a:solidFill>
-                  <a:srgbClr val="272E52"/>
-                </a:solidFill>
-                <a:latin typeface="Arial" pitchFamily="34" charset="0"/>
-                <a:ea typeface="Arial" pitchFamily="34" charset="-122"/>
-                <a:cs typeface="Arial" pitchFamily="34" charset="-120"/>
-              </a:rPr>
-              <a:t>Um 20:05 sind alle wieder hier</a:t>
-            </a:r>
-            <a:endParaRPr lang="en-US" sz="1300" dirty="0"/>
-          </a:p>
-        </p:txBody>
-      </p:sp>
-      <p:sp>
-        <p:nvSpPr>
-          <p:cNvPr id="9" name="Text 7"/>
-          <p:cNvSpPr/>
-          <p:nvPr/>
-        </p:nvSpPr>
-        <p:spPr>
-          <a:xfrm>
-            <a:off x="804672" y="4036822"/>
-            <a:ext cx="7607808" cy="270002"/>
-          </a:xfrm>
-          <a:prstGeom prst="rect">
-            <a:avLst/>
-          </a:prstGeom>
-          <a:noFill/>
-          <a:ln/>
-        </p:spPr>
-        <p:txBody>
-          <a:bodyPr wrap="square" lIns="0" tIns="0" rIns="0" bIns="0" rtlCol="0" anchor="t"/>
-          <a:lstStyle/>
-          <a:p>
-            <a:pPr indent="0" marL="0">
-              <a:lnSpc>
-                <a:spcPct val="92000"/>
-              </a:lnSpc>
-              <a:buNone/>
-            </a:pPr>
-            <a:r>
-              <a:rPr lang="en-US" sz="1150" dirty="0">
-                <a:solidFill>
-                  <a:srgbClr val="434A63"/>
-                </a:solidFill>
-                <a:latin typeface="Arial" pitchFamily="34" charset="0"/>
-                <a:ea typeface="Arial" pitchFamily="34" charset="-122"/>
-                <a:cs typeface="Arial" pitchFamily="34" charset="-120"/>
-              </a:rPr>
-              <a:t>Jede Gruppe berichtet ihren Härtetest: Tabelle weg oder Tabelle noch da? Und woran lag es?</a:t>
-            </a:r>
-            <a:endParaRPr lang="en-US" sz="1150" dirty="0"/>
-          </a:p>
-        </p:txBody>
-      </p:sp>
-      <p:sp>
-        <p:nvSpPr>
-          <p:cNvPr id="10" name="Shape 8"/>
+              <a:t>Lest den Befehl einmal laut von links nach rechts. Wenn jeder Baustein einen Sinn ergibt, seid ihr bereit für die Übung.</a:t>
+            </a:r>
+            <a:endParaRPr lang="en-US" sz="1200" dirty="0"/>
+          </a:p>
+        </p:txBody>
+      </p:sp>
+      <p:sp>
+        <p:nvSpPr>
+          <p:cNvPr id="8" name="Shape 5"/>
           <p:cNvSpPr/>
           <p:nvPr/>
         </p:nvSpPr>
@@ -5007,7 +4914,7 @@
       </p:sp>
       <p:sp>
         <p:nvSpPr>
-          <p:cNvPr id="11" name="Text 9"/>
+          <p:cNvPr id="9" name="Text 6"/>
           <p:cNvSpPr/>
           <p:nvPr/>
         </p:nvSpPr>
@@ -5038,7 +4945,7 @@
                 <a:ea typeface="Arial" pitchFamily="34" charset="-122"/>
                 <a:cs typeface="Arial" pitchFamily="34" charset="-120"/>
               </a:rPr>
-              <a:t>Breakout</a:t>
+              <a:t>Konfiguration von außen</a:t>
             </a:r>
             <a:endParaRPr lang="en-US" sz="1050" dirty="0"/>
           </a:p>
@@ -5046,7 +4953,7 @@
       </p:sp>
       <p:sp>
         <p:nvSpPr>
-          <p:cNvPr id="12" name="Text 10"/>
+          <p:cNvPr id="10" name="Text 7"/>
           <p:cNvSpPr/>
           <p:nvPr/>
         </p:nvSpPr>
@@ -5077,7 +4984,7 @@
                 <a:ea typeface="Arial" pitchFamily="34" charset="-122"/>
                 <a:cs typeface="Arial" pitchFamily="34" charset="-120"/>
               </a:rPr>
-              <a:t>12/14</a:t>
+              <a:t>13/20</a:t>
             </a:r>
             <a:endParaRPr lang="en-US" sz="1050" dirty="0"/>
           </a:p>
@@ -5168,7 +5075,7 @@
                 <a:ea typeface="Arial" pitchFamily="34" charset="-122"/>
                 <a:cs typeface="Arial" pitchFamily="34" charset="-120"/>
               </a:rPr>
-              <a:t>AUSWERTUNG · 30 MINUTEN</a:t>
+              <a:t>ZUM NACHSCHLAGEN</a:t>
             </a:r>
             <a:endParaRPr lang="en-US" sz="1150" dirty="0"/>
           </a:p>
@@ -5207,465 +5114,39 @@
                 <a:ea typeface="Arial" pitchFamily="34" charset="-122"/>
                 <a:cs typeface="Arial" pitchFamily="34" charset="-120"/>
               </a:rPr>
-              <a:t>Der Härtetest</a:t>
+              <a:t>Die Befehle des Abends</a:t>
             </a:r>
             <a:endParaRPr lang="en-US" sz="2600" dirty="0"/>
           </a:p>
         </p:txBody>
       </p:sp>
-      <p:sp>
-        <p:nvSpPr>
-          <p:cNvPr id="5" name="Shape 3"/>
-          <p:cNvSpPr/>
-          <p:nvPr/>
-        </p:nvSpPr>
-        <p:spPr>
-          <a:xfrm>
-            <a:off x="438912" y="1810512"/>
-            <a:ext cx="8266176" cy="365760"/>
-          </a:xfrm>
-          <a:prstGeom prst="rect">
-            <a:avLst/>
-          </a:prstGeom>
-          <a:solidFill>
-            <a:srgbClr val="F5F6FC"/>
-          </a:solidFill>
-          <a:ln/>
-        </p:spPr>
-      </p:sp>
-      <p:sp>
-        <p:nvSpPr>
-          <p:cNvPr id="6" name="Text 4"/>
-          <p:cNvSpPr/>
-          <p:nvPr/>
-        </p:nvSpPr>
-        <p:spPr>
-          <a:xfrm>
-            <a:off x="566928" y="1810512"/>
-            <a:ext cx="548640" cy="365760"/>
-          </a:xfrm>
-          <a:prstGeom prst="rect">
-            <a:avLst/>
-          </a:prstGeom>
-          <a:noFill/>
-          <a:ln/>
-        </p:spPr>
-        <p:txBody>
-          <a:bodyPr wrap="square" lIns="0" tIns="0" rIns="0" bIns="0" rtlCol="0" anchor="ctr"/>
-          <a:lstStyle/>
-          <a:p>
-            <a:pPr indent="0" marL="0">
-              <a:buNone/>
-            </a:pPr>
-            <a:r>
-              <a:rPr lang="en-US" sz="1200" b="1" dirty="0">
-                <a:solidFill>
-                  <a:srgbClr val="0F7C86"/>
-                </a:solidFill>
-                <a:latin typeface="Courier New" pitchFamily="34" charset="0"/>
-                <a:ea typeface="Courier New" pitchFamily="34" charset="-122"/>
-                <a:cs typeface="Courier New" pitchFamily="34" charset="-120"/>
-              </a:rPr>
-              <a:t>1</a:t>
-            </a:r>
-            <a:endParaRPr lang="en-US" sz="1200" dirty="0"/>
-          </a:p>
-        </p:txBody>
-      </p:sp>
-      <p:sp>
-        <p:nvSpPr>
-          <p:cNvPr id="7" name="Text 5"/>
-          <p:cNvSpPr/>
-          <p:nvPr/>
-        </p:nvSpPr>
-        <p:spPr>
-          <a:xfrm>
-            <a:off x="1115568" y="1810512"/>
-            <a:ext cx="7461504" cy="365760"/>
-          </a:xfrm>
-          <a:prstGeom prst="rect">
-            <a:avLst/>
-          </a:prstGeom>
-          <a:noFill/>
-          <a:ln/>
-        </p:spPr>
-        <p:txBody>
-          <a:bodyPr wrap="square" lIns="0" tIns="0" rIns="0" bIns="0" rtlCol="0" anchor="ctr"/>
-          <a:lstStyle/>
-          <a:p>
-            <a:pPr indent="0" marL="0">
-              <a:buNone/>
-            </a:pPr>
-            <a:r>
-              <a:rPr lang="en-US" sz="1200" dirty="0">
-                <a:solidFill>
-                  <a:srgbClr val="434A63"/>
-                </a:solidFill>
-                <a:latin typeface="Arial" pitchFamily="34" charset="0"/>
-                <a:ea typeface="Arial" pitchFamily="34" charset="-122"/>
-                <a:cs typeface="Arial" pitchFamily="34" charset="-120"/>
-              </a:rPr>
-              <a:t>Der Härtetest: Container gelöscht und neu gestartet. Hat eure Tabelle überlebt?</a:t>
-            </a:r>
-            <a:endParaRPr lang="en-US" sz="1200" dirty="0"/>
-          </a:p>
-        </p:txBody>
-      </p:sp>
-      <p:sp>
-        <p:nvSpPr>
-          <p:cNvPr id="8" name="Text 6"/>
-          <p:cNvSpPr/>
-          <p:nvPr/>
-        </p:nvSpPr>
-        <p:spPr>
-          <a:xfrm>
-            <a:off x="566928" y="2176272"/>
-            <a:ext cx="548640" cy="365760"/>
-          </a:xfrm>
-          <a:prstGeom prst="rect">
-            <a:avLst/>
-          </a:prstGeom>
-          <a:noFill/>
-          <a:ln/>
-        </p:spPr>
-        <p:txBody>
-          <a:bodyPr wrap="square" lIns="0" tIns="0" rIns="0" bIns="0" rtlCol="0" anchor="ctr"/>
-          <a:lstStyle/>
-          <a:p>
-            <a:pPr indent="0" marL="0">
-              <a:buNone/>
-            </a:pPr>
-            <a:r>
-              <a:rPr lang="en-US" sz="1200" b="1" dirty="0">
-                <a:solidFill>
-                  <a:srgbClr val="0F7C86"/>
-                </a:solidFill>
-                <a:latin typeface="Courier New" pitchFamily="34" charset="0"/>
-                <a:ea typeface="Courier New" pitchFamily="34" charset="-122"/>
-                <a:cs typeface="Courier New" pitchFamily="34" charset="-120"/>
-              </a:rPr>
-              <a:t>2</a:t>
-            </a:r>
-            <a:endParaRPr lang="en-US" sz="1200" dirty="0"/>
-          </a:p>
-        </p:txBody>
-      </p:sp>
-      <p:sp>
-        <p:nvSpPr>
-          <p:cNvPr id="9" name="Text 7"/>
-          <p:cNvSpPr/>
-          <p:nvPr/>
-        </p:nvSpPr>
-        <p:spPr>
-          <a:xfrm>
-            <a:off x="1115568" y="2176272"/>
-            <a:ext cx="7461504" cy="365760"/>
-          </a:xfrm>
-          <a:prstGeom prst="rect">
-            <a:avLst/>
-          </a:prstGeom>
-          <a:noFill/>
-          <a:ln/>
-        </p:spPr>
-        <p:txBody>
-          <a:bodyPr wrap="square" lIns="0" tIns="0" rIns="0" bIns="0" rtlCol="0" anchor="ctr"/>
-          <a:lstStyle/>
-          <a:p>
-            <a:pPr indent="0" marL="0">
-              <a:buNone/>
-            </a:pPr>
-            <a:r>
-              <a:rPr lang="en-US" sz="1200" dirty="0">
-                <a:solidFill>
-                  <a:srgbClr val="434A63"/>
-                </a:solidFill>
-                <a:latin typeface="Arial" pitchFamily="34" charset="0"/>
-                <a:ea typeface="Arial" pitchFamily="34" charset="-122"/>
-                <a:cs typeface="Arial" pitchFamily="34" charset="-120"/>
-              </a:rPr>
-              <a:t>docker volume ls: Welche Volumes liegen jetzt auf euren Rechnern?</a:t>
-            </a:r>
-            <a:endParaRPr lang="en-US" sz="1200" dirty="0"/>
-          </a:p>
-        </p:txBody>
-      </p:sp>
-      <p:sp>
-        <p:nvSpPr>
-          <p:cNvPr id="10" name="Shape 8"/>
-          <p:cNvSpPr/>
-          <p:nvPr/>
-        </p:nvSpPr>
-        <p:spPr>
-          <a:xfrm>
-            <a:off x="438912" y="2542032"/>
-            <a:ext cx="8266176" cy="365760"/>
-          </a:xfrm>
-          <a:prstGeom prst="rect">
-            <a:avLst/>
-          </a:prstGeom>
-          <a:solidFill>
-            <a:srgbClr val="F5F6FC"/>
-          </a:solidFill>
-          <a:ln/>
-        </p:spPr>
-      </p:sp>
-      <p:sp>
-        <p:nvSpPr>
-          <p:cNvPr id="11" name="Text 9"/>
-          <p:cNvSpPr/>
-          <p:nvPr/>
-        </p:nvSpPr>
-        <p:spPr>
-          <a:xfrm>
-            <a:off x="566928" y="2542032"/>
-            <a:ext cx="548640" cy="365760"/>
-          </a:xfrm>
-          <a:prstGeom prst="rect">
-            <a:avLst/>
-          </a:prstGeom>
-          <a:noFill/>
-          <a:ln/>
-        </p:spPr>
-        <p:txBody>
-          <a:bodyPr wrap="square" lIns="0" tIns="0" rIns="0" bIns="0" rtlCol="0" anchor="ctr"/>
-          <a:lstStyle/>
-          <a:p>
-            <a:pPr indent="0" marL="0">
-              <a:buNone/>
-            </a:pPr>
-            <a:r>
-              <a:rPr lang="en-US" sz="1200" b="1" dirty="0">
-                <a:solidFill>
-                  <a:srgbClr val="0F7C86"/>
-                </a:solidFill>
-                <a:latin typeface="Courier New" pitchFamily="34" charset="0"/>
-                <a:ea typeface="Courier New" pitchFamily="34" charset="-122"/>
-                <a:cs typeface="Courier New" pitchFamily="34" charset="-120"/>
-              </a:rPr>
-              <a:t>3</a:t>
-            </a:r>
-            <a:endParaRPr lang="en-US" sz="1200" dirty="0"/>
-          </a:p>
-        </p:txBody>
-      </p:sp>
-      <p:sp>
-        <p:nvSpPr>
-          <p:cNvPr id="12" name="Text 10"/>
-          <p:cNvSpPr/>
-          <p:nvPr/>
-        </p:nvSpPr>
-        <p:spPr>
-          <a:xfrm>
-            <a:off x="1115568" y="2542032"/>
-            <a:ext cx="7461504" cy="365760"/>
-          </a:xfrm>
-          <a:prstGeom prst="rect">
-            <a:avLst/>
-          </a:prstGeom>
-          <a:noFill/>
-          <a:ln/>
-        </p:spPr>
-        <p:txBody>
-          <a:bodyPr wrap="square" lIns="0" tIns="0" rIns="0" bIns="0" rtlCol="0" anchor="ctr"/>
-          <a:lstStyle/>
-          <a:p>
-            <a:pPr indent="0" marL="0">
-              <a:buNone/>
-            </a:pPr>
-            <a:r>
-              <a:rPr lang="en-US" sz="1200" dirty="0">
-                <a:solidFill>
-                  <a:srgbClr val="434A63"/>
-                </a:solidFill>
-                <a:latin typeface="Arial" pitchFamily="34" charset="0"/>
-                <a:ea typeface="Arial" pitchFamily="34" charset="-122"/>
-                <a:cs typeface="Arial" pitchFamily="34" charset="-120"/>
-              </a:rPr>
-              <a:t>Die Netz-Frage: Woher kennt Adminer die Adresse der Datenbank?</a:t>
-            </a:r>
-            <a:endParaRPr lang="en-US" sz="1200" dirty="0"/>
-          </a:p>
-        </p:txBody>
-      </p:sp>
-      <p:sp>
-        <p:nvSpPr>
-          <p:cNvPr id="13" name="Text 11"/>
-          <p:cNvSpPr/>
-          <p:nvPr/>
-        </p:nvSpPr>
-        <p:spPr>
-          <a:xfrm>
-            <a:off x="566928" y="2907792"/>
-            <a:ext cx="548640" cy="365760"/>
-          </a:xfrm>
-          <a:prstGeom prst="rect">
-            <a:avLst/>
-          </a:prstGeom>
-          <a:noFill/>
-          <a:ln/>
-        </p:spPr>
-        <p:txBody>
-          <a:bodyPr wrap="square" lIns="0" tIns="0" rIns="0" bIns="0" rtlCol="0" anchor="ctr"/>
-          <a:lstStyle/>
-          <a:p>
-            <a:pPr indent="0" marL="0">
-              <a:buNone/>
-            </a:pPr>
-            <a:r>
-              <a:rPr lang="en-US" sz="1200" b="1" dirty="0">
-                <a:solidFill>
-                  <a:srgbClr val="0F7C86"/>
-                </a:solidFill>
-                <a:latin typeface="Courier New" pitchFamily="34" charset="0"/>
-                <a:ea typeface="Courier New" pitchFamily="34" charset="-122"/>
-                <a:cs typeface="Courier New" pitchFamily="34" charset="-120"/>
-              </a:rPr>
-              <a:t>4</a:t>
-            </a:r>
-            <a:endParaRPr lang="en-US" sz="1200" dirty="0"/>
-          </a:p>
-        </p:txBody>
-      </p:sp>
-      <p:sp>
-        <p:nvSpPr>
-          <p:cNvPr id="14" name="Text 12"/>
-          <p:cNvSpPr/>
-          <p:nvPr/>
-        </p:nvSpPr>
-        <p:spPr>
-          <a:xfrm>
-            <a:off x="1115568" y="2907792"/>
-            <a:ext cx="7461504" cy="365760"/>
-          </a:xfrm>
-          <a:prstGeom prst="rect">
-            <a:avLst/>
-          </a:prstGeom>
-          <a:noFill/>
-          <a:ln/>
-        </p:spPr>
-        <p:txBody>
-          <a:bodyPr wrap="square" lIns="0" tIns="0" rIns="0" bIns="0" rtlCol="0" anchor="ctr"/>
-          <a:lstStyle/>
-          <a:p>
-            <a:pPr indent="0" marL="0">
-              <a:buNone/>
-            </a:pPr>
-            <a:r>
-              <a:rPr lang="en-US" sz="1200" dirty="0">
-                <a:solidFill>
-                  <a:srgbClr val="434A63"/>
-                </a:solidFill>
-                <a:latin typeface="Arial" pitchFamily="34" charset="0"/>
-                <a:ea typeface="Arial" pitchFamily="34" charset="-122"/>
-                <a:cs typeface="Arial" pitchFamily="34" charset="-120"/>
-              </a:rPr>
-              <a:t>Die Sicherheits-Frage: Warum hat die Datenbank kein -p, der Adminer aber schon?</a:t>
-            </a:r>
-            <a:endParaRPr lang="en-US" sz="1200" dirty="0"/>
-          </a:p>
-        </p:txBody>
-      </p:sp>
-      <p:sp>
-        <p:nvSpPr>
-          <p:cNvPr id="15" name="Shape 13"/>
-          <p:cNvSpPr/>
-          <p:nvPr/>
-        </p:nvSpPr>
-        <p:spPr>
-          <a:xfrm>
-            <a:off x="438912" y="3273552"/>
-            <a:ext cx="8266176" cy="365760"/>
-          </a:xfrm>
-          <a:prstGeom prst="rect">
-            <a:avLst/>
-          </a:prstGeom>
-          <a:solidFill>
-            <a:srgbClr val="F5F6FC"/>
-          </a:solidFill>
-          <a:ln/>
-        </p:spPr>
-      </p:sp>
-      <p:sp>
-        <p:nvSpPr>
-          <p:cNvPr id="16" name="Text 14"/>
-          <p:cNvSpPr/>
-          <p:nvPr/>
-        </p:nvSpPr>
-        <p:spPr>
-          <a:xfrm>
-            <a:off x="566928" y="3273552"/>
-            <a:ext cx="548640" cy="365760"/>
-          </a:xfrm>
-          <a:prstGeom prst="rect">
-            <a:avLst/>
-          </a:prstGeom>
-          <a:noFill/>
-          <a:ln/>
-        </p:spPr>
-        <p:txBody>
-          <a:bodyPr wrap="square" lIns="0" tIns="0" rIns="0" bIns="0" rtlCol="0" anchor="ctr"/>
-          <a:lstStyle/>
-          <a:p>
-            <a:pPr indent="0" marL="0">
-              <a:buNone/>
-            </a:pPr>
-            <a:r>
-              <a:rPr lang="en-US" sz="1200" b="1" dirty="0">
-                <a:solidFill>
-                  <a:srgbClr val="0F7C86"/>
-                </a:solidFill>
-                <a:latin typeface="Courier New" pitchFamily="34" charset="0"/>
-                <a:ea typeface="Courier New" pitchFamily="34" charset="-122"/>
-                <a:cs typeface="Courier New" pitchFamily="34" charset="-120"/>
-              </a:rPr>
-              <a:t>5</a:t>
-            </a:r>
-            <a:endParaRPr lang="en-US" sz="1200" dirty="0"/>
-          </a:p>
-        </p:txBody>
-      </p:sp>
-      <p:sp>
-        <p:nvSpPr>
-          <p:cNvPr id="17" name="Text 15"/>
-          <p:cNvSpPr/>
-          <p:nvPr/>
-        </p:nvSpPr>
-        <p:spPr>
-          <a:xfrm>
-            <a:off x="1115568" y="3273552"/>
-            <a:ext cx="7461504" cy="365760"/>
-          </a:xfrm>
-          <a:prstGeom prst="rect">
-            <a:avLst/>
-          </a:prstGeom>
-          <a:noFill/>
-          <a:ln/>
-        </p:spPr>
-        <p:txBody>
-          <a:bodyPr wrap="square" lIns="0" tIns="0" rIns="0" bIns="0" rtlCol="0" anchor="ctr"/>
-          <a:lstStyle/>
-          <a:p>
-            <a:pPr indent="0" marL="0">
-              <a:buNone/>
-            </a:pPr>
-            <a:r>
-              <a:rPr lang="en-US" sz="1200" dirty="0">
-                <a:solidFill>
-                  <a:srgbClr val="434A63"/>
-                </a:solidFill>
-                <a:latin typeface="Arial" pitchFamily="34" charset="0"/>
-                <a:ea typeface="Arial" pitchFamily="34" charset="-122"/>
-                <a:cs typeface="Arial" pitchFamily="34" charset="-120"/>
-              </a:rPr>
-              <a:t>Zählt eure Befehle von Volume bis Adminer. Merkt euch die Zahl für Mittwoch.</a:t>
-            </a:r>
-            <a:endParaRPr lang="en-US" sz="1200" dirty="0"/>
-          </a:p>
-        </p:txBody>
-      </p:sp>
-      <p:sp>
-        <p:nvSpPr>
-          <p:cNvPr id="18" name="Shape 16"/>
+      <p:pic>
+        <p:nvPicPr>
+          <p:cNvPr id="5" name="Image 0" descr="/Users/jacobmenge/Desktop/kurs-26.2b-orga/folienwerkstatt/assets/diagramme/befehle-aufbau.png">    </p:cNvPr>
+          <p:cNvPicPr>
+            <a:picLocks noChangeAspect="1"/>
+          </p:cNvPicPr>
+          <p:nvPr/>
+        </p:nvPicPr>
+        <p:blipFill>
+          <a:blip r:embed="rId1"/>
+          <a:stretch>
+            <a:fillRect/>
+          </a:stretch>
+        </p:blipFill>
+        <p:spPr>
+          <a:xfrm>
+            <a:off x="566928" y="1463040"/>
+            <a:ext cx="8010144" cy="2414016"/>
+          </a:xfrm>
+          <a:prstGeom prst="rect">
+            <a:avLst/>
+          </a:prstGeom>
+        </p:spPr>
+      </p:pic>
+      <p:sp>
+        <p:nvSpPr>
+          <p:cNvPr id="6" name="Shape 3"/>
           <p:cNvSpPr/>
           <p:nvPr/>
         </p:nvSpPr>
@@ -5685,7 +5166,7 @@
       </p:sp>
       <p:sp>
         <p:nvSpPr>
-          <p:cNvPr id="19" name="Text 17"/>
+          <p:cNvPr id="7" name="Text 4"/>
           <p:cNvSpPr/>
           <p:nvPr/>
         </p:nvSpPr>
@@ -5716,7 +5197,7 @@
                 <a:ea typeface="Arial" pitchFamily="34" charset="-122"/>
                 <a:cs typeface="Arial" pitchFamily="34" charset="-120"/>
               </a:rPr>
-              <a:t>Frage 5 ist der Cliffhanger: Mittwoch schrumpfen alle diese Befehle auf einen einzigen zusammen.</a:t>
+              <a:t>Diese sechs plus der eine docker run von eben sind der komplette Werkzeugkasten für die Übung. Alles steht auch auf der Kursseite.</a:t>
             </a:r>
             <a:endParaRPr lang="en-US" sz="1200" dirty="0"/>
           </a:p>
@@ -5724,7 +5205,7 @@
       </p:sp>
       <p:sp>
         <p:nvSpPr>
-          <p:cNvPr id="20" name="Shape 18"/>
+          <p:cNvPr id="8" name="Shape 5"/>
           <p:cNvSpPr/>
           <p:nvPr/>
         </p:nvSpPr>
@@ -5747,7 +5228,7 @@
       </p:sp>
       <p:sp>
         <p:nvSpPr>
-          <p:cNvPr id="21" name="Text 19"/>
+          <p:cNvPr id="9" name="Text 6"/>
           <p:cNvSpPr/>
           <p:nvPr/>
         </p:nvSpPr>
@@ -5778,7 +5259,7 @@
                 <a:ea typeface="Arial" pitchFamily="34" charset="-122"/>
                 <a:cs typeface="Arial" pitchFamily="34" charset="-120"/>
               </a:rPr>
-              <a:t>Auswertung</a:t>
+              <a:t>Konfiguration von außen</a:t>
             </a:r>
             <a:endParaRPr lang="en-US" sz="1050" dirty="0"/>
           </a:p>
@@ -5786,7 +5267,7 @@
       </p:sp>
       <p:sp>
         <p:nvSpPr>
-          <p:cNvPr id="22" name="Text 20"/>
+          <p:cNvPr id="10" name="Text 7"/>
           <p:cNvSpPr/>
           <p:nvPr/>
         </p:nvSpPr>
@@ -5817,7 +5298,7 @@
                 <a:ea typeface="Arial" pitchFamily="34" charset="-122"/>
                 <a:cs typeface="Arial" pitchFamily="34" charset="-120"/>
               </a:rPr>
-              <a:t>13/14</a:t>
+              <a:t>14/20</a:t>
             </a:r>
             <a:endParaRPr lang="en-US" sz="1050" dirty="0"/>
           </a:p>
@@ -5863,67 +5344,107 @@
         </p:nvSpPr>
         <p:spPr>
           <a:xfrm>
-            <a:off x="566928" y="201168"/>
+            <a:off x="6355080" y="0"/>
+            <a:ext cx="2788920" cy="5143500"/>
+          </a:xfrm>
+          <a:prstGeom prst="rect">
+            <a:avLst/>
+          </a:prstGeom>
+          <a:solidFill>
+            <a:srgbClr val="FBF2E3"/>
+          </a:solidFill>
+          <a:ln/>
+        </p:spPr>
+      </p:sp>
+      <p:sp>
+        <p:nvSpPr>
+          <p:cNvPr id="3" name="Shape 1"/>
+          <p:cNvSpPr/>
+          <p:nvPr/>
+        </p:nvSpPr>
+        <p:spPr>
+          <a:xfrm>
+            <a:off x="6355080" y="0"/>
+            <a:ext cx="45720" cy="5143500"/>
+          </a:xfrm>
+          <a:prstGeom prst="rect">
+            <a:avLst/>
+          </a:prstGeom>
+          <a:solidFill>
+            <a:srgbClr val="9A6310"/>
+          </a:solidFill>
+          <a:ln/>
+        </p:spPr>
+      </p:sp>
+      <p:sp>
+        <p:nvSpPr>
+          <p:cNvPr id="4" name="Text 2"/>
+          <p:cNvSpPr/>
+          <p:nvPr/>
+        </p:nvSpPr>
+        <p:spPr>
+          <a:xfrm>
+            <a:off x="6629400" y="1463040"/>
+            <a:ext cx="2194560" cy="1737360"/>
+          </a:xfrm>
+          <a:prstGeom prst="rect">
+            <a:avLst/>
+          </a:prstGeom>
+          <a:noFill/>
+          <a:ln/>
+        </p:spPr>
+        <p:txBody>
+          <a:bodyPr wrap="square" lIns="0" tIns="0" rIns="0" bIns="0" rtlCol="0" anchor="ctr"/>
+          <a:lstStyle/>
+          <a:p>
+            <a:pPr algn="ctr" indent="0" marL="0">
+              <a:buNone/>
+            </a:pPr>
+            <a:r>
+              <a:rPr lang="en-US" sz="8400" b="1" dirty="0">
+                <a:solidFill>
+                  <a:srgbClr val="9A6310"/>
+                </a:solidFill>
+                <a:latin typeface="Arial" pitchFamily="34" charset="0"/>
+                <a:ea typeface="Arial" pitchFamily="34" charset="-122"/>
+                <a:cs typeface="Arial" pitchFamily="34" charset="-120"/>
+              </a:rPr>
+              <a:t>02</a:t>
+            </a:r>
+            <a:endParaRPr lang="en-US" sz="8400" dirty="0"/>
+          </a:p>
+        </p:txBody>
+      </p:sp>
+      <p:sp>
+        <p:nvSpPr>
+          <p:cNvPr id="5" name="Shape 3"/>
+          <p:cNvSpPr/>
+          <p:nvPr/>
+        </p:nvSpPr>
+        <p:spPr>
+          <a:xfrm>
+            <a:off x="566928" y="1883664"/>
             <a:ext cx="475488" cy="50292"/>
           </a:xfrm>
           <a:prstGeom prst="rect">
             <a:avLst/>
           </a:prstGeom>
           <a:solidFill>
-            <a:srgbClr val="0F7C86"/>
+            <a:srgbClr val="9A6310"/>
           </a:solidFill>
           <a:ln/>
         </p:spPr>
       </p:sp>
       <p:sp>
         <p:nvSpPr>
-          <p:cNvPr id="3" name="Text 1"/>
-          <p:cNvSpPr/>
-          <p:nvPr/>
-        </p:nvSpPr>
-        <p:spPr>
-          <a:xfrm>
-            <a:off x="566928" y="384048"/>
-            <a:ext cx="8010144" cy="237744"/>
-          </a:xfrm>
-          <a:prstGeom prst="rect">
-            <a:avLst/>
-          </a:prstGeom>
-          <a:noFill/>
-          <a:ln/>
-        </p:spPr>
-        <p:txBody>
-          <a:bodyPr wrap="square" lIns="0" tIns="0" rIns="0" bIns="0" rtlCol="0" anchor="ctr"/>
-          <a:lstStyle/>
-          <a:p>
-            <a:pPr indent="0" marL="0">
-              <a:buNone/>
-            </a:pPr>
-            <a:r>
-              <a:rPr lang="en-US" sz="1150" b="1" spc="180" kern="0" dirty="0">
-                <a:solidFill>
-                  <a:srgbClr val="0F7C86"/>
-                </a:solidFill>
-                <a:latin typeface="Arial" pitchFamily="34" charset="0"/>
-                <a:ea typeface="Arial" pitchFamily="34" charset="-122"/>
-                <a:cs typeface="Arial" pitchFamily="34" charset="-120"/>
-              </a:rPr>
-              <a:t>AUSBLICK</a:t>
-            </a:r>
-            <a:endParaRPr lang="en-US" sz="1150" dirty="0"/>
-          </a:p>
-        </p:txBody>
-      </p:sp>
-      <p:sp>
-        <p:nvSpPr>
-          <p:cNvPr id="4" name="Text 2"/>
-          <p:cNvSpPr/>
-          <p:nvPr/>
-        </p:nvSpPr>
-        <p:spPr>
-          <a:xfrm>
-            <a:off x="566928" y="731520"/>
-            <a:ext cx="8010144" cy="603504"/>
+          <p:cNvPr id="6" name="Text 4"/>
+          <p:cNvSpPr/>
+          <p:nvPr/>
+        </p:nvSpPr>
+        <p:spPr>
+          <a:xfrm>
+            <a:off x="566928" y="2084832"/>
+            <a:ext cx="5394960" cy="868680"/>
           </a:xfrm>
           <a:prstGeom prst="rect">
             <a:avLst/>
@@ -5939,7 +5460,7 @@
               <a:buNone/>
             </a:pPr>
             <a:r>
-              <a:rPr lang="en-US" sz="2600" b="1" dirty="0">
+              <a:rPr lang="en-US" sz="3000" b="1" dirty="0">
                 <a:solidFill>
                   <a:srgbClr val="272E52"/>
                 </a:solidFill>
@@ -5947,22 +5468,22 @@
                 <a:ea typeface="Arial" pitchFamily="34" charset="-122"/>
                 <a:cs typeface="Arial" pitchFamily="34" charset="-120"/>
               </a:rPr>
-              <a:t>Bis Mittwoch</a:t>
-            </a:r>
-            <a:endParaRPr lang="en-US" sz="2600" dirty="0"/>
-          </a:p>
-        </p:txBody>
-      </p:sp>
-      <p:sp>
-        <p:nvSpPr>
-          <p:cNvPr id="5" name="Text 3"/>
-          <p:cNvSpPr/>
-          <p:nvPr/>
-        </p:nvSpPr>
-        <p:spPr>
-          <a:xfrm>
-            <a:off x="566928" y="1444752"/>
-            <a:ext cx="8010144" cy="438912"/>
+              <a:t>Datenbank mit Gedächtnis</a:t>
+            </a:r>
+            <a:endParaRPr lang="en-US" sz="3000" dirty="0"/>
+          </a:p>
+        </p:txBody>
+      </p:sp>
+      <p:sp>
+        <p:nvSpPr>
+          <p:cNvPr id="7" name="Text 5"/>
+          <p:cNvSpPr/>
+          <p:nvPr/>
+        </p:nvSpPr>
+        <p:spPr>
+          <a:xfrm>
+            <a:off x="566928" y="3017520"/>
+            <a:ext cx="5394960" cy="548640"/>
           </a:xfrm>
           <a:prstGeom prst="rect">
             <a:avLst/>
@@ -5978,7 +5499,7 @@
               <a:buNone/>
             </a:pPr>
             <a:r>
-              <a:rPr lang="en-US" sz="1300" dirty="0">
+              <a:rPr lang="en-US" sz="1350" dirty="0">
                 <a:solidFill>
                   <a:srgbClr val="5C6377"/>
                 </a:solidFill>
@@ -5986,532 +5507,9 @@
                 <a:ea typeface="Arial" pitchFamily="34" charset="-122"/>
                 <a:cs typeface="Arial" pitchFamily="34" charset="-120"/>
               </a:rPr>
-              <a:t>Mittwoch verschwindet die Zettelwirtschaft: Der ganze Stack wandert in eine einzige Datei.</a:t>
-            </a:r>
-            <a:endParaRPr lang="en-US" sz="1300" dirty="0"/>
-          </a:p>
-        </p:txBody>
-      </p:sp>
-      <p:sp>
-        <p:nvSpPr>
-          <p:cNvPr id="6" name="Shape 4"/>
-          <p:cNvSpPr/>
-          <p:nvPr/>
-        </p:nvSpPr>
-        <p:spPr>
-          <a:xfrm>
-            <a:off x="566928" y="1975104"/>
-            <a:ext cx="2523744" cy="1920240"/>
-          </a:xfrm>
-          <a:prstGeom prst="rect">
-            <a:avLst/>
-          </a:prstGeom>
-          <a:solidFill>
-            <a:srgbClr val="F5F6FC"/>
-          </a:solidFill>
-          <a:ln/>
-        </p:spPr>
-      </p:sp>
-      <p:sp>
-        <p:nvSpPr>
-          <p:cNvPr id="7" name="Shape 5"/>
-          <p:cNvSpPr/>
-          <p:nvPr/>
-        </p:nvSpPr>
-        <p:spPr>
-          <a:xfrm>
-            <a:off x="566928" y="1975104"/>
-            <a:ext cx="41148" cy="1920240"/>
-          </a:xfrm>
-          <a:prstGeom prst="rect">
-            <a:avLst/>
-          </a:prstGeom>
-          <a:solidFill>
-            <a:srgbClr val="0F7C86"/>
-          </a:solidFill>
-          <a:ln/>
-        </p:spPr>
-      </p:sp>
-      <p:sp>
-        <p:nvSpPr>
-          <p:cNvPr id="8" name="Text 6"/>
-          <p:cNvSpPr/>
-          <p:nvPr/>
-        </p:nvSpPr>
-        <p:spPr>
-          <a:xfrm>
-            <a:off x="804672" y="2121408"/>
-            <a:ext cx="2121408" cy="256032"/>
-          </a:xfrm>
-          <a:prstGeom prst="rect">
-            <a:avLst/>
-          </a:prstGeom>
-          <a:noFill/>
-          <a:ln/>
-        </p:spPr>
-        <p:txBody>
-          <a:bodyPr wrap="square" lIns="0" tIns="0" rIns="0" bIns="0" rtlCol="0" anchor="t"/>
-          <a:lstStyle/>
-          <a:p>
-            <a:pPr indent="0" marL="0">
-              <a:buNone/>
-            </a:pPr>
-            <a:r>
-              <a:rPr lang="en-US" sz="1300" b="1" dirty="0">
-                <a:solidFill>
-                  <a:srgbClr val="272E52"/>
-                </a:solidFill>
-                <a:latin typeface="Arial" pitchFamily="34" charset="0"/>
-                <a:ea typeface="Arial" pitchFamily="34" charset="-122"/>
-                <a:cs typeface="Arial" pitchFamily="34" charset="-120"/>
-              </a:rPr>
-              <a:t>Docker Compose</a:t>
-            </a:r>
-            <a:endParaRPr lang="en-US" sz="1300" dirty="0"/>
-          </a:p>
-        </p:txBody>
-      </p:sp>
-      <p:sp>
-        <p:nvSpPr>
-          <p:cNvPr id="9" name="Text 7"/>
-          <p:cNvSpPr/>
-          <p:nvPr/>
-        </p:nvSpPr>
-        <p:spPr>
-          <a:xfrm>
-            <a:off x="804672" y="2423160"/>
-            <a:ext cx="2121408" cy="1353312"/>
-          </a:xfrm>
-          <a:prstGeom prst="rect">
-            <a:avLst/>
-          </a:prstGeom>
-          <a:noFill/>
-          <a:ln/>
-        </p:spPr>
-        <p:txBody>
-          <a:bodyPr wrap="square" lIns="0" tIns="0" rIns="0" bIns="0" rtlCol="0" anchor="t"/>
-          <a:lstStyle/>
-          <a:p>
-            <a:pPr indent="0" marL="0">
-              <a:lnSpc>
-                <a:spcPct val="92000"/>
-              </a:lnSpc>
-              <a:buNone/>
-            </a:pPr>
-            <a:r>
-              <a:rPr lang="en-US" sz="1150" dirty="0">
-                <a:solidFill>
-                  <a:srgbClr val="434A63"/>
-                </a:solidFill>
-                <a:latin typeface="Arial" pitchFamily="34" charset="0"/>
-                <a:ea typeface="Arial" pitchFamily="34" charset="-122"/>
-                <a:cs typeface="Arial" pitchFamily="34" charset="-120"/>
-              </a:rPr>
-              <a:t>Eine Datei beschreibt Volume, Netz und beide Container. Ein Befehl startet alles zusammen.</a:t>
-            </a:r>
-            <a:endParaRPr lang="en-US" sz="1150" dirty="0"/>
-          </a:p>
-        </p:txBody>
-      </p:sp>
-      <p:sp>
-        <p:nvSpPr>
-          <p:cNvPr id="10" name="Shape 8"/>
-          <p:cNvSpPr/>
-          <p:nvPr/>
-        </p:nvSpPr>
-        <p:spPr>
-          <a:xfrm>
-            <a:off x="3310128" y="1975104"/>
-            <a:ext cx="2523744" cy="1920240"/>
-          </a:xfrm>
-          <a:prstGeom prst="rect">
-            <a:avLst/>
-          </a:prstGeom>
-          <a:solidFill>
-            <a:srgbClr val="F5F6FC"/>
-          </a:solidFill>
-          <a:ln/>
-        </p:spPr>
-      </p:sp>
-      <p:sp>
-        <p:nvSpPr>
-          <p:cNvPr id="11" name="Shape 9"/>
-          <p:cNvSpPr/>
-          <p:nvPr/>
-        </p:nvSpPr>
-        <p:spPr>
-          <a:xfrm>
-            <a:off x="3310128" y="1975104"/>
-            <a:ext cx="41148" cy="1920240"/>
-          </a:xfrm>
-          <a:prstGeom prst="rect">
-            <a:avLst/>
-          </a:prstGeom>
-          <a:solidFill>
-            <a:srgbClr val="0F7C86"/>
-          </a:solidFill>
-          <a:ln/>
-        </p:spPr>
-      </p:sp>
-      <p:sp>
-        <p:nvSpPr>
-          <p:cNvPr id="12" name="Text 10"/>
-          <p:cNvSpPr/>
-          <p:nvPr/>
-        </p:nvSpPr>
-        <p:spPr>
-          <a:xfrm>
-            <a:off x="3547872" y="2121408"/>
-            <a:ext cx="2121408" cy="256032"/>
-          </a:xfrm>
-          <a:prstGeom prst="rect">
-            <a:avLst/>
-          </a:prstGeom>
-          <a:noFill/>
-          <a:ln/>
-        </p:spPr>
-        <p:txBody>
-          <a:bodyPr wrap="square" lIns="0" tIns="0" rIns="0" bIns="0" rtlCol="0" anchor="t"/>
-          <a:lstStyle/>
-          <a:p>
-            <a:pPr indent="0" marL="0">
-              <a:buNone/>
-            </a:pPr>
-            <a:r>
-              <a:rPr lang="en-US" sz="1300" b="1" dirty="0">
-                <a:solidFill>
-                  <a:srgbClr val="272E52"/>
-                </a:solidFill>
-                <a:latin typeface="Arial" pitchFamily="34" charset="0"/>
-                <a:ea typeface="Arial" pitchFamily="34" charset="-122"/>
-                <a:cs typeface="Arial" pitchFamily="34" charset="-120"/>
-              </a:rPr>
-              <a:t>Euer Vorteil</a:t>
-            </a:r>
-            <a:endParaRPr lang="en-US" sz="1300" dirty="0"/>
-          </a:p>
-        </p:txBody>
-      </p:sp>
-      <p:sp>
-        <p:nvSpPr>
-          <p:cNvPr id="13" name="Text 11"/>
-          <p:cNvSpPr/>
-          <p:nvPr/>
-        </p:nvSpPr>
-        <p:spPr>
-          <a:xfrm>
-            <a:off x="3547872" y="2423160"/>
-            <a:ext cx="2121408" cy="1353312"/>
-          </a:xfrm>
-          <a:prstGeom prst="rect">
-            <a:avLst/>
-          </a:prstGeom>
-          <a:noFill/>
-          <a:ln/>
-        </p:spPr>
-        <p:txBody>
-          <a:bodyPr wrap="square" lIns="0" tIns="0" rIns="0" bIns="0" rtlCol="0" anchor="t"/>
-          <a:lstStyle/>
-          <a:p>
-            <a:pPr indent="0" marL="0">
-              <a:lnSpc>
-                <a:spcPct val="92000"/>
-              </a:lnSpc>
-              <a:buNone/>
-            </a:pPr>
-            <a:r>
-              <a:rPr lang="en-US" sz="1150" dirty="0">
-                <a:solidFill>
-                  <a:srgbClr val="434A63"/>
-                </a:solidFill>
-                <a:latin typeface="Arial" pitchFamily="34" charset="0"/>
-                <a:ea typeface="Arial" pitchFamily="34" charset="-122"/>
-                <a:cs typeface="Arial" pitchFamily="34" charset="-120"/>
-              </a:rPr>
-              <a:t>Ihr kennt jede Zeile dieser Datei schon, denn heute habt ihr alles darin von Hand gebaut.</a:t>
-            </a:r>
-            <a:endParaRPr lang="en-US" sz="1150" dirty="0"/>
-          </a:p>
-        </p:txBody>
-      </p:sp>
-      <p:sp>
-        <p:nvSpPr>
-          <p:cNvPr id="14" name="Shape 12"/>
-          <p:cNvSpPr/>
-          <p:nvPr/>
-        </p:nvSpPr>
-        <p:spPr>
-          <a:xfrm>
-            <a:off x="6053328" y="1975104"/>
-            <a:ext cx="2523744" cy="1920240"/>
-          </a:xfrm>
-          <a:prstGeom prst="rect">
-            <a:avLst/>
-          </a:prstGeom>
-          <a:solidFill>
-            <a:srgbClr val="F5F6FC"/>
-          </a:solidFill>
-          <a:ln/>
-        </p:spPr>
-      </p:sp>
-      <p:sp>
-        <p:nvSpPr>
-          <p:cNvPr id="15" name="Shape 13"/>
-          <p:cNvSpPr/>
-          <p:nvPr/>
-        </p:nvSpPr>
-        <p:spPr>
-          <a:xfrm>
-            <a:off x="6053328" y="1975104"/>
-            <a:ext cx="41148" cy="1920240"/>
-          </a:xfrm>
-          <a:prstGeom prst="rect">
-            <a:avLst/>
-          </a:prstGeom>
-          <a:solidFill>
-            <a:srgbClr val="0F7C86"/>
-          </a:solidFill>
-          <a:ln/>
-        </p:spPr>
-      </p:sp>
-      <p:sp>
-        <p:nvSpPr>
-          <p:cNvPr id="16" name="Text 14"/>
-          <p:cNvSpPr/>
-          <p:nvPr/>
-        </p:nvSpPr>
-        <p:spPr>
-          <a:xfrm>
-            <a:off x="6291072" y="2121408"/>
-            <a:ext cx="2121408" cy="256032"/>
-          </a:xfrm>
-          <a:prstGeom prst="rect">
-            <a:avLst/>
-          </a:prstGeom>
-          <a:noFill/>
-          <a:ln/>
-        </p:spPr>
-        <p:txBody>
-          <a:bodyPr wrap="square" lIns="0" tIns="0" rIns="0" bIns="0" rtlCol="0" anchor="t"/>
-          <a:lstStyle/>
-          <a:p>
-            <a:pPr indent="0" marL="0">
-              <a:buNone/>
-            </a:pPr>
-            <a:r>
-              <a:rPr lang="en-US" sz="1300" b="1" dirty="0">
-                <a:solidFill>
-                  <a:srgbClr val="272E52"/>
-                </a:solidFill>
-                <a:latin typeface="Arial" pitchFamily="34" charset="0"/>
-                <a:ea typeface="Arial" pitchFamily="34" charset="-122"/>
-                <a:cs typeface="Arial" pitchFamily="34" charset="-120"/>
-              </a:rPr>
-              <a:t>Nichts vorbereiten</a:t>
-            </a:r>
-            <a:endParaRPr lang="en-US" sz="1300" dirty="0"/>
-          </a:p>
-        </p:txBody>
-      </p:sp>
-      <p:sp>
-        <p:nvSpPr>
-          <p:cNvPr id="17" name="Text 15"/>
-          <p:cNvSpPr/>
-          <p:nvPr/>
-        </p:nvSpPr>
-        <p:spPr>
-          <a:xfrm>
-            <a:off x="6291072" y="2423160"/>
-            <a:ext cx="2121408" cy="1353312"/>
-          </a:xfrm>
-          <a:prstGeom prst="rect">
-            <a:avLst/>
-          </a:prstGeom>
-          <a:noFill/>
-          <a:ln/>
-        </p:spPr>
-        <p:txBody>
-          <a:bodyPr wrap="square" lIns="0" tIns="0" rIns="0" bIns="0" rtlCol="0" anchor="t"/>
-          <a:lstStyle/>
-          <a:p>
-            <a:pPr indent="0" marL="0">
-              <a:lnSpc>
-                <a:spcPct val="92000"/>
-              </a:lnSpc>
-              <a:buNone/>
-            </a:pPr>
-            <a:r>
-              <a:rPr lang="en-US" sz="1150" dirty="0">
-                <a:solidFill>
-                  <a:srgbClr val="434A63"/>
-                </a:solidFill>
-                <a:latin typeface="Arial" pitchFamily="34" charset="0"/>
-                <a:ea typeface="Arial" pitchFamily="34" charset="-122"/>
-                <a:cs typeface="Arial" pitchFamily="34" charset="-120"/>
-              </a:rPr>
-              <a:t>Docker läuft, mehr braucht es nicht. Wer mag, wiederholt zu Hause den Härtetest.</a:t>
-            </a:r>
-            <a:endParaRPr lang="en-US" sz="1150" dirty="0"/>
-          </a:p>
-        </p:txBody>
-      </p:sp>
-      <p:sp>
-        <p:nvSpPr>
-          <p:cNvPr id="18" name="Shape 16"/>
-          <p:cNvSpPr/>
-          <p:nvPr/>
-        </p:nvSpPr>
-        <p:spPr>
-          <a:xfrm>
-            <a:off x="566928" y="4160520"/>
-            <a:ext cx="32004" cy="256032"/>
-          </a:xfrm>
-          <a:prstGeom prst="rect">
-            <a:avLst/>
-          </a:prstGeom>
-          <a:solidFill>
-            <a:srgbClr val="0F7C86"/>
-          </a:solidFill>
-          <a:ln/>
-        </p:spPr>
-      </p:sp>
-      <p:sp>
-        <p:nvSpPr>
-          <p:cNvPr id="19" name="Text 17"/>
-          <p:cNvSpPr/>
-          <p:nvPr/>
-        </p:nvSpPr>
-        <p:spPr>
-          <a:xfrm>
-            <a:off x="749808" y="4114800"/>
-            <a:ext cx="7827264" cy="402336"/>
-          </a:xfrm>
-          <a:prstGeom prst="rect">
-            <a:avLst/>
-          </a:prstGeom>
-          <a:noFill/>
-          <a:ln/>
-        </p:spPr>
-        <p:txBody>
-          <a:bodyPr wrap="square" lIns="0" tIns="0" rIns="0" bIns="0" rtlCol="0" anchor="ctr"/>
-          <a:lstStyle/>
-          <a:p>
-            <a:pPr indent="0" marL="0">
-              <a:buNone/>
-            </a:pPr>
-            <a:r>
-              <a:rPr lang="en-US" sz="1200" b="1" dirty="0">
-                <a:solidFill>
-                  <a:srgbClr val="434A63"/>
-                </a:solidFill>
-                <a:latin typeface="Arial" pitchFamily="34" charset="0"/>
-                <a:ea typeface="Arial" pitchFamily="34" charset="-122"/>
-                <a:cs typeface="Arial" pitchFamily="34" charset="-120"/>
-              </a:rPr>
-              <a:t>Nächster Termin: Mittwoch, 16. September um 18:00 Uhr mit Docker Compose.</a:t>
-            </a:r>
-            <a:endParaRPr lang="en-US" sz="1200" dirty="0"/>
-          </a:p>
-        </p:txBody>
-      </p:sp>
-      <p:sp>
-        <p:nvSpPr>
-          <p:cNvPr id="20" name="Shape 18"/>
-          <p:cNvSpPr/>
-          <p:nvPr/>
-        </p:nvSpPr>
-        <p:spPr>
-          <a:xfrm>
-            <a:off x="566928" y="4631436"/>
-            <a:ext cx="8010144" cy="0"/>
-          </a:xfrm>
-          <a:prstGeom prst="line">
-            <a:avLst/>
-          </a:prstGeom>
-          <a:noFill/>
-          <a:ln w="9525">
-            <a:solidFill>
-              <a:srgbClr val="DFE3F0"/>
-            </a:solidFill>
-            <a:prstDash val="solid"/>
-          </a:ln>
-        </p:spPr>
-      </p:sp>
-      <p:sp>
-        <p:nvSpPr>
-          <p:cNvPr id="21" name="Text 19"/>
-          <p:cNvSpPr/>
-          <p:nvPr/>
-        </p:nvSpPr>
-        <p:spPr>
-          <a:xfrm>
-            <a:off x="566928" y="4722876"/>
-            <a:ext cx="5029200" cy="237744"/>
-          </a:xfrm>
-          <a:prstGeom prst="rect">
-            <a:avLst/>
-          </a:prstGeom>
-          <a:noFill/>
-          <a:ln/>
-        </p:spPr>
-        <p:txBody>
-          <a:bodyPr wrap="square" lIns="0" tIns="0" rIns="0" bIns="0" rtlCol="0" anchor="ctr"/>
-          <a:lstStyle/>
-          <a:p>
-            <a:pPr indent="0" marL="0">
-              <a:buNone/>
-            </a:pPr>
-            <a:r>
-              <a:rPr lang="en-US" sz="1050" spc="30" kern="0" dirty="0">
-                <a:solidFill>
-                  <a:srgbClr val="5C6377"/>
-                </a:solidFill>
-                <a:latin typeface="Arial" pitchFamily="34" charset="0"/>
-                <a:ea typeface="Arial" pitchFamily="34" charset="-122"/>
-                <a:cs typeface="Arial" pitchFamily="34" charset="-120"/>
-              </a:rPr>
-              <a:t>Abschluss</a:t>
-            </a:r>
-            <a:endParaRPr lang="en-US" sz="1050" dirty="0"/>
-          </a:p>
-        </p:txBody>
-      </p:sp>
-      <p:sp>
-        <p:nvSpPr>
-          <p:cNvPr id="22" name="Text 20"/>
-          <p:cNvSpPr/>
-          <p:nvPr/>
-        </p:nvSpPr>
-        <p:spPr>
-          <a:xfrm>
-            <a:off x="8028432" y="4722876"/>
-            <a:ext cx="548640" cy="237744"/>
-          </a:xfrm>
-          <a:prstGeom prst="rect">
-            <a:avLst/>
-          </a:prstGeom>
-          <a:noFill/>
-          <a:ln/>
-        </p:spPr>
-        <p:txBody>
-          <a:bodyPr wrap="square" lIns="0" tIns="0" rIns="0" bIns="0" rtlCol="0" anchor="ctr"/>
-          <a:lstStyle/>
-          <a:p>
-            <a:pPr algn="r" indent="0" marL="0">
-              <a:buNone/>
-            </a:pPr>
-            <a:r>
-              <a:rPr lang="en-US" sz="1050" dirty="0">
-                <a:solidFill>
-                  <a:srgbClr val="5C6377"/>
-                </a:solidFill>
-                <a:latin typeface="Arial" pitchFamily="34" charset="0"/>
-                <a:ea typeface="Arial" pitchFamily="34" charset="-122"/>
-                <a:cs typeface="Arial" pitchFamily="34" charset="-120"/>
-              </a:rPr>
-              <a:t>14/14</a:t>
-            </a:r>
-            <a:endParaRPr lang="en-US" sz="1050" dirty="0"/>
+              <a:t>60 Minuten in Gruppen: Postgres und Adminer, am Ende der Härtetest</a:t>
+            </a:r>
+            <a:endParaRPr lang="en-US" sz="1350" dirty="0"/>
           </a:p>
         </p:txBody>
       </p:sp>
@@ -6529,7 +5527,7 @@
     <p:bg>
       <p:bgPr>
         <a:solidFill>
-          <a:srgbClr val="F5F6FC"/>
+          <a:srgbClr val="FFFFFF"/>
         </a:solidFill>
       </p:bgPr>
     </p:bg>
@@ -6555,14 +5553,14 @@
         </p:nvSpPr>
         <p:spPr>
           <a:xfrm>
-            <a:off x="0" y="5015484"/>
-            <a:ext cx="9144000" cy="128016"/>
+            <a:off x="566928" y="201168"/>
+            <a:ext cx="475488" cy="50292"/>
           </a:xfrm>
           <a:prstGeom prst="rect">
             <a:avLst/>
           </a:prstGeom>
           <a:solidFill>
-            <a:srgbClr val="0F7C86"/>
+            <a:srgbClr val="9A6310"/>
           </a:solidFill>
           <a:ln/>
         </p:spPr>
@@ -6575,8 +5573,8 @@
         </p:nvSpPr>
         <p:spPr>
           <a:xfrm>
-            <a:off x="566928" y="1828800"/>
-            <a:ext cx="8010144" cy="914400"/>
+            <a:off x="566928" y="384048"/>
+            <a:ext cx="8010144" cy="237744"/>
           </a:xfrm>
           <a:prstGeom prst="rect">
             <a:avLst/>
@@ -6588,11 +5586,50 @@
           <a:bodyPr wrap="square" lIns="0" tIns="0" rIns="0" bIns="0" rtlCol="0" anchor="ctr"/>
           <a:lstStyle/>
           <a:p>
-            <a:pPr algn="ctr" indent="0" marL="0">
-              <a:buNone/>
-            </a:pPr>
-            <a:r>
-              <a:rPr lang="en-US" sz="3200" b="1" dirty="0">
+            <a:pPr indent="0" marL="0">
+              <a:buNone/>
+            </a:pPr>
+            <a:r>
+              <a:rPr lang="en-US" sz="1150" b="1" spc="180" kern="0" dirty="0">
+                <a:solidFill>
+                  <a:srgbClr val="9A6310"/>
+                </a:solidFill>
+                <a:latin typeface="Arial" pitchFamily="34" charset="0"/>
+                <a:ea typeface="Arial" pitchFamily="34" charset="-122"/>
+                <a:cs typeface="Arial" pitchFamily="34" charset="-120"/>
+              </a:rPr>
+              <a:t>KURZ VORGESTELLT</a:t>
+            </a:r>
+            <a:endParaRPr lang="en-US" sz="1150" dirty="0"/>
+          </a:p>
+        </p:txBody>
+      </p:sp>
+      <p:sp>
+        <p:nvSpPr>
+          <p:cNvPr id="4" name="Text 2"/>
+          <p:cNvSpPr/>
+          <p:nvPr/>
+        </p:nvSpPr>
+        <p:spPr>
+          <a:xfrm>
+            <a:off x="566928" y="731520"/>
+            <a:ext cx="8010144" cy="603504"/>
+          </a:xfrm>
+          <a:prstGeom prst="rect">
+            <a:avLst/>
+          </a:prstGeom>
+          <a:noFill/>
+          <a:ln/>
+        </p:spPr>
+        <p:txBody>
+          <a:bodyPr wrap="square" lIns="0" tIns="0" rIns="0" bIns="0" rtlCol="0" anchor="t"/>
+          <a:lstStyle/>
+          <a:p>
+            <a:pPr indent="0" marL="0">
+              <a:buNone/>
+            </a:pPr>
+            <a:r>
+              <a:rPr lang="en-US" sz="2600" b="1" dirty="0">
                 <a:solidFill>
                   <a:srgbClr val="272E52"/>
                 </a:solidFill>
@@ -6600,9 +5637,284 @@
                 <a:ea typeface="Arial" pitchFamily="34" charset="-122"/>
                 <a:cs typeface="Arial" pitchFamily="34" charset="-120"/>
               </a:rPr>
-              <a:t>Härtetest bestanden.</a:t>
-            </a:r>
-            <a:endParaRPr lang="en-US" sz="3200" dirty="0"/>
+              <a:t>Womit wir gleich arbeiten</a:t>
+            </a:r>
+            <a:endParaRPr lang="en-US" sz="2600" dirty="0"/>
+          </a:p>
+        </p:txBody>
+      </p:sp>
+      <p:pic>
+        <p:nvPicPr>
+          <p:cNvPr id="5" name="Image 0" descr="/Users/jacobmenge/Desktop/kurs-26.2b-orga/folienwerkstatt/assets/diagramme/steckbrief-aufbau.png">    </p:cNvPr>
+          <p:cNvPicPr>
+            <a:picLocks noChangeAspect="1"/>
+          </p:cNvPicPr>
+          <p:nvPr/>
+        </p:nvPicPr>
+        <p:blipFill>
+          <a:blip r:embed="rId1"/>
+          <a:stretch>
+            <a:fillRect/>
+          </a:stretch>
+        </p:blipFill>
+        <p:spPr>
+          <a:xfrm>
+            <a:off x="566928" y="1463040"/>
+            <a:ext cx="8010144" cy="2468880"/>
+          </a:xfrm>
+          <a:prstGeom prst="rect">
+            <a:avLst/>
+          </a:prstGeom>
+        </p:spPr>
+      </p:pic>
+      <p:sp>
+        <p:nvSpPr>
+          <p:cNvPr id="6" name="Shape 3"/>
+          <p:cNvSpPr/>
+          <p:nvPr/>
+        </p:nvSpPr>
+        <p:spPr>
+          <a:xfrm>
+            <a:off x="566928" y="4105656"/>
+            <a:ext cx="32004" cy="256032"/>
+          </a:xfrm>
+          <a:prstGeom prst="rect">
+            <a:avLst/>
+          </a:prstGeom>
+          <a:solidFill>
+            <a:srgbClr val="9A6310"/>
+          </a:solidFill>
+          <a:ln/>
+        </p:spPr>
+      </p:sp>
+      <p:sp>
+        <p:nvSpPr>
+          <p:cNvPr id="7" name="Text 4"/>
+          <p:cNvSpPr/>
+          <p:nvPr/>
+        </p:nvSpPr>
+        <p:spPr>
+          <a:xfrm>
+            <a:off x="749808" y="4059936"/>
+            <a:ext cx="7827264" cy="402336"/>
+          </a:xfrm>
+          <a:prstGeom prst="rect">
+            <a:avLst/>
+          </a:prstGeom>
+          <a:noFill/>
+          <a:ln/>
+        </p:spPr>
+        <p:txBody>
+          <a:bodyPr wrap="square" lIns="0" tIns="0" rIns="0" bIns="0" rtlCol="0" anchor="ctr"/>
+          <a:lstStyle/>
+          <a:p>
+            <a:pPr indent="0" marL="0">
+              <a:buNone/>
+            </a:pPr>
+            <a:r>
+              <a:rPr lang="en-US" sz="1200" b="1" dirty="0">
+                <a:solidFill>
+                  <a:srgbClr val="434A63"/>
+                </a:solidFill>
+                <a:latin typeface="Arial" pitchFamily="34" charset="0"/>
+                <a:ea typeface="Arial" pitchFamily="34" charset="-122"/>
+                <a:cs typeface="Arial" pitchFamily="34" charset="-120"/>
+              </a:rPr>
+              <a:t>Ihr müsst keine Datenbank-Profis werden. Es reicht zu wissen, was da läuft, warum wir es nehmen und wie man es bedient.</a:t>
+            </a:r>
+            <a:endParaRPr lang="en-US" sz="1200" dirty="0"/>
+          </a:p>
+        </p:txBody>
+      </p:sp>
+      <p:sp>
+        <p:nvSpPr>
+          <p:cNvPr id="8" name="Shape 5"/>
+          <p:cNvSpPr/>
+          <p:nvPr/>
+        </p:nvSpPr>
+        <p:spPr>
+          <a:xfrm>
+            <a:off x="566928" y="4631436"/>
+            <a:ext cx="8010144" cy="0"/>
+          </a:xfrm>
+          <a:prstGeom prst="line">
+            <a:avLst/>
+          </a:prstGeom>
+          <a:noFill/>
+          <a:ln w="9525">
+            <a:solidFill>
+              <a:srgbClr val="DFE3F0"/>
+            </a:solidFill>
+            <a:prstDash val="solid"/>
+          </a:ln>
+        </p:spPr>
+      </p:sp>
+      <p:sp>
+        <p:nvSpPr>
+          <p:cNvPr id="9" name="Text 6"/>
+          <p:cNvSpPr/>
+          <p:nvPr/>
+        </p:nvSpPr>
+        <p:spPr>
+          <a:xfrm>
+            <a:off x="566928" y="4722876"/>
+            <a:ext cx="5029200" cy="237744"/>
+          </a:xfrm>
+          <a:prstGeom prst="rect">
+            <a:avLst/>
+          </a:prstGeom>
+          <a:noFill/>
+          <a:ln/>
+        </p:spPr>
+        <p:txBody>
+          <a:bodyPr wrap="square" lIns="0" tIns="0" rIns="0" bIns="0" rtlCol="0" anchor="ctr"/>
+          <a:lstStyle/>
+          <a:p>
+            <a:pPr indent="0" marL="0">
+              <a:buNone/>
+            </a:pPr>
+            <a:r>
+              <a:rPr lang="en-US" sz="1050" spc="30" kern="0" dirty="0">
+                <a:solidFill>
+                  <a:srgbClr val="5C6377"/>
+                </a:solidFill>
+                <a:latin typeface="Arial" pitchFamily="34" charset="0"/>
+                <a:ea typeface="Arial" pitchFamily="34" charset="-122"/>
+                <a:cs typeface="Arial" pitchFamily="34" charset="-120"/>
+              </a:rPr>
+              <a:t>Breakout</a:t>
+            </a:r>
+            <a:endParaRPr lang="en-US" sz="1050" dirty="0"/>
+          </a:p>
+        </p:txBody>
+      </p:sp>
+      <p:sp>
+        <p:nvSpPr>
+          <p:cNvPr id="10" name="Text 7"/>
+          <p:cNvSpPr/>
+          <p:nvPr/>
+        </p:nvSpPr>
+        <p:spPr>
+          <a:xfrm>
+            <a:off x="8028432" y="4722876"/>
+            <a:ext cx="548640" cy="237744"/>
+          </a:xfrm>
+          <a:prstGeom prst="rect">
+            <a:avLst/>
+          </a:prstGeom>
+          <a:noFill/>
+          <a:ln/>
+        </p:spPr>
+        <p:txBody>
+          <a:bodyPr wrap="square" lIns="0" tIns="0" rIns="0" bIns="0" rtlCol="0" anchor="ctr"/>
+          <a:lstStyle/>
+          <a:p>
+            <a:pPr algn="r" indent="0" marL="0">
+              <a:buNone/>
+            </a:pPr>
+            <a:r>
+              <a:rPr lang="en-US" sz="1050" dirty="0">
+                <a:solidFill>
+                  <a:srgbClr val="5C6377"/>
+                </a:solidFill>
+                <a:latin typeface="Arial" pitchFamily="34" charset="0"/>
+                <a:ea typeface="Arial" pitchFamily="34" charset="-122"/>
+                <a:cs typeface="Arial" pitchFamily="34" charset="-120"/>
+              </a:rPr>
+              <a:t>15/20</a:t>
+            </a:r>
+            <a:endParaRPr lang="en-US" sz="1050" dirty="0"/>
+          </a:p>
+        </p:txBody>
+      </p:sp>
+    </p:spTree>
+  </p:cSld>
+  <p:clrMapOvr>
+    <a:masterClrMapping/>
+  </p:clrMapOvr>
+</p:sld>
+</file>
+
+<file path=ppt/slides/slide19.xml><?xml version="1.0" encoding="utf-8"?>
+<p:sld xmlns:a="http://schemas.openxmlformats.org/drawingml/2006/main" xmlns:r="http://schemas.openxmlformats.org/officeDocument/2006/relationships" xmlns:p="http://schemas.openxmlformats.org/presentationml/2006/main">
+  <p:cSld name="Slide 19">
+    <p:bg>
+      <p:bgPr>
+        <a:solidFill>
+          <a:srgbClr val="FFFFFF"/>
+        </a:solidFill>
+      </p:bgPr>
+    </p:bg>
+    <p:spTree>
+      <p:nvGrpSpPr>
+        <p:cNvPr id="1" name=""/>
+        <p:cNvGrpSpPr/>
+        <p:nvPr/>
+      </p:nvGrpSpPr>
+      <p:grpSpPr>
+        <a:xfrm>
+          <a:off x="0" y="0"/>
+          <a:ext cx="0" cy="0"/>
+          <a:chOff x="0" y="0"/>
+          <a:chExt cx="0" cy="0"/>
+        </a:xfrm>
+      </p:grpSpPr>
+      <p:sp>
+        <p:nvSpPr>
+          <p:cNvPr id="2" name="Shape 0"/>
+          <p:cNvSpPr/>
+          <p:nvPr/>
+        </p:nvSpPr>
+        <p:spPr>
+          <a:xfrm>
+            <a:off x="566928" y="201168"/>
+            <a:ext cx="475488" cy="50292"/>
+          </a:xfrm>
+          <a:prstGeom prst="rect">
+            <a:avLst/>
+          </a:prstGeom>
+          <a:solidFill>
+            <a:srgbClr val="9A6310"/>
+          </a:solidFill>
+          <a:ln/>
+        </p:spPr>
+      </p:sp>
+      <p:sp>
+        <p:nvSpPr>
+          <p:cNvPr id="3" name="Text 1"/>
+          <p:cNvSpPr/>
+          <p:nvPr/>
+        </p:nvSpPr>
+        <p:spPr>
+          <a:xfrm>
+            <a:off x="566928" y="384048"/>
+            <a:ext cx="8010144" cy="237744"/>
+          </a:xfrm>
+          <a:prstGeom prst="rect">
+            <a:avLst/>
+          </a:prstGeom>
+          <a:noFill/>
+          <a:ln/>
+        </p:spPr>
+        <p:txBody>
+          <a:bodyPr wrap="square" lIns="0" tIns="0" rIns="0" bIns="0" rtlCol="0" anchor="ctr"/>
+          <a:lstStyle/>
+          <a:p>
+            <a:pPr indent="0" marL="0">
+              <a:buNone/>
+            </a:pPr>
+            <a:r>
+              <a:rPr lang="en-US" sz="1150" b="1" spc="180" kern="0" dirty="0">
+                <a:solidFill>
+                  <a:srgbClr val="9A6310"/>
+                </a:solidFill>
+                <a:latin typeface="Arial" pitchFamily="34" charset="0"/>
+                <a:ea typeface="Arial" pitchFamily="34" charset="-122"/>
+                <a:cs typeface="Arial" pitchFamily="34" charset="-120"/>
+              </a:rPr>
+              <a:t>DAS ZIELBILD</a:t>
+            </a:r>
+            <a:endParaRPr lang="en-US" sz="1150" dirty="0"/>
           </a:p>
         </p:txBody>
       </p:sp>
@@ -6614,8 +5926,8 @@
         </p:nvSpPr>
         <p:spPr>
           <a:xfrm>
-            <a:off x="566928" y="2788920"/>
-            <a:ext cx="8010144" cy="457200"/>
+            <a:off x="566928" y="731520"/>
+            <a:ext cx="8010144" cy="603504"/>
           </a:xfrm>
           <a:prstGeom prst="rect">
             <a:avLst/>
@@ -6627,11 +5939,156 @@
           <a:bodyPr wrap="square" lIns="0" tIns="0" rIns="0" bIns="0" rtlCol="0" anchor="t"/>
           <a:lstStyle/>
           <a:p>
-            <a:pPr algn="ctr" indent="0" marL="0">
-              <a:buNone/>
-            </a:pPr>
-            <a:r>
-              <a:rPr lang="en-US" sz="1400" dirty="0">
+            <a:pPr indent="0" marL="0">
+              <a:buNone/>
+            </a:pPr>
+            <a:r>
+              <a:rPr lang="en-US" sz="2600" b="1" dirty="0">
+                <a:solidFill>
+                  <a:srgbClr val="272E52"/>
+                </a:solidFill>
+                <a:latin typeface="Arial" pitchFamily="34" charset="0"/>
+                <a:ea typeface="Arial" pitchFamily="34" charset="-122"/>
+                <a:cs typeface="Arial" pitchFamily="34" charset="-120"/>
+              </a:rPr>
+              <a:t>Das baut ihr gleich</a:t>
+            </a:r>
+            <a:endParaRPr lang="en-US" sz="2600" dirty="0"/>
+          </a:p>
+        </p:txBody>
+      </p:sp>
+      <p:pic>
+        <p:nvPicPr>
+          <p:cNvPr id="5" name="Image 0" descr="/Users/jacobmenge/Desktop/kurs-26.2b-orga/folienwerkstatt/assets/diagramme/ziel-bild.png">    </p:cNvPr>
+          <p:cNvPicPr>
+            <a:picLocks noChangeAspect="1"/>
+          </p:cNvPicPr>
+          <p:nvPr/>
+        </p:nvPicPr>
+        <p:blipFill>
+          <a:blip r:embed="rId1"/>
+          <a:stretch>
+            <a:fillRect/>
+          </a:stretch>
+        </p:blipFill>
+        <p:spPr>
+          <a:xfrm>
+            <a:off x="566928" y="1444752"/>
+            <a:ext cx="8010144" cy="2487168"/>
+          </a:xfrm>
+          <a:prstGeom prst="rect">
+            <a:avLst/>
+          </a:prstGeom>
+        </p:spPr>
+      </p:pic>
+      <p:sp>
+        <p:nvSpPr>
+          <p:cNvPr id="6" name="Shape 3"/>
+          <p:cNvSpPr/>
+          <p:nvPr/>
+        </p:nvSpPr>
+        <p:spPr>
+          <a:xfrm>
+            <a:off x="566928" y="4105656"/>
+            <a:ext cx="32004" cy="256032"/>
+          </a:xfrm>
+          <a:prstGeom prst="rect">
+            <a:avLst/>
+          </a:prstGeom>
+          <a:solidFill>
+            <a:srgbClr val="9A6310"/>
+          </a:solidFill>
+          <a:ln/>
+        </p:spPr>
+      </p:sp>
+      <p:sp>
+        <p:nvSpPr>
+          <p:cNvPr id="7" name="Text 4"/>
+          <p:cNvSpPr/>
+          <p:nvPr/>
+        </p:nvSpPr>
+        <p:spPr>
+          <a:xfrm>
+            <a:off x="749808" y="4059936"/>
+            <a:ext cx="7827264" cy="402336"/>
+          </a:xfrm>
+          <a:prstGeom prst="rect">
+            <a:avLst/>
+          </a:prstGeom>
+          <a:noFill/>
+          <a:ln/>
+        </p:spPr>
+        <p:txBody>
+          <a:bodyPr wrap="square" lIns="0" tIns="0" rIns="0" bIns="0" rtlCol="0" anchor="ctr"/>
+          <a:lstStyle/>
+          <a:p>
+            <a:pPr indent="0" marL="0">
+              <a:buNone/>
+            </a:pPr>
+            <a:r>
+              <a:rPr lang="en-US" sz="1200" b="1" dirty="0">
+                <a:solidFill>
+                  <a:srgbClr val="434A63"/>
+                </a:solidFill>
+                <a:latin typeface="Arial" pitchFamily="34" charset="0"/>
+                <a:ea typeface="Arial" pitchFamily="34" charset="-122"/>
+                <a:cs typeface="Arial" pitchFamily="34" charset="-120"/>
+              </a:rPr>
+              <a:t>Prägt euch die zwei Namen ein: db und adminer. Genau so heißen die Container gleich in jedem eurer Befehle.</a:t>
+            </a:r>
+            <a:endParaRPr lang="en-US" sz="1200" dirty="0"/>
+          </a:p>
+        </p:txBody>
+      </p:sp>
+      <p:sp>
+        <p:nvSpPr>
+          <p:cNvPr id="8" name="Shape 5"/>
+          <p:cNvSpPr/>
+          <p:nvPr/>
+        </p:nvSpPr>
+        <p:spPr>
+          <a:xfrm>
+            <a:off x="566928" y="4631436"/>
+            <a:ext cx="8010144" cy="0"/>
+          </a:xfrm>
+          <a:prstGeom prst="line">
+            <a:avLst/>
+          </a:prstGeom>
+          <a:noFill/>
+          <a:ln w="9525">
+            <a:solidFill>
+              <a:srgbClr val="DFE3F0"/>
+            </a:solidFill>
+            <a:prstDash val="solid"/>
+          </a:ln>
+        </p:spPr>
+      </p:sp>
+      <p:sp>
+        <p:nvSpPr>
+          <p:cNvPr id="9" name="Text 6"/>
+          <p:cNvSpPr/>
+          <p:nvPr/>
+        </p:nvSpPr>
+        <p:spPr>
+          <a:xfrm>
+            <a:off x="566928" y="4722876"/>
+            <a:ext cx="5029200" cy="237744"/>
+          </a:xfrm>
+          <a:prstGeom prst="rect">
+            <a:avLst/>
+          </a:prstGeom>
+          <a:noFill/>
+          <a:ln/>
+        </p:spPr>
+        <p:txBody>
+          <a:bodyPr wrap="square" lIns="0" tIns="0" rIns="0" bIns="0" rtlCol="0" anchor="ctr"/>
+          <a:lstStyle/>
+          <a:p>
+            <a:pPr indent="0" marL="0">
+              <a:buNone/>
+            </a:pPr>
+            <a:r>
+              <a:rPr lang="en-US" sz="1050" spc="30" kern="0" dirty="0">
                 <a:solidFill>
                   <a:srgbClr val="5C6377"/>
                 </a:solidFill>
@@ -6639,48 +6096,48 @@
                 <a:ea typeface="Arial" pitchFamily="34" charset="-122"/>
                 <a:cs typeface="Arial" pitchFamily="34" charset="-120"/>
               </a:rPr>
-              <a:t>Alle Befehle, die Erklärungen und die Stolpersteine stehen zum Nachlesen auf der Kursseite.</a:t>
-            </a:r>
-            <a:endParaRPr lang="en-US" sz="1400" dirty="0"/>
-          </a:p>
-        </p:txBody>
-      </p:sp>
-      <p:sp>
-        <p:nvSpPr>
-          <p:cNvPr id="5" name="Text 3"/>
-          <p:cNvSpPr/>
-          <p:nvPr/>
-        </p:nvSpPr>
-        <p:spPr>
-          <a:xfrm>
-            <a:off x="566928" y="3401568"/>
-            <a:ext cx="8010144" cy="457200"/>
-          </a:xfrm>
-          <a:prstGeom prst="rect">
-            <a:avLst/>
-          </a:prstGeom>
-          <a:noFill/>
-          <a:ln/>
-        </p:spPr>
-        <p:txBody>
-          <a:bodyPr wrap="square" lIns="0" tIns="0" rIns="0" bIns="0" rtlCol="0" anchor="t"/>
-          <a:lstStyle/>
-          <a:p>
-            <a:pPr algn="ctr" indent="0" marL="0">
-              <a:buNone/>
-            </a:pPr>
-            <a:r>
-              <a:rPr lang="en-US" sz="1600" b="1" dirty="0">
-                <a:solidFill>
-                  <a:srgbClr val="0F7C86"/>
-                </a:solidFill>
-                <a:latin typeface="Arial" pitchFamily="34" charset="0"/>
-                <a:ea typeface="Arial" pitchFamily="34" charset="-122"/>
-                <a:cs typeface="Arial" pitchFamily="34" charset="-120"/>
-              </a:rPr>
-              <a:t>Mittwoch, 16. September · Docker Compose</a:t>
-            </a:r>
-            <a:endParaRPr lang="en-US" sz="1600" dirty="0"/>
+              <a:t>Breakout</a:t>
+            </a:r>
+            <a:endParaRPr lang="en-US" sz="1050" dirty="0"/>
+          </a:p>
+        </p:txBody>
+      </p:sp>
+      <p:sp>
+        <p:nvSpPr>
+          <p:cNvPr id="10" name="Text 7"/>
+          <p:cNvSpPr/>
+          <p:nvPr/>
+        </p:nvSpPr>
+        <p:spPr>
+          <a:xfrm>
+            <a:off x="8028432" y="4722876"/>
+            <a:ext cx="548640" cy="237744"/>
+          </a:xfrm>
+          <a:prstGeom prst="rect">
+            <a:avLst/>
+          </a:prstGeom>
+          <a:noFill/>
+          <a:ln/>
+        </p:spPr>
+        <p:txBody>
+          <a:bodyPr wrap="square" lIns="0" tIns="0" rIns="0" bIns="0" rtlCol="0" anchor="ctr"/>
+          <a:lstStyle/>
+          <a:p>
+            <a:pPr algn="r" indent="0" marL="0">
+              <a:buNone/>
+            </a:pPr>
+            <a:r>
+              <a:rPr lang="en-US" sz="1050" dirty="0">
+                <a:solidFill>
+                  <a:srgbClr val="5C6377"/>
+                </a:solidFill>
+                <a:latin typeface="Arial" pitchFamily="34" charset="0"/>
+                <a:ea typeface="Arial" pitchFamily="34" charset="-122"/>
+                <a:cs typeface="Arial" pitchFamily="34" charset="-120"/>
+              </a:rPr>
+              <a:t>16/20</a:t>
+            </a:r>
+            <a:endParaRPr lang="en-US" sz="1050" dirty="0"/>
           </a:p>
         </p:txBody>
       </p:sp>
@@ -6984,7 +6441,7 @@
                 <a:ea typeface="Arial" pitchFamily="34" charset="-122"/>
                 <a:cs typeface="Arial" pitchFamily="34" charset="-120"/>
               </a:rPr>
-              <a:t>Volumes: Daten überleben ihren Container (mit Härtetest)</a:t>
+              <a:t>Live am Terminal: die Handgriffe von Mittwoch in acht Minuten</a:t>
             </a:r>
             <a:endParaRPr lang="en-US" sz="1050" dirty="0"/>
           </a:p>
@@ -7043,7 +6500,7 @@
                 <a:ea typeface="Courier New" pitchFamily="34" charset="-122"/>
                 <a:cs typeface="Courier New" pitchFamily="34" charset="-120"/>
               </a:rPr>
-              <a:t>18:25</a:t>
+              <a:t>18:18</a:t>
             </a:r>
             <a:endParaRPr lang="en-US" sz="1050" dirty="0"/>
           </a:p>
@@ -7082,7 +6539,7 @@
                 <a:ea typeface="Arial" pitchFamily="34" charset="-122"/>
                 <a:cs typeface="Arial" pitchFamily="34" charset="-120"/>
               </a:rPr>
-              <a:t>Container-Netze: Namen statt IP-Adressen</a:t>
+              <a:t>Volumes: Daten überleben ihren Container (mit Härtetest)</a:t>
             </a:r>
             <a:endParaRPr lang="en-US" sz="1050" dirty="0"/>
           </a:p>
@@ -7121,7 +6578,7 @@
                 <a:ea typeface="Courier New" pitchFamily="34" charset="-122"/>
                 <a:cs typeface="Courier New" pitchFamily="34" charset="-120"/>
               </a:rPr>
-              <a:t>18:35</a:t>
+              <a:t>18:30</a:t>
             </a:r>
             <a:endParaRPr lang="en-US" sz="1050" dirty="0"/>
           </a:p>
@@ -7160,7 +6617,7 @@
                 <a:ea typeface="Arial" pitchFamily="34" charset="-122"/>
                 <a:cs typeface="Arial" pitchFamily="34" charset="-120"/>
               </a:rPr>
-              <a:t>Umgebungsvariablen: Konfiguration von außen</a:t>
+              <a:t>Container-Netze: Namen statt IP-Adressen</a:t>
             </a:r>
             <a:endParaRPr lang="en-US" sz="1050" dirty="0"/>
           </a:p>
@@ -7219,7 +6676,7 @@
                 <a:ea typeface="Courier New" pitchFamily="34" charset="-122"/>
                 <a:cs typeface="Courier New" pitchFamily="34" charset="-120"/>
               </a:rPr>
-              <a:t>18:45</a:t>
+              <a:t>18:38</a:t>
             </a:r>
             <a:endParaRPr lang="en-US" sz="1050" dirty="0"/>
           </a:p>
@@ -7258,7 +6715,7 @@
                 <a:ea typeface="Arial" pitchFamily="34" charset="-122"/>
                 <a:cs typeface="Arial" pitchFamily="34" charset="-120"/>
               </a:rPr>
-              <a:t>Die Anatomie: ein Befehl bringt alles zusammen</a:t>
+              <a:t>Umgebungsvariablen und die Anatomie des einen Befehls</a:t>
             </a:r>
             <a:endParaRPr lang="en-US" sz="1050" dirty="0"/>
           </a:p>
@@ -7688,7 +7145,7 @@
                 <a:ea typeface="Arial" pitchFamily="34" charset="-122"/>
                 <a:cs typeface="Arial" pitchFamily="34" charset="-120"/>
               </a:rPr>
-              <a:t>Ausblick: aus fünf Befehlen wird eine Datei</a:t>
+              <a:t>Ausblick: aus einer Handvoll Befehlen wird eine Datei</a:t>
             </a:r>
             <a:endParaRPr lang="en-US" sz="1050" dirty="0"/>
           </a:p>
@@ -7848,9 +7305,2970 @@
                 <a:ea typeface="Arial" pitchFamily="34" charset="-122"/>
                 <a:cs typeface="Arial" pitchFamily="34" charset="-120"/>
               </a:rPr>
-              <a:t>1/14</a:t>
+              <a:t>1/20</a:t>
             </a:r>
             <a:endParaRPr lang="en-US" sz="1050" dirty="0"/>
+          </a:p>
+        </p:txBody>
+      </p:sp>
+    </p:spTree>
+  </p:cSld>
+  <p:clrMapOvr>
+    <a:masterClrMapping/>
+  </p:clrMapOvr>
+</p:sld>
+</file>
+
+<file path=ppt/slides/slide20.xml><?xml version="1.0" encoding="utf-8"?>
+<p:sld xmlns:a="http://schemas.openxmlformats.org/drawingml/2006/main" xmlns:r="http://schemas.openxmlformats.org/officeDocument/2006/relationships" xmlns:p="http://schemas.openxmlformats.org/presentationml/2006/main">
+  <p:cSld name="Slide 20">
+    <p:bg>
+      <p:bgPr>
+        <a:solidFill>
+          <a:srgbClr val="FFFFFF"/>
+        </a:solidFill>
+      </p:bgPr>
+    </p:bg>
+    <p:spTree>
+      <p:nvGrpSpPr>
+        <p:cNvPr id="1" name=""/>
+        <p:cNvGrpSpPr/>
+        <p:nvPr/>
+      </p:nvGrpSpPr>
+      <p:grpSpPr>
+        <a:xfrm>
+          <a:off x="0" y="0"/>
+          <a:ext cx="0" cy="0"/>
+          <a:chOff x="0" y="0"/>
+          <a:chExt cx="0" cy="0"/>
+        </a:xfrm>
+      </p:grpSpPr>
+      <p:sp>
+        <p:nvSpPr>
+          <p:cNvPr id="2" name="Shape 0"/>
+          <p:cNvSpPr/>
+          <p:nvPr/>
+        </p:nvSpPr>
+        <p:spPr>
+          <a:xfrm>
+            <a:off x="566928" y="201168"/>
+            <a:ext cx="475488" cy="50292"/>
+          </a:xfrm>
+          <a:prstGeom prst="rect">
+            <a:avLst/>
+          </a:prstGeom>
+          <a:solidFill>
+            <a:srgbClr val="9A6310"/>
+          </a:solidFill>
+          <a:ln/>
+        </p:spPr>
+      </p:sp>
+      <p:sp>
+        <p:nvSpPr>
+          <p:cNvPr id="3" name="Text 1"/>
+          <p:cNvSpPr/>
+          <p:nvPr/>
+        </p:nvSpPr>
+        <p:spPr>
+          <a:xfrm>
+            <a:off x="566928" y="384048"/>
+            <a:ext cx="8010144" cy="237744"/>
+          </a:xfrm>
+          <a:prstGeom prst="rect">
+            <a:avLst/>
+          </a:prstGeom>
+          <a:noFill/>
+          <a:ln/>
+        </p:spPr>
+        <p:txBody>
+          <a:bodyPr wrap="square" lIns="0" tIns="0" rIns="0" bIns="0" rtlCol="0" anchor="ctr"/>
+          <a:lstStyle/>
+          <a:p>
+            <a:pPr indent="0" marL="0">
+              <a:buNone/>
+            </a:pPr>
+            <a:r>
+              <a:rPr lang="en-US" sz="1150" b="1" spc="180" kern="0" dirty="0">
+                <a:solidFill>
+                  <a:srgbClr val="9A6310"/>
+                </a:solidFill>
+                <a:latin typeface="Arial" pitchFamily="34" charset="0"/>
+                <a:ea typeface="Arial" pitchFamily="34" charset="-122"/>
+                <a:cs typeface="Arial" pitchFamily="34" charset="-120"/>
+              </a:rPr>
+              <a:t>BREAKOUT · 60 MINUTEN</a:t>
+            </a:r>
+            <a:endParaRPr lang="en-US" sz="1150" dirty="0"/>
+          </a:p>
+        </p:txBody>
+      </p:sp>
+      <p:sp>
+        <p:nvSpPr>
+          <p:cNvPr id="4" name="Text 2"/>
+          <p:cNvSpPr/>
+          <p:nvPr/>
+        </p:nvSpPr>
+        <p:spPr>
+          <a:xfrm>
+            <a:off x="566928" y="731520"/>
+            <a:ext cx="8010144" cy="603504"/>
+          </a:xfrm>
+          <a:prstGeom prst="rect">
+            <a:avLst/>
+          </a:prstGeom>
+          <a:noFill/>
+          <a:ln/>
+        </p:spPr>
+        <p:txBody>
+          <a:bodyPr wrap="square" lIns="0" tIns="0" rIns="0" bIns="0" rtlCol="0" anchor="t"/>
+          <a:lstStyle/>
+          <a:p>
+            <a:pPr indent="0" marL="0">
+              <a:buNone/>
+            </a:pPr>
+            <a:r>
+              <a:rPr lang="en-US" sz="2600" b="1" dirty="0">
+                <a:solidFill>
+                  <a:srgbClr val="272E52"/>
+                </a:solidFill>
+                <a:latin typeface="Arial" pitchFamily="34" charset="0"/>
+                <a:ea typeface="Arial" pitchFamily="34" charset="-122"/>
+                <a:cs typeface="Arial" pitchFamily="34" charset="-120"/>
+              </a:rPr>
+              <a:t>Der Auftrag</a:t>
+            </a:r>
+            <a:endParaRPr lang="en-US" sz="2600" dirty="0"/>
+          </a:p>
+        </p:txBody>
+      </p:sp>
+      <p:sp>
+        <p:nvSpPr>
+          <p:cNvPr id="5" name="Shape 3"/>
+          <p:cNvSpPr/>
+          <p:nvPr/>
+        </p:nvSpPr>
+        <p:spPr>
+          <a:xfrm>
+            <a:off x="438912" y="1792224"/>
+            <a:ext cx="8266176" cy="329184"/>
+          </a:xfrm>
+          <a:prstGeom prst="rect">
+            <a:avLst/>
+          </a:prstGeom>
+          <a:solidFill>
+            <a:srgbClr val="F5F6FC"/>
+          </a:solidFill>
+          <a:ln/>
+        </p:spPr>
+      </p:sp>
+      <p:sp>
+        <p:nvSpPr>
+          <p:cNvPr id="6" name="Text 4"/>
+          <p:cNvSpPr/>
+          <p:nvPr/>
+        </p:nvSpPr>
+        <p:spPr>
+          <a:xfrm>
+            <a:off x="566928" y="1792224"/>
+            <a:ext cx="914400" cy="329184"/>
+          </a:xfrm>
+          <a:prstGeom prst="rect">
+            <a:avLst/>
+          </a:prstGeom>
+          <a:noFill/>
+          <a:ln/>
+        </p:spPr>
+        <p:txBody>
+          <a:bodyPr wrap="square" lIns="0" tIns="0" rIns="0" bIns="0" rtlCol="0" anchor="ctr"/>
+          <a:lstStyle/>
+          <a:p>
+            <a:pPr indent="0" marL="0">
+              <a:buNone/>
+            </a:pPr>
+            <a:r>
+              <a:rPr lang="en-US" sz="1100" b="1" dirty="0">
+                <a:solidFill>
+                  <a:srgbClr val="9A6310"/>
+                </a:solidFill>
+                <a:latin typeface="Courier New" pitchFamily="34" charset="0"/>
+                <a:ea typeface="Courier New" pitchFamily="34" charset="-122"/>
+                <a:cs typeface="Courier New" pitchFamily="34" charset="-120"/>
+              </a:rPr>
+              <a:t>Teil 1</a:t>
+            </a:r>
+            <a:endParaRPr lang="en-US" sz="1100" dirty="0"/>
+          </a:p>
+        </p:txBody>
+      </p:sp>
+      <p:sp>
+        <p:nvSpPr>
+          <p:cNvPr id="7" name="Text 5"/>
+          <p:cNvSpPr/>
+          <p:nvPr/>
+        </p:nvSpPr>
+        <p:spPr>
+          <a:xfrm>
+            <a:off x="1481328" y="1792224"/>
+            <a:ext cx="7095744" cy="329184"/>
+          </a:xfrm>
+          <a:prstGeom prst="rect">
+            <a:avLst/>
+          </a:prstGeom>
+          <a:noFill/>
+          <a:ln/>
+        </p:spPr>
+        <p:txBody>
+          <a:bodyPr wrap="square" lIns="0" tIns="0" rIns="0" bIns="0" rtlCol="0" anchor="ctr"/>
+          <a:lstStyle/>
+          <a:p>
+            <a:pPr indent="0" marL="0">
+              <a:buNone/>
+            </a:pPr>
+            <a:r>
+              <a:rPr lang="en-US" sz="1100" dirty="0">
+                <a:solidFill>
+                  <a:srgbClr val="434A63"/>
+                </a:solidFill>
+                <a:latin typeface="Arial" pitchFamily="34" charset="0"/>
+                <a:ea typeface="Arial" pitchFamily="34" charset="-122"/>
+                <a:cs typeface="Arial" pitchFamily="34" charset="-120"/>
+              </a:rPr>
+              <a:t>Postgres starten: mit Volume und den drei Variablen</a:t>
+            </a:r>
+            <a:endParaRPr lang="en-US" sz="1100" dirty="0"/>
+          </a:p>
+        </p:txBody>
+      </p:sp>
+      <p:sp>
+        <p:nvSpPr>
+          <p:cNvPr id="8" name="Text 6"/>
+          <p:cNvSpPr/>
+          <p:nvPr/>
+        </p:nvSpPr>
+        <p:spPr>
+          <a:xfrm>
+            <a:off x="566928" y="2121408"/>
+            <a:ext cx="914400" cy="329184"/>
+          </a:xfrm>
+          <a:prstGeom prst="rect">
+            <a:avLst/>
+          </a:prstGeom>
+          <a:noFill/>
+          <a:ln/>
+        </p:spPr>
+        <p:txBody>
+          <a:bodyPr wrap="square" lIns="0" tIns="0" rIns="0" bIns="0" rtlCol="0" anchor="ctr"/>
+          <a:lstStyle/>
+          <a:p>
+            <a:pPr indent="0" marL="0">
+              <a:buNone/>
+            </a:pPr>
+            <a:r>
+              <a:rPr lang="en-US" sz="1100" b="1" dirty="0">
+                <a:solidFill>
+                  <a:srgbClr val="9A6310"/>
+                </a:solidFill>
+                <a:latin typeface="Courier New" pitchFamily="34" charset="0"/>
+                <a:ea typeface="Courier New" pitchFamily="34" charset="-122"/>
+                <a:cs typeface="Courier New" pitchFamily="34" charset="-120"/>
+              </a:rPr>
+              <a:t>Teil 2</a:t>
+            </a:r>
+            <a:endParaRPr lang="en-US" sz="1100" dirty="0"/>
+          </a:p>
+        </p:txBody>
+      </p:sp>
+      <p:sp>
+        <p:nvSpPr>
+          <p:cNvPr id="9" name="Text 7"/>
+          <p:cNvSpPr/>
+          <p:nvPr/>
+        </p:nvSpPr>
+        <p:spPr>
+          <a:xfrm>
+            <a:off x="1481328" y="2121408"/>
+            <a:ext cx="7095744" cy="329184"/>
+          </a:xfrm>
+          <a:prstGeom prst="rect">
+            <a:avLst/>
+          </a:prstGeom>
+          <a:noFill/>
+          <a:ln/>
+        </p:spPr>
+        <p:txBody>
+          <a:bodyPr wrap="square" lIns="0" tIns="0" rIns="0" bIns="0" rtlCol="0" anchor="ctr"/>
+          <a:lstStyle/>
+          <a:p>
+            <a:pPr indent="0" marL="0">
+              <a:buNone/>
+            </a:pPr>
+            <a:r>
+              <a:rPr lang="en-US" sz="1100" dirty="0">
+                <a:solidFill>
+                  <a:srgbClr val="434A63"/>
+                </a:solidFill>
+                <a:latin typeface="Arial" pitchFamily="34" charset="0"/>
+                <a:ea typeface="Arial" pitchFamily="34" charset="-122"/>
+                <a:cs typeface="Arial" pitchFamily="34" charset="-120"/>
+              </a:rPr>
+              <a:t>Eigenes Netz anlegen, Adminer dazu, im Browser anmelden</a:t>
+            </a:r>
+            <a:endParaRPr lang="en-US" sz="1100" dirty="0"/>
+          </a:p>
+        </p:txBody>
+      </p:sp>
+      <p:sp>
+        <p:nvSpPr>
+          <p:cNvPr id="10" name="Shape 8"/>
+          <p:cNvSpPr/>
+          <p:nvPr/>
+        </p:nvSpPr>
+        <p:spPr>
+          <a:xfrm>
+            <a:off x="438912" y="2450592"/>
+            <a:ext cx="8266176" cy="329184"/>
+          </a:xfrm>
+          <a:prstGeom prst="rect">
+            <a:avLst/>
+          </a:prstGeom>
+          <a:solidFill>
+            <a:srgbClr val="F5F6FC"/>
+          </a:solidFill>
+          <a:ln/>
+        </p:spPr>
+      </p:sp>
+      <p:sp>
+        <p:nvSpPr>
+          <p:cNvPr id="11" name="Text 9"/>
+          <p:cNvSpPr/>
+          <p:nvPr/>
+        </p:nvSpPr>
+        <p:spPr>
+          <a:xfrm>
+            <a:off x="566928" y="2450592"/>
+            <a:ext cx="914400" cy="329184"/>
+          </a:xfrm>
+          <a:prstGeom prst="rect">
+            <a:avLst/>
+          </a:prstGeom>
+          <a:noFill/>
+          <a:ln/>
+        </p:spPr>
+        <p:txBody>
+          <a:bodyPr wrap="square" lIns="0" tIns="0" rIns="0" bIns="0" rtlCol="0" anchor="ctr"/>
+          <a:lstStyle/>
+          <a:p>
+            <a:pPr indent="0" marL="0">
+              <a:buNone/>
+            </a:pPr>
+            <a:r>
+              <a:rPr lang="en-US" sz="1100" b="1" dirty="0">
+                <a:solidFill>
+                  <a:srgbClr val="9A6310"/>
+                </a:solidFill>
+                <a:latin typeface="Courier New" pitchFamily="34" charset="0"/>
+                <a:ea typeface="Courier New" pitchFamily="34" charset="-122"/>
+                <a:cs typeface="Courier New" pitchFamily="34" charset="-120"/>
+              </a:rPr>
+              <a:t>Teil 3</a:t>
+            </a:r>
+            <a:endParaRPr lang="en-US" sz="1100" dirty="0"/>
+          </a:p>
+        </p:txBody>
+      </p:sp>
+      <p:sp>
+        <p:nvSpPr>
+          <p:cNvPr id="12" name="Text 10"/>
+          <p:cNvSpPr/>
+          <p:nvPr/>
+        </p:nvSpPr>
+        <p:spPr>
+          <a:xfrm>
+            <a:off x="1481328" y="2450592"/>
+            <a:ext cx="7095744" cy="329184"/>
+          </a:xfrm>
+          <a:prstGeom prst="rect">
+            <a:avLst/>
+          </a:prstGeom>
+          <a:noFill/>
+          <a:ln/>
+        </p:spPr>
+        <p:txBody>
+          <a:bodyPr wrap="square" lIns="0" tIns="0" rIns="0" bIns="0" rtlCol="0" anchor="ctr"/>
+          <a:lstStyle/>
+          <a:p>
+            <a:pPr indent="0" marL="0">
+              <a:buNone/>
+            </a:pPr>
+            <a:r>
+              <a:rPr lang="en-US" sz="1100" dirty="0">
+                <a:solidFill>
+                  <a:srgbClr val="434A63"/>
+                </a:solidFill>
+                <a:latin typeface="Arial" pitchFamily="34" charset="0"/>
+                <a:ea typeface="Arial" pitchFamily="34" charset="-122"/>
+                <a:cs typeface="Arial" pitchFamily="34" charset="-120"/>
+              </a:rPr>
+              <a:t>Härtetest: Tabelle anlegen, Container zerstören, wiederbeleben</a:t>
+            </a:r>
+            <a:endParaRPr lang="en-US" sz="1100" dirty="0"/>
+          </a:p>
+        </p:txBody>
+      </p:sp>
+      <p:sp>
+        <p:nvSpPr>
+          <p:cNvPr id="13" name="Text 11"/>
+          <p:cNvSpPr/>
+          <p:nvPr/>
+        </p:nvSpPr>
+        <p:spPr>
+          <a:xfrm>
+            <a:off x="566928" y="2779776"/>
+            <a:ext cx="914400" cy="329184"/>
+          </a:xfrm>
+          <a:prstGeom prst="rect">
+            <a:avLst/>
+          </a:prstGeom>
+          <a:noFill/>
+          <a:ln/>
+        </p:spPr>
+        <p:txBody>
+          <a:bodyPr wrap="square" lIns="0" tIns="0" rIns="0" bIns="0" rtlCol="0" anchor="ctr"/>
+          <a:lstStyle/>
+          <a:p>
+            <a:pPr indent="0" marL="0">
+              <a:buNone/>
+            </a:pPr>
+            <a:r>
+              <a:rPr lang="en-US" sz="1100" b="1" dirty="0">
+                <a:solidFill>
+                  <a:srgbClr val="9A6310"/>
+                </a:solidFill>
+                <a:latin typeface="Courier New" pitchFamily="34" charset="0"/>
+                <a:ea typeface="Courier New" pitchFamily="34" charset="-122"/>
+                <a:cs typeface="Courier New" pitchFamily="34" charset="-120"/>
+              </a:rPr>
+              <a:t>Bonus</a:t>
+            </a:r>
+            <a:endParaRPr lang="en-US" sz="1100" dirty="0"/>
+          </a:p>
+        </p:txBody>
+      </p:sp>
+      <p:sp>
+        <p:nvSpPr>
+          <p:cNvPr id="14" name="Text 12"/>
+          <p:cNvSpPr/>
+          <p:nvPr/>
+        </p:nvSpPr>
+        <p:spPr>
+          <a:xfrm>
+            <a:off x="1481328" y="2779776"/>
+            <a:ext cx="7095744" cy="329184"/>
+          </a:xfrm>
+          <a:prstGeom prst="rect">
+            <a:avLst/>
+          </a:prstGeom>
+          <a:noFill/>
+          <a:ln/>
+        </p:spPr>
+        <p:txBody>
+          <a:bodyPr wrap="square" lIns="0" tIns="0" rIns="0" bIns="0" rtlCol="0" anchor="ctr"/>
+          <a:lstStyle/>
+          <a:p>
+            <a:pPr indent="0" marL="0">
+              <a:buNone/>
+            </a:pPr>
+            <a:r>
+              <a:rPr lang="en-US" sz="1100" dirty="0">
+                <a:solidFill>
+                  <a:srgbClr val="434A63"/>
+                </a:solidFill>
+                <a:latin typeface="Arial" pitchFamily="34" charset="0"/>
+                <a:ea typeface="Arial" pitchFamily="34" charset="-122"/>
+                <a:cs typeface="Arial" pitchFamily="34" charset="-120"/>
+              </a:rPr>
+              <a:t>Vier Experimente: ins Volume schauen, zweiter Adminer, DNS-Beweis, Variablen prüfen</a:t>
+            </a:r>
+            <a:endParaRPr lang="en-US" sz="1100" dirty="0"/>
+          </a:p>
+        </p:txBody>
+      </p:sp>
+      <p:sp>
+        <p:nvSpPr>
+          <p:cNvPr id="15" name="Shape 13"/>
+          <p:cNvSpPr/>
+          <p:nvPr/>
+        </p:nvSpPr>
+        <p:spPr>
+          <a:xfrm>
+            <a:off x="438912" y="3108960"/>
+            <a:ext cx="8266176" cy="329184"/>
+          </a:xfrm>
+          <a:prstGeom prst="rect">
+            <a:avLst/>
+          </a:prstGeom>
+          <a:solidFill>
+            <a:srgbClr val="F5F6FC"/>
+          </a:solidFill>
+          <a:ln/>
+        </p:spPr>
+      </p:sp>
+      <p:sp>
+        <p:nvSpPr>
+          <p:cNvPr id="16" name="Text 14"/>
+          <p:cNvSpPr/>
+          <p:nvPr/>
+        </p:nvSpPr>
+        <p:spPr>
+          <a:xfrm>
+            <a:off x="566928" y="3108960"/>
+            <a:ext cx="914400" cy="329184"/>
+          </a:xfrm>
+          <a:prstGeom prst="rect">
+            <a:avLst/>
+          </a:prstGeom>
+          <a:noFill/>
+          <a:ln/>
+        </p:spPr>
+        <p:txBody>
+          <a:bodyPr wrap="square" lIns="0" tIns="0" rIns="0" bIns="0" rtlCol="0" anchor="ctr"/>
+          <a:lstStyle/>
+          <a:p>
+            <a:pPr indent="0" marL="0">
+              <a:buNone/>
+            </a:pPr>
+            <a:r>
+              <a:rPr lang="en-US" sz="1100" b="1" dirty="0">
+                <a:solidFill>
+                  <a:srgbClr val="9A6310"/>
+                </a:solidFill>
+                <a:latin typeface="Courier New" pitchFamily="34" charset="0"/>
+                <a:ea typeface="Courier New" pitchFamily="34" charset="-122"/>
+                <a:cs typeface="Courier New" pitchFamily="34" charset="-120"/>
+              </a:rPr>
+              <a:t>Notieren</a:t>
+            </a:r>
+            <a:endParaRPr lang="en-US" sz="1100" dirty="0"/>
+          </a:p>
+        </p:txBody>
+      </p:sp>
+      <p:sp>
+        <p:nvSpPr>
+          <p:cNvPr id="17" name="Text 15"/>
+          <p:cNvSpPr/>
+          <p:nvPr/>
+        </p:nvSpPr>
+        <p:spPr>
+          <a:xfrm>
+            <a:off x="1481328" y="3108960"/>
+            <a:ext cx="7095744" cy="329184"/>
+          </a:xfrm>
+          <a:prstGeom prst="rect">
+            <a:avLst/>
+          </a:prstGeom>
+          <a:noFill/>
+          <a:ln/>
+        </p:spPr>
+        <p:txBody>
+          <a:bodyPr wrap="square" lIns="0" tIns="0" rIns="0" bIns="0" rtlCol="0" anchor="ctr"/>
+          <a:lstStyle/>
+          <a:p>
+            <a:pPr indent="0" marL="0">
+              <a:buNone/>
+            </a:pPr>
+            <a:r>
+              <a:rPr lang="en-US" sz="1100" dirty="0">
+                <a:solidFill>
+                  <a:srgbClr val="434A63"/>
+                </a:solidFill>
+                <a:latin typeface="Arial" pitchFamily="34" charset="0"/>
+                <a:ea typeface="Arial" pitchFamily="34" charset="-122"/>
+                <a:cs typeface="Arial" pitchFamily="34" charset="-120"/>
+              </a:rPr>
+              <a:t>Das Ergebnis eures Härtetests und euer docker volume ls</a:t>
+            </a:r>
+            <a:endParaRPr lang="en-US" sz="1100" dirty="0"/>
+          </a:p>
+        </p:txBody>
+      </p:sp>
+      <p:sp>
+        <p:nvSpPr>
+          <p:cNvPr id="18" name="Shape 16"/>
+          <p:cNvSpPr/>
+          <p:nvPr/>
+        </p:nvSpPr>
+        <p:spPr>
+          <a:xfrm>
+            <a:off x="566928" y="3456432"/>
+            <a:ext cx="8010144" cy="1097280"/>
+          </a:xfrm>
+          <a:prstGeom prst="rect">
+            <a:avLst/>
+          </a:prstGeom>
+          <a:solidFill>
+            <a:srgbClr val="EEF0FB"/>
+          </a:solidFill>
+          <a:ln/>
+        </p:spPr>
+      </p:sp>
+      <p:sp>
+        <p:nvSpPr>
+          <p:cNvPr id="19" name="Shape 17"/>
+          <p:cNvSpPr/>
+          <p:nvPr/>
+        </p:nvSpPr>
+        <p:spPr>
+          <a:xfrm>
+            <a:off x="566928" y="3456432"/>
+            <a:ext cx="41148" cy="1097280"/>
+          </a:xfrm>
+          <a:prstGeom prst="rect">
+            <a:avLst/>
+          </a:prstGeom>
+          <a:solidFill>
+            <a:srgbClr val="9A6310"/>
+          </a:solidFill>
+          <a:ln/>
+        </p:spPr>
+      </p:sp>
+      <p:sp>
+        <p:nvSpPr>
+          <p:cNvPr id="20" name="Text 18"/>
+          <p:cNvSpPr/>
+          <p:nvPr/>
+        </p:nvSpPr>
+        <p:spPr>
+          <a:xfrm>
+            <a:off x="804672" y="3602736"/>
+            <a:ext cx="7607808" cy="242062"/>
+          </a:xfrm>
+          <a:prstGeom prst="rect">
+            <a:avLst/>
+          </a:prstGeom>
+          <a:noFill/>
+          <a:ln/>
+        </p:spPr>
+        <p:txBody>
+          <a:bodyPr wrap="square" lIns="0" tIns="0" rIns="0" bIns="0" rtlCol="0" anchor="t"/>
+          <a:lstStyle/>
+          <a:p>
+            <a:pPr indent="0" marL="0">
+              <a:buNone/>
+            </a:pPr>
+            <a:r>
+              <a:rPr lang="en-US" sz="1300" b="1" dirty="0">
+                <a:solidFill>
+                  <a:srgbClr val="272E52"/>
+                </a:solidFill>
+                <a:latin typeface="Arial" pitchFamily="34" charset="0"/>
+                <a:ea typeface="Arial" pitchFamily="34" charset="-122"/>
+                <a:cs typeface="Arial" pitchFamily="34" charset="-120"/>
+              </a:rPr>
+              <a:t>Jetzt öffnen, alles braucht ihr gleich im Raum</a:t>
+            </a:r>
+            <a:endParaRPr lang="en-US" sz="1300" dirty="0"/>
+          </a:p>
+        </p:txBody>
+      </p:sp>
+      <p:sp>
+        <p:nvSpPr>
+          <p:cNvPr id="21" name="Text 19"/>
+          <p:cNvSpPr/>
+          <p:nvPr/>
+        </p:nvSpPr>
+        <p:spPr>
+          <a:xfrm>
+            <a:off x="804672" y="3890518"/>
+            <a:ext cx="7607808" cy="544322"/>
+          </a:xfrm>
+          <a:prstGeom prst="rect">
+            <a:avLst/>
+          </a:prstGeom>
+          <a:noFill/>
+          <a:ln/>
+        </p:spPr>
+        <p:txBody>
+          <a:bodyPr wrap="square" lIns="0" tIns="0" rIns="0" bIns="0" rtlCol="0" anchor="t"/>
+          <a:lstStyle/>
+          <a:p>
+            <a:pPr indent="0" marL="0">
+              <a:lnSpc>
+                <a:spcPct val="92000"/>
+              </a:lnSpc>
+              <a:spcAft>
+                <a:spcPts val="500"/>
+              </a:spcAft>
+              <a:buNone/>
+            </a:pPr>
+            <a:r>
+              <a:rPr lang="en-US" sz="1000" dirty="0">
+                <a:solidFill>
+                  <a:srgbClr val="434A63"/>
+                </a:solidFill>
+                <a:latin typeface="Arial" pitchFamily="34" charset="0"/>
+                <a:ea typeface="Arial" pitchFamily="34" charset="-122"/>
+                <a:cs typeface="Arial" pitchFamily="34" charset="-120"/>
+              </a:rPr>
+              <a:t>Übung:  jacobmenge.github.io/kurs-unterlagen/docker-aufbau/praxis-multi-container/</a:t>
+            </a:r>
+            <a:endParaRPr lang="en-US" sz="1000" dirty="0"/>
+          </a:p>
+          <a:p>
+            <a:pPr indent="0" marL="0">
+              <a:lnSpc>
+                <a:spcPct val="92000"/>
+              </a:lnSpc>
+              <a:spcAft>
+                <a:spcPts val="500"/>
+              </a:spcAft>
+              <a:buNone/>
+            </a:pPr>
+            <a:r>
+              <a:rPr lang="en-US" sz="1000" dirty="0">
+                <a:solidFill>
+                  <a:srgbClr val="434A63"/>
+                </a:solidFill>
+                <a:latin typeface="Arial" pitchFamily="34" charset="0"/>
+                <a:ea typeface="Arial" pitchFamily="34" charset="-122"/>
+                <a:cs typeface="Arial" pitchFamily="34" charset="-120"/>
+              </a:rPr>
+              <a:t>Wenn es klemmt:  jacobmenge.github.io/kurs-unterlagen/docker-aufbau/stolpersteine/</a:t>
+            </a:r>
+            <a:endParaRPr lang="en-US" sz="1000" dirty="0"/>
+          </a:p>
+          <a:p>
+            <a:pPr indent="0" marL="0">
+              <a:lnSpc>
+                <a:spcPct val="92000"/>
+              </a:lnSpc>
+              <a:spcAft>
+                <a:spcPts val="500"/>
+              </a:spcAft>
+              <a:buNone/>
+            </a:pPr>
+            <a:r>
+              <a:rPr lang="en-US" sz="1000" dirty="0">
+                <a:solidFill>
+                  <a:srgbClr val="434A63"/>
+                </a:solidFill>
+                <a:latin typeface="Arial" pitchFamily="34" charset="0"/>
+                <a:ea typeface="Arial" pitchFamily="34" charset="-122"/>
+                <a:cs typeface="Arial" pitchFamily="34" charset="-120"/>
+              </a:rPr>
+              <a:t>Ergebnisse eintragen:  &lt;Link zum Ergebnis-Dokument hier eintragen&gt;</a:t>
+            </a:r>
+            <a:endParaRPr lang="en-US" sz="1000" dirty="0"/>
+          </a:p>
+        </p:txBody>
+      </p:sp>
+      <p:sp>
+        <p:nvSpPr>
+          <p:cNvPr id="22" name="Shape 20"/>
+          <p:cNvSpPr/>
+          <p:nvPr/>
+        </p:nvSpPr>
+        <p:spPr>
+          <a:xfrm>
+            <a:off x="566928" y="4631436"/>
+            <a:ext cx="8010144" cy="0"/>
+          </a:xfrm>
+          <a:prstGeom prst="line">
+            <a:avLst/>
+          </a:prstGeom>
+          <a:noFill/>
+          <a:ln w="9525">
+            <a:solidFill>
+              <a:srgbClr val="DFE3F0"/>
+            </a:solidFill>
+            <a:prstDash val="solid"/>
+          </a:ln>
+        </p:spPr>
+      </p:sp>
+      <p:sp>
+        <p:nvSpPr>
+          <p:cNvPr id="23" name="Text 21"/>
+          <p:cNvSpPr/>
+          <p:nvPr/>
+        </p:nvSpPr>
+        <p:spPr>
+          <a:xfrm>
+            <a:off x="566928" y="4722876"/>
+            <a:ext cx="5029200" cy="237744"/>
+          </a:xfrm>
+          <a:prstGeom prst="rect">
+            <a:avLst/>
+          </a:prstGeom>
+          <a:noFill/>
+          <a:ln/>
+        </p:spPr>
+        <p:txBody>
+          <a:bodyPr wrap="square" lIns="0" tIns="0" rIns="0" bIns="0" rtlCol="0" anchor="ctr"/>
+          <a:lstStyle/>
+          <a:p>
+            <a:pPr indent="0" marL="0">
+              <a:buNone/>
+            </a:pPr>
+            <a:r>
+              <a:rPr lang="en-US" sz="1050" spc="30" kern="0" dirty="0">
+                <a:solidFill>
+                  <a:srgbClr val="5C6377"/>
+                </a:solidFill>
+                <a:latin typeface="Arial" pitchFamily="34" charset="0"/>
+                <a:ea typeface="Arial" pitchFamily="34" charset="-122"/>
+                <a:cs typeface="Arial" pitchFamily="34" charset="-120"/>
+              </a:rPr>
+              <a:t>Breakout</a:t>
+            </a:r>
+            <a:endParaRPr lang="en-US" sz="1050" dirty="0"/>
+          </a:p>
+        </p:txBody>
+      </p:sp>
+      <p:sp>
+        <p:nvSpPr>
+          <p:cNvPr id="24" name="Text 22"/>
+          <p:cNvSpPr/>
+          <p:nvPr/>
+        </p:nvSpPr>
+        <p:spPr>
+          <a:xfrm>
+            <a:off x="8028432" y="4722876"/>
+            <a:ext cx="548640" cy="237744"/>
+          </a:xfrm>
+          <a:prstGeom prst="rect">
+            <a:avLst/>
+          </a:prstGeom>
+          <a:noFill/>
+          <a:ln/>
+        </p:spPr>
+        <p:txBody>
+          <a:bodyPr wrap="square" lIns="0" tIns="0" rIns="0" bIns="0" rtlCol="0" anchor="ctr"/>
+          <a:lstStyle/>
+          <a:p>
+            <a:pPr algn="r" indent="0" marL="0">
+              <a:buNone/>
+            </a:pPr>
+            <a:r>
+              <a:rPr lang="en-US" sz="1050" dirty="0">
+                <a:solidFill>
+                  <a:srgbClr val="5C6377"/>
+                </a:solidFill>
+                <a:latin typeface="Arial" pitchFamily="34" charset="0"/>
+                <a:ea typeface="Arial" pitchFamily="34" charset="-122"/>
+                <a:cs typeface="Arial" pitchFamily="34" charset="-120"/>
+              </a:rPr>
+              <a:t>17/20</a:t>
+            </a:r>
+            <a:endParaRPr lang="en-US" sz="1050" dirty="0"/>
+          </a:p>
+        </p:txBody>
+      </p:sp>
+    </p:spTree>
+  </p:cSld>
+  <p:clrMapOvr>
+    <a:masterClrMapping/>
+  </p:clrMapOvr>
+</p:sld>
+</file>
+
+<file path=ppt/slides/slide21.xml><?xml version="1.0" encoding="utf-8"?>
+<p:sld xmlns:a="http://schemas.openxmlformats.org/drawingml/2006/main" xmlns:r="http://schemas.openxmlformats.org/officeDocument/2006/relationships" xmlns:p="http://schemas.openxmlformats.org/presentationml/2006/main">
+  <p:cSld name="Slide 21">
+    <p:bg>
+      <p:bgPr>
+        <a:solidFill>
+          <a:srgbClr val="FFFFFF"/>
+        </a:solidFill>
+      </p:bgPr>
+    </p:bg>
+    <p:spTree>
+      <p:nvGrpSpPr>
+        <p:cNvPr id="1" name=""/>
+        <p:cNvGrpSpPr/>
+        <p:nvPr/>
+      </p:nvGrpSpPr>
+      <p:grpSpPr>
+        <a:xfrm>
+          <a:off x="0" y="0"/>
+          <a:ext cx="0" cy="0"/>
+          <a:chOff x="0" y="0"/>
+          <a:chExt cx="0" cy="0"/>
+        </a:xfrm>
+      </p:grpSpPr>
+      <p:sp>
+        <p:nvSpPr>
+          <p:cNvPr id="2" name="Shape 0"/>
+          <p:cNvSpPr/>
+          <p:nvPr/>
+        </p:nvSpPr>
+        <p:spPr>
+          <a:xfrm>
+            <a:off x="566928" y="201168"/>
+            <a:ext cx="475488" cy="50292"/>
+          </a:xfrm>
+          <a:prstGeom prst="rect">
+            <a:avLst/>
+          </a:prstGeom>
+          <a:solidFill>
+            <a:srgbClr val="9A6310"/>
+          </a:solidFill>
+          <a:ln/>
+        </p:spPr>
+      </p:sp>
+      <p:sp>
+        <p:nvSpPr>
+          <p:cNvPr id="3" name="Text 1"/>
+          <p:cNvSpPr/>
+          <p:nvPr/>
+        </p:nvSpPr>
+        <p:spPr>
+          <a:xfrm>
+            <a:off x="566928" y="384048"/>
+            <a:ext cx="8010144" cy="237744"/>
+          </a:xfrm>
+          <a:prstGeom prst="rect">
+            <a:avLst/>
+          </a:prstGeom>
+          <a:noFill/>
+          <a:ln/>
+        </p:spPr>
+        <p:txBody>
+          <a:bodyPr wrap="square" lIns="0" tIns="0" rIns="0" bIns="0" rtlCol="0" anchor="ctr"/>
+          <a:lstStyle/>
+          <a:p>
+            <a:pPr indent="0" marL="0">
+              <a:buNone/>
+            </a:pPr>
+            <a:r>
+              <a:rPr lang="en-US" sz="1150" b="1" spc="180" kern="0" dirty="0">
+                <a:solidFill>
+                  <a:srgbClr val="9A6310"/>
+                </a:solidFill>
+                <a:latin typeface="Arial" pitchFamily="34" charset="0"/>
+                <a:ea typeface="Arial" pitchFamily="34" charset="-122"/>
+                <a:cs typeface="Arial" pitchFamily="34" charset="-120"/>
+              </a:rPr>
+              <a:t>SPIELREGELN</a:t>
+            </a:r>
+            <a:endParaRPr lang="en-US" sz="1150" dirty="0"/>
+          </a:p>
+        </p:txBody>
+      </p:sp>
+      <p:sp>
+        <p:nvSpPr>
+          <p:cNvPr id="4" name="Text 2"/>
+          <p:cNvSpPr/>
+          <p:nvPr/>
+        </p:nvSpPr>
+        <p:spPr>
+          <a:xfrm>
+            <a:off x="566928" y="731520"/>
+            <a:ext cx="8010144" cy="603504"/>
+          </a:xfrm>
+          <a:prstGeom prst="rect">
+            <a:avLst/>
+          </a:prstGeom>
+          <a:noFill/>
+          <a:ln/>
+        </p:spPr>
+        <p:txBody>
+          <a:bodyPr wrap="square" lIns="0" tIns="0" rIns="0" bIns="0" rtlCol="0" anchor="t"/>
+          <a:lstStyle/>
+          <a:p>
+            <a:pPr indent="0" marL="0">
+              <a:buNone/>
+            </a:pPr>
+            <a:r>
+              <a:rPr lang="en-US" sz="2600" b="1" dirty="0">
+                <a:solidFill>
+                  <a:srgbClr val="272E52"/>
+                </a:solidFill>
+                <a:latin typeface="Arial" pitchFamily="34" charset="0"/>
+                <a:ea typeface="Arial" pitchFamily="34" charset="-122"/>
+                <a:cs typeface="Arial" pitchFamily="34" charset="-120"/>
+              </a:rPr>
+              <a:t>So arbeitet ihr</a:t>
+            </a:r>
+            <a:endParaRPr lang="en-US" sz="2600" dirty="0"/>
+          </a:p>
+        </p:txBody>
+      </p:sp>
+      <p:sp>
+        <p:nvSpPr>
+          <p:cNvPr id="5" name="Text 3"/>
+          <p:cNvSpPr/>
+          <p:nvPr/>
+        </p:nvSpPr>
+        <p:spPr>
+          <a:xfrm>
+            <a:off x="566928" y="1700784"/>
+            <a:ext cx="8010144" cy="1828800"/>
+          </a:xfrm>
+          <a:prstGeom prst="rect">
+            <a:avLst/>
+          </a:prstGeom>
+          <a:noFill/>
+          <a:ln/>
+        </p:spPr>
+        <p:txBody>
+          <a:bodyPr wrap="square" lIns="0" tIns="0" rIns="0" bIns="0" rtlCol="0" anchor="t"/>
+          <a:lstStyle/>
+          <a:p>
+            <a:pPr marL="254000" indent="-254000">
+              <a:lnSpc>
+                <a:spcPct val="100000"/>
+              </a:lnSpc>
+              <a:spcAft>
+                <a:spcPts val="900"/>
+              </a:spcAft>
+              <a:buClr>
+                <a:srgbClr val="0F7C86"/>
+              </a:buClr>
+              <a:buSzPct val="100000"/>
+              <a:buChar char="▸"/>
+            </a:pPr>
+            <a:r>
+              <a:rPr lang="en-US" sz="1250" dirty="0">
+                <a:solidFill>
+                  <a:srgbClr val="434A63"/>
+                </a:solidFill>
+                <a:latin typeface="Arial" pitchFamily="34" charset="0"/>
+                <a:ea typeface="Arial" pitchFamily="34" charset="-122"/>
+                <a:cs typeface="Arial" pitchFamily="34" charset="-120"/>
+              </a:rPr>
+              <a:t>Gleiche Gruppen, eine Person teilt den Bildschirm, alle tippen selbst mit.</a:t>
+            </a:r>
+            <a:endParaRPr lang="en-US" sz="1250" dirty="0"/>
+          </a:p>
+          <a:p>
+            <a:pPr marL="254000" indent="-254000">
+              <a:lnSpc>
+                <a:spcPct val="100000"/>
+              </a:lnSpc>
+              <a:spcAft>
+                <a:spcPts val="900"/>
+              </a:spcAft>
+              <a:buClr>
+                <a:srgbClr val="0F7C86"/>
+              </a:buClr>
+              <a:buSzPct val="100000"/>
+              <a:buChar char="▸"/>
+            </a:pPr>
+            <a:r>
+              <a:rPr lang="en-US" sz="1250" dirty="0">
+                <a:solidFill>
+                  <a:srgbClr val="434A63"/>
+                </a:solidFill>
+                <a:latin typeface="Arial" pitchFamily="34" charset="0"/>
+                <a:ea typeface="Arial" pitchFamily="34" charset="-122"/>
+                <a:cs typeface="Arial" pitchFamily="34" charset="-120"/>
+              </a:rPr>
+              <a:t>Jeder Befehl steht mit erwarteter Ausgabe in der Anleitung. Windows nutzt die PowerShell, Unterschiede stehen in Tabs.</a:t>
+            </a:r>
+            <a:endParaRPr lang="en-US" sz="1250" dirty="0"/>
+          </a:p>
+          <a:p>
+            <a:pPr marL="254000" indent="-254000">
+              <a:lnSpc>
+                <a:spcPct val="100000"/>
+              </a:lnSpc>
+              <a:spcAft>
+                <a:spcPts val="900"/>
+              </a:spcAft>
+              <a:buClr>
+                <a:srgbClr val="0F7C86"/>
+              </a:buClr>
+              <a:buSzPct val="100000"/>
+              <a:buChar char="▸"/>
+            </a:pPr>
+            <a:r>
+              <a:rPr lang="en-US" sz="1250" dirty="0">
+                <a:solidFill>
+                  <a:srgbClr val="434A63"/>
+                </a:solidFill>
+                <a:latin typeface="Arial" pitchFamily="34" charset="0"/>
+                <a:ea typeface="Arial" pitchFamily="34" charset="-122"/>
+                <a:cs typeface="Arial" pitchFamily="34" charset="-120"/>
+              </a:rPr>
+              <a:t>Teil 1 bis 3 sind das Ziel, der Härtetest ist der Beweis.</a:t>
+            </a:r>
+            <a:endParaRPr lang="en-US" sz="1250" dirty="0"/>
+          </a:p>
+          <a:p>
+            <a:pPr marL="254000" indent="-254000">
+              <a:lnSpc>
+                <a:spcPct val="100000"/>
+              </a:lnSpc>
+              <a:spcAft>
+                <a:spcPts val="900"/>
+              </a:spcAft>
+              <a:buClr>
+                <a:srgbClr val="0F7C86"/>
+              </a:buClr>
+              <a:buSzPct val="100000"/>
+              <a:buChar char="▸"/>
+            </a:pPr>
+            <a:r>
+              <a:rPr lang="en-US" sz="1250" dirty="0">
+                <a:solidFill>
+                  <a:srgbClr val="434A63"/>
+                </a:solidFill>
+                <a:latin typeface="Arial" pitchFamily="34" charset="0"/>
+                <a:ea typeface="Arial" pitchFamily="34" charset="-122"/>
+                <a:cs typeface="Arial" pitchFamily="34" charset="-120"/>
+              </a:rPr>
+              <a:t>Schnell durch? Am Ende der Seite warten vier Bonus-Experimente.</a:t>
+            </a:r>
+            <a:endParaRPr lang="en-US" sz="1250" dirty="0"/>
+          </a:p>
+          <a:p>
+            <a:pPr marL="254000" indent="-254000">
+              <a:lnSpc>
+                <a:spcPct val="100000"/>
+              </a:lnSpc>
+              <a:spcAft>
+                <a:spcPts val="900"/>
+              </a:spcAft>
+              <a:buClr>
+                <a:srgbClr val="0F7C86"/>
+              </a:buClr>
+              <a:buSzPct val="100000"/>
+              <a:buChar char="▸"/>
+            </a:pPr>
+            <a:r>
+              <a:rPr lang="en-US" sz="1250" dirty="0">
+                <a:solidFill>
+                  <a:srgbClr val="434A63"/>
+                </a:solidFill>
+                <a:latin typeface="Arial" pitchFamily="34" charset="0"/>
+                <a:ea typeface="Arial" pitchFamily="34" charset="-122"/>
+                <a:cs typeface="Arial" pitchFamily="34" charset="-120"/>
+              </a:rPr>
+              <a:t>Wenn es klemmt: erst die Stolpersteine-Seite, dann um Hilfe bitten.</a:t>
+            </a:r>
+            <a:endParaRPr lang="en-US" sz="1250" dirty="0"/>
+          </a:p>
+        </p:txBody>
+      </p:sp>
+      <p:sp>
+        <p:nvSpPr>
+          <p:cNvPr id="6" name="Shape 4"/>
+          <p:cNvSpPr/>
+          <p:nvPr/>
+        </p:nvSpPr>
+        <p:spPr>
+          <a:xfrm>
+            <a:off x="566928" y="3602736"/>
+            <a:ext cx="8010144" cy="822960"/>
+          </a:xfrm>
+          <a:prstGeom prst="rect">
+            <a:avLst/>
+          </a:prstGeom>
+          <a:solidFill>
+            <a:srgbClr val="F5F6FC"/>
+          </a:solidFill>
+          <a:ln/>
+        </p:spPr>
+      </p:sp>
+      <p:sp>
+        <p:nvSpPr>
+          <p:cNvPr id="7" name="Shape 5"/>
+          <p:cNvSpPr/>
+          <p:nvPr/>
+        </p:nvSpPr>
+        <p:spPr>
+          <a:xfrm>
+            <a:off x="566928" y="3602736"/>
+            <a:ext cx="41148" cy="822960"/>
+          </a:xfrm>
+          <a:prstGeom prst="rect">
+            <a:avLst/>
+          </a:prstGeom>
+          <a:solidFill>
+            <a:srgbClr val="9A6310"/>
+          </a:solidFill>
+          <a:ln/>
+        </p:spPr>
+      </p:sp>
+      <p:sp>
+        <p:nvSpPr>
+          <p:cNvPr id="8" name="Text 6"/>
+          <p:cNvSpPr/>
+          <p:nvPr/>
+        </p:nvSpPr>
+        <p:spPr>
+          <a:xfrm>
+            <a:off x="804672" y="3749040"/>
+            <a:ext cx="7607808" cy="242062"/>
+          </a:xfrm>
+          <a:prstGeom prst="rect">
+            <a:avLst/>
+          </a:prstGeom>
+          <a:noFill/>
+          <a:ln/>
+        </p:spPr>
+        <p:txBody>
+          <a:bodyPr wrap="square" lIns="0" tIns="0" rIns="0" bIns="0" rtlCol="0" anchor="t"/>
+          <a:lstStyle/>
+          <a:p>
+            <a:pPr indent="0" marL="0">
+              <a:buNone/>
+            </a:pPr>
+            <a:r>
+              <a:rPr lang="en-US" sz="1300" b="1" dirty="0">
+                <a:solidFill>
+                  <a:srgbClr val="272E52"/>
+                </a:solidFill>
+                <a:latin typeface="Arial" pitchFamily="34" charset="0"/>
+                <a:ea typeface="Arial" pitchFamily="34" charset="-122"/>
+                <a:cs typeface="Arial" pitchFamily="34" charset="-120"/>
+              </a:rPr>
+              <a:t>Um 20:05 sind alle wieder hier</a:t>
+            </a:r>
+            <a:endParaRPr lang="en-US" sz="1300" dirty="0"/>
+          </a:p>
+        </p:txBody>
+      </p:sp>
+      <p:sp>
+        <p:nvSpPr>
+          <p:cNvPr id="9" name="Text 7"/>
+          <p:cNvSpPr/>
+          <p:nvPr/>
+        </p:nvSpPr>
+        <p:spPr>
+          <a:xfrm>
+            <a:off x="804672" y="4036822"/>
+            <a:ext cx="7607808" cy="270002"/>
+          </a:xfrm>
+          <a:prstGeom prst="rect">
+            <a:avLst/>
+          </a:prstGeom>
+          <a:noFill/>
+          <a:ln/>
+        </p:spPr>
+        <p:txBody>
+          <a:bodyPr wrap="square" lIns="0" tIns="0" rIns="0" bIns="0" rtlCol="0" anchor="t"/>
+          <a:lstStyle/>
+          <a:p>
+            <a:pPr indent="0" marL="0">
+              <a:lnSpc>
+                <a:spcPct val="92000"/>
+              </a:lnSpc>
+              <a:buNone/>
+            </a:pPr>
+            <a:r>
+              <a:rPr lang="en-US" sz="1150" dirty="0">
+                <a:solidFill>
+                  <a:srgbClr val="434A63"/>
+                </a:solidFill>
+                <a:latin typeface="Arial" pitchFamily="34" charset="0"/>
+                <a:ea typeface="Arial" pitchFamily="34" charset="-122"/>
+                <a:cs typeface="Arial" pitchFamily="34" charset="-120"/>
+              </a:rPr>
+              <a:t>Jede Gruppe berichtet ihren Härtetest: Tabelle weg oder Tabelle noch da? Und woran lag es?</a:t>
+            </a:r>
+            <a:endParaRPr lang="en-US" sz="1150" dirty="0"/>
+          </a:p>
+        </p:txBody>
+      </p:sp>
+      <p:sp>
+        <p:nvSpPr>
+          <p:cNvPr id="10" name="Shape 8"/>
+          <p:cNvSpPr/>
+          <p:nvPr/>
+        </p:nvSpPr>
+        <p:spPr>
+          <a:xfrm>
+            <a:off x="566928" y="4631436"/>
+            <a:ext cx="8010144" cy="0"/>
+          </a:xfrm>
+          <a:prstGeom prst="line">
+            <a:avLst/>
+          </a:prstGeom>
+          <a:noFill/>
+          <a:ln w="9525">
+            <a:solidFill>
+              <a:srgbClr val="DFE3F0"/>
+            </a:solidFill>
+            <a:prstDash val="solid"/>
+          </a:ln>
+        </p:spPr>
+      </p:sp>
+      <p:sp>
+        <p:nvSpPr>
+          <p:cNvPr id="11" name="Text 9"/>
+          <p:cNvSpPr/>
+          <p:nvPr/>
+        </p:nvSpPr>
+        <p:spPr>
+          <a:xfrm>
+            <a:off x="566928" y="4722876"/>
+            <a:ext cx="5029200" cy="237744"/>
+          </a:xfrm>
+          <a:prstGeom prst="rect">
+            <a:avLst/>
+          </a:prstGeom>
+          <a:noFill/>
+          <a:ln/>
+        </p:spPr>
+        <p:txBody>
+          <a:bodyPr wrap="square" lIns="0" tIns="0" rIns="0" bIns="0" rtlCol="0" anchor="ctr"/>
+          <a:lstStyle/>
+          <a:p>
+            <a:pPr indent="0" marL="0">
+              <a:buNone/>
+            </a:pPr>
+            <a:r>
+              <a:rPr lang="en-US" sz="1050" spc="30" kern="0" dirty="0">
+                <a:solidFill>
+                  <a:srgbClr val="5C6377"/>
+                </a:solidFill>
+                <a:latin typeface="Arial" pitchFamily="34" charset="0"/>
+                <a:ea typeface="Arial" pitchFamily="34" charset="-122"/>
+                <a:cs typeface="Arial" pitchFamily="34" charset="-120"/>
+              </a:rPr>
+              <a:t>Breakout</a:t>
+            </a:r>
+            <a:endParaRPr lang="en-US" sz="1050" dirty="0"/>
+          </a:p>
+        </p:txBody>
+      </p:sp>
+      <p:sp>
+        <p:nvSpPr>
+          <p:cNvPr id="12" name="Text 10"/>
+          <p:cNvSpPr/>
+          <p:nvPr/>
+        </p:nvSpPr>
+        <p:spPr>
+          <a:xfrm>
+            <a:off x="8028432" y="4722876"/>
+            <a:ext cx="548640" cy="237744"/>
+          </a:xfrm>
+          <a:prstGeom prst="rect">
+            <a:avLst/>
+          </a:prstGeom>
+          <a:noFill/>
+          <a:ln/>
+        </p:spPr>
+        <p:txBody>
+          <a:bodyPr wrap="square" lIns="0" tIns="0" rIns="0" bIns="0" rtlCol="0" anchor="ctr"/>
+          <a:lstStyle/>
+          <a:p>
+            <a:pPr algn="r" indent="0" marL="0">
+              <a:buNone/>
+            </a:pPr>
+            <a:r>
+              <a:rPr lang="en-US" sz="1050" dirty="0">
+                <a:solidFill>
+                  <a:srgbClr val="5C6377"/>
+                </a:solidFill>
+                <a:latin typeface="Arial" pitchFamily="34" charset="0"/>
+                <a:ea typeface="Arial" pitchFamily="34" charset="-122"/>
+                <a:cs typeface="Arial" pitchFamily="34" charset="-120"/>
+              </a:rPr>
+              <a:t>18/20</a:t>
+            </a:r>
+            <a:endParaRPr lang="en-US" sz="1050" dirty="0"/>
+          </a:p>
+        </p:txBody>
+      </p:sp>
+    </p:spTree>
+  </p:cSld>
+  <p:clrMapOvr>
+    <a:masterClrMapping/>
+  </p:clrMapOvr>
+</p:sld>
+</file>
+
+<file path=ppt/slides/slide22.xml><?xml version="1.0" encoding="utf-8"?>
+<p:sld xmlns:a="http://schemas.openxmlformats.org/drawingml/2006/main" xmlns:r="http://schemas.openxmlformats.org/officeDocument/2006/relationships" xmlns:p="http://schemas.openxmlformats.org/presentationml/2006/main">
+  <p:cSld name="Slide 22">
+    <p:bg>
+      <p:bgPr>
+        <a:solidFill>
+          <a:srgbClr val="FFFFFF"/>
+        </a:solidFill>
+      </p:bgPr>
+    </p:bg>
+    <p:spTree>
+      <p:nvGrpSpPr>
+        <p:cNvPr id="1" name=""/>
+        <p:cNvGrpSpPr/>
+        <p:nvPr/>
+      </p:nvGrpSpPr>
+      <p:grpSpPr>
+        <a:xfrm>
+          <a:off x="0" y="0"/>
+          <a:ext cx="0" cy="0"/>
+          <a:chOff x="0" y="0"/>
+          <a:chExt cx="0" cy="0"/>
+        </a:xfrm>
+      </p:grpSpPr>
+      <p:sp>
+        <p:nvSpPr>
+          <p:cNvPr id="2" name="Shape 0"/>
+          <p:cNvSpPr/>
+          <p:nvPr/>
+        </p:nvSpPr>
+        <p:spPr>
+          <a:xfrm>
+            <a:off x="566928" y="201168"/>
+            <a:ext cx="475488" cy="50292"/>
+          </a:xfrm>
+          <a:prstGeom prst="rect">
+            <a:avLst/>
+          </a:prstGeom>
+          <a:solidFill>
+            <a:srgbClr val="0F7C86"/>
+          </a:solidFill>
+          <a:ln/>
+        </p:spPr>
+      </p:sp>
+      <p:sp>
+        <p:nvSpPr>
+          <p:cNvPr id="3" name="Text 1"/>
+          <p:cNvSpPr/>
+          <p:nvPr/>
+        </p:nvSpPr>
+        <p:spPr>
+          <a:xfrm>
+            <a:off x="566928" y="384048"/>
+            <a:ext cx="8010144" cy="237744"/>
+          </a:xfrm>
+          <a:prstGeom prst="rect">
+            <a:avLst/>
+          </a:prstGeom>
+          <a:noFill/>
+          <a:ln/>
+        </p:spPr>
+        <p:txBody>
+          <a:bodyPr wrap="square" lIns="0" tIns="0" rIns="0" bIns="0" rtlCol="0" anchor="ctr"/>
+          <a:lstStyle/>
+          <a:p>
+            <a:pPr indent="0" marL="0">
+              <a:buNone/>
+            </a:pPr>
+            <a:r>
+              <a:rPr lang="en-US" sz="1150" b="1" spc="180" kern="0" dirty="0">
+                <a:solidFill>
+                  <a:srgbClr val="0F7C86"/>
+                </a:solidFill>
+                <a:latin typeface="Arial" pitchFamily="34" charset="0"/>
+                <a:ea typeface="Arial" pitchFamily="34" charset="-122"/>
+                <a:cs typeface="Arial" pitchFamily="34" charset="-120"/>
+              </a:rPr>
+              <a:t>AUSWERTUNG · 30 MINUTEN</a:t>
+            </a:r>
+            <a:endParaRPr lang="en-US" sz="1150" dirty="0"/>
+          </a:p>
+        </p:txBody>
+      </p:sp>
+      <p:sp>
+        <p:nvSpPr>
+          <p:cNvPr id="4" name="Text 2"/>
+          <p:cNvSpPr/>
+          <p:nvPr/>
+        </p:nvSpPr>
+        <p:spPr>
+          <a:xfrm>
+            <a:off x="566928" y="731520"/>
+            <a:ext cx="8010144" cy="603504"/>
+          </a:xfrm>
+          <a:prstGeom prst="rect">
+            <a:avLst/>
+          </a:prstGeom>
+          <a:noFill/>
+          <a:ln/>
+        </p:spPr>
+        <p:txBody>
+          <a:bodyPr wrap="square" lIns="0" tIns="0" rIns="0" bIns="0" rtlCol="0" anchor="t"/>
+          <a:lstStyle/>
+          <a:p>
+            <a:pPr indent="0" marL="0">
+              <a:buNone/>
+            </a:pPr>
+            <a:r>
+              <a:rPr lang="en-US" sz="2600" b="1" dirty="0">
+                <a:solidFill>
+                  <a:srgbClr val="272E52"/>
+                </a:solidFill>
+                <a:latin typeface="Arial" pitchFamily="34" charset="0"/>
+                <a:ea typeface="Arial" pitchFamily="34" charset="-122"/>
+                <a:cs typeface="Arial" pitchFamily="34" charset="-120"/>
+              </a:rPr>
+              <a:t>Der Härtetest</a:t>
+            </a:r>
+            <a:endParaRPr lang="en-US" sz="2600" dirty="0"/>
+          </a:p>
+        </p:txBody>
+      </p:sp>
+      <p:sp>
+        <p:nvSpPr>
+          <p:cNvPr id="5" name="Shape 3"/>
+          <p:cNvSpPr/>
+          <p:nvPr/>
+        </p:nvSpPr>
+        <p:spPr>
+          <a:xfrm>
+            <a:off x="438912" y="1810512"/>
+            <a:ext cx="8266176" cy="365760"/>
+          </a:xfrm>
+          <a:prstGeom prst="rect">
+            <a:avLst/>
+          </a:prstGeom>
+          <a:solidFill>
+            <a:srgbClr val="F5F6FC"/>
+          </a:solidFill>
+          <a:ln/>
+        </p:spPr>
+      </p:sp>
+      <p:sp>
+        <p:nvSpPr>
+          <p:cNvPr id="6" name="Text 4"/>
+          <p:cNvSpPr/>
+          <p:nvPr/>
+        </p:nvSpPr>
+        <p:spPr>
+          <a:xfrm>
+            <a:off x="566928" y="1810512"/>
+            <a:ext cx="548640" cy="365760"/>
+          </a:xfrm>
+          <a:prstGeom prst="rect">
+            <a:avLst/>
+          </a:prstGeom>
+          <a:noFill/>
+          <a:ln/>
+        </p:spPr>
+        <p:txBody>
+          <a:bodyPr wrap="square" lIns="0" tIns="0" rIns="0" bIns="0" rtlCol="0" anchor="ctr"/>
+          <a:lstStyle/>
+          <a:p>
+            <a:pPr indent="0" marL="0">
+              <a:buNone/>
+            </a:pPr>
+            <a:r>
+              <a:rPr lang="en-US" sz="1200" b="1" dirty="0">
+                <a:solidFill>
+                  <a:srgbClr val="0F7C86"/>
+                </a:solidFill>
+                <a:latin typeface="Courier New" pitchFamily="34" charset="0"/>
+                <a:ea typeface="Courier New" pitchFamily="34" charset="-122"/>
+                <a:cs typeface="Courier New" pitchFamily="34" charset="-120"/>
+              </a:rPr>
+              <a:t>1</a:t>
+            </a:r>
+            <a:endParaRPr lang="en-US" sz="1200" dirty="0"/>
+          </a:p>
+        </p:txBody>
+      </p:sp>
+      <p:sp>
+        <p:nvSpPr>
+          <p:cNvPr id="7" name="Text 5"/>
+          <p:cNvSpPr/>
+          <p:nvPr/>
+        </p:nvSpPr>
+        <p:spPr>
+          <a:xfrm>
+            <a:off x="1115568" y="1810512"/>
+            <a:ext cx="7461504" cy="365760"/>
+          </a:xfrm>
+          <a:prstGeom prst="rect">
+            <a:avLst/>
+          </a:prstGeom>
+          <a:noFill/>
+          <a:ln/>
+        </p:spPr>
+        <p:txBody>
+          <a:bodyPr wrap="square" lIns="0" tIns="0" rIns="0" bIns="0" rtlCol="0" anchor="ctr"/>
+          <a:lstStyle/>
+          <a:p>
+            <a:pPr indent="0" marL="0">
+              <a:buNone/>
+            </a:pPr>
+            <a:r>
+              <a:rPr lang="en-US" sz="1200" dirty="0">
+                <a:solidFill>
+                  <a:srgbClr val="434A63"/>
+                </a:solidFill>
+                <a:latin typeface="Arial" pitchFamily="34" charset="0"/>
+                <a:ea typeface="Arial" pitchFamily="34" charset="-122"/>
+                <a:cs typeface="Arial" pitchFamily="34" charset="-120"/>
+              </a:rPr>
+              <a:t>Der Härtetest: Container gelöscht und neu gestartet. Hat eure Tabelle überlebt?</a:t>
+            </a:r>
+            <a:endParaRPr lang="en-US" sz="1200" dirty="0"/>
+          </a:p>
+        </p:txBody>
+      </p:sp>
+      <p:sp>
+        <p:nvSpPr>
+          <p:cNvPr id="8" name="Text 6"/>
+          <p:cNvSpPr/>
+          <p:nvPr/>
+        </p:nvSpPr>
+        <p:spPr>
+          <a:xfrm>
+            <a:off x="566928" y="2176272"/>
+            <a:ext cx="548640" cy="365760"/>
+          </a:xfrm>
+          <a:prstGeom prst="rect">
+            <a:avLst/>
+          </a:prstGeom>
+          <a:noFill/>
+          <a:ln/>
+        </p:spPr>
+        <p:txBody>
+          <a:bodyPr wrap="square" lIns="0" tIns="0" rIns="0" bIns="0" rtlCol="0" anchor="ctr"/>
+          <a:lstStyle/>
+          <a:p>
+            <a:pPr indent="0" marL="0">
+              <a:buNone/>
+            </a:pPr>
+            <a:r>
+              <a:rPr lang="en-US" sz="1200" b="1" dirty="0">
+                <a:solidFill>
+                  <a:srgbClr val="0F7C86"/>
+                </a:solidFill>
+                <a:latin typeface="Courier New" pitchFamily="34" charset="0"/>
+                <a:ea typeface="Courier New" pitchFamily="34" charset="-122"/>
+                <a:cs typeface="Courier New" pitchFamily="34" charset="-120"/>
+              </a:rPr>
+              <a:t>2</a:t>
+            </a:r>
+            <a:endParaRPr lang="en-US" sz="1200" dirty="0"/>
+          </a:p>
+        </p:txBody>
+      </p:sp>
+      <p:sp>
+        <p:nvSpPr>
+          <p:cNvPr id="9" name="Text 7"/>
+          <p:cNvSpPr/>
+          <p:nvPr/>
+        </p:nvSpPr>
+        <p:spPr>
+          <a:xfrm>
+            <a:off x="1115568" y="2176272"/>
+            <a:ext cx="7461504" cy="365760"/>
+          </a:xfrm>
+          <a:prstGeom prst="rect">
+            <a:avLst/>
+          </a:prstGeom>
+          <a:noFill/>
+          <a:ln/>
+        </p:spPr>
+        <p:txBody>
+          <a:bodyPr wrap="square" lIns="0" tIns="0" rIns="0" bIns="0" rtlCol="0" anchor="ctr"/>
+          <a:lstStyle/>
+          <a:p>
+            <a:pPr indent="0" marL="0">
+              <a:buNone/>
+            </a:pPr>
+            <a:r>
+              <a:rPr lang="en-US" sz="1200" dirty="0">
+                <a:solidFill>
+                  <a:srgbClr val="434A63"/>
+                </a:solidFill>
+                <a:latin typeface="Arial" pitchFamily="34" charset="0"/>
+                <a:ea typeface="Arial" pitchFamily="34" charset="-122"/>
+                <a:cs typeface="Arial" pitchFamily="34" charset="-120"/>
+              </a:rPr>
+              <a:t>docker volume ls: Welche Volumes liegen jetzt auf euren Rechnern?</a:t>
+            </a:r>
+            <a:endParaRPr lang="en-US" sz="1200" dirty="0"/>
+          </a:p>
+        </p:txBody>
+      </p:sp>
+      <p:sp>
+        <p:nvSpPr>
+          <p:cNvPr id="10" name="Shape 8"/>
+          <p:cNvSpPr/>
+          <p:nvPr/>
+        </p:nvSpPr>
+        <p:spPr>
+          <a:xfrm>
+            <a:off x="438912" y="2542032"/>
+            <a:ext cx="8266176" cy="365760"/>
+          </a:xfrm>
+          <a:prstGeom prst="rect">
+            <a:avLst/>
+          </a:prstGeom>
+          <a:solidFill>
+            <a:srgbClr val="F5F6FC"/>
+          </a:solidFill>
+          <a:ln/>
+        </p:spPr>
+      </p:sp>
+      <p:sp>
+        <p:nvSpPr>
+          <p:cNvPr id="11" name="Text 9"/>
+          <p:cNvSpPr/>
+          <p:nvPr/>
+        </p:nvSpPr>
+        <p:spPr>
+          <a:xfrm>
+            <a:off x="566928" y="2542032"/>
+            <a:ext cx="548640" cy="365760"/>
+          </a:xfrm>
+          <a:prstGeom prst="rect">
+            <a:avLst/>
+          </a:prstGeom>
+          <a:noFill/>
+          <a:ln/>
+        </p:spPr>
+        <p:txBody>
+          <a:bodyPr wrap="square" lIns="0" tIns="0" rIns="0" bIns="0" rtlCol="0" anchor="ctr"/>
+          <a:lstStyle/>
+          <a:p>
+            <a:pPr indent="0" marL="0">
+              <a:buNone/>
+            </a:pPr>
+            <a:r>
+              <a:rPr lang="en-US" sz="1200" b="1" dirty="0">
+                <a:solidFill>
+                  <a:srgbClr val="0F7C86"/>
+                </a:solidFill>
+                <a:latin typeface="Courier New" pitchFamily="34" charset="0"/>
+                <a:ea typeface="Courier New" pitchFamily="34" charset="-122"/>
+                <a:cs typeface="Courier New" pitchFamily="34" charset="-120"/>
+              </a:rPr>
+              <a:t>3</a:t>
+            </a:r>
+            <a:endParaRPr lang="en-US" sz="1200" dirty="0"/>
+          </a:p>
+        </p:txBody>
+      </p:sp>
+      <p:sp>
+        <p:nvSpPr>
+          <p:cNvPr id="12" name="Text 10"/>
+          <p:cNvSpPr/>
+          <p:nvPr/>
+        </p:nvSpPr>
+        <p:spPr>
+          <a:xfrm>
+            <a:off x="1115568" y="2542032"/>
+            <a:ext cx="7461504" cy="365760"/>
+          </a:xfrm>
+          <a:prstGeom prst="rect">
+            <a:avLst/>
+          </a:prstGeom>
+          <a:noFill/>
+          <a:ln/>
+        </p:spPr>
+        <p:txBody>
+          <a:bodyPr wrap="square" lIns="0" tIns="0" rIns="0" bIns="0" rtlCol="0" anchor="ctr"/>
+          <a:lstStyle/>
+          <a:p>
+            <a:pPr indent="0" marL="0">
+              <a:buNone/>
+            </a:pPr>
+            <a:r>
+              <a:rPr lang="en-US" sz="1200" dirty="0">
+                <a:solidFill>
+                  <a:srgbClr val="434A63"/>
+                </a:solidFill>
+                <a:latin typeface="Arial" pitchFamily="34" charset="0"/>
+                <a:ea typeface="Arial" pitchFamily="34" charset="-122"/>
+                <a:cs typeface="Arial" pitchFamily="34" charset="-120"/>
+              </a:rPr>
+              <a:t>Die Netz-Frage: Woher kennt Adminer die Adresse der Datenbank?</a:t>
+            </a:r>
+            <a:endParaRPr lang="en-US" sz="1200" dirty="0"/>
+          </a:p>
+        </p:txBody>
+      </p:sp>
+      <p:sp>
+        <p:nvSpPr>
+          <p:cNvPr id="13" name="Text 11"/>
+          <p:cNvSpPr/>
+          <p:nvPr/>
+        </p:nvSpPr>
+        <p:spPr>
+          <a:xfrm>
+            <a:off x="566928" y="2907792"/>
+            <a:ext cx="548640" cy="365760"/>
+          </a:xfrm>
+          <a:prstGeom prst="rect">
+            <a:avLst/>
+          </a:prstGeom>
+          <a:noFill/>
+          <a:ln/>
+        </p:spPr>
+        <p:txBody>
+          <a:bodyPr wrap="square" lIns="0" tIns="0" rIns="0" bIns="0" rtlCol="0" anchor="ctr"/>
+          <a:lstStyle/>
+          <a:p>
+            <a:pPr indent="0" marL="0">
+              <a:buNone/>
+            </a:pPr>
+            <a:r>
+              <a:rPr lang="en-US" sz="1200" b="1" dirty="0">
+                <a:solidFill>
+                  <a:srgbClr val="0F7C86"/>
+                </a:solidFill>
+                <a:latin typeface="Courier New" pitchFamily="34" charset="0"/>
+                <a:ea typeface="Courier New" pitchFamily="34" charset="-122"/>
+                <a:cs typeface="Courier New" pitchFamily="34" charset="-120"/>
+              </a:rPr>
+              <a:t>4</a:t>
+            </a:r>
+            <a:endParaRPr lang="en-US" sz="1200" dirty="0"/>
+          </a:p>
+        </p:txBody>
+      </p:sp>
+      <p:sp>
+        <p:nvSpPr>
+          <p:cNvPr id="14" name="Text 12"/>
+          <p:cNvSpPr/>
+          <p:nvPr/>
+        </p:nvSpPr>
+        <p:spPr>
+          <a:xfrm>
+            <a:off x="1115568" y="2907792"/>
+            <a:ext cx="7461504" cy="365760"/>
+          </a:xfrm>
+          <a:prstGeom prst="rect">
+            <a:avLst/>
+          </a:prstGeom>
+          <a:noFill/>
+          <a:ln/>
+        </p:spPr>
+        <p:txBody>
+          <a:bodyPr wrap="square" lIns="0" tIns="0" rIns="0" bIns="0" rtlCol="0" anchor="ctr"/>
+          <a:lstStyle/>
+          <a:p>
+            <a:pPr indent="0" marL="0">
+              <a:buNone/>
+            </a:pPr>
+            <a:r>
+              <a:rPr lang="en-US" sz="1200" dirty="0">
+                <a:solidFill>
+                  <a:srgbClr val="434A63"/>
+                </a:solidFill>
+                <a:latin typeface="Arial" pitchFamily="34" charset="0"/>
+                <a:ea typeface="Arial" pitchFamily="34" charset="-122"/>
+                <a:cs typeface="Arial" pitchFamily="34" charset="-120"/>
+              </a:rPr>
+              <a:t>Die Sicherheits-Frage: Warum hat die Datenbank kein -p, der Adminer aber schon?</a:t>
+            </a:r>
+            <a:endParaRPr lang="en-US" sz="1200" dirty="0"/>
+          </a:p>
+        </p:txBody>
+      </p:sp>
+      <p:sp>
+        <p:nvSpPr>
+          <p:cNvPr id="15" name="Shape 13"/>
+          <p:cNvSpPr/>
+          <p:nvPr/>
+        </p:nvSpPr>
+        <p:spPr>
+          <a:xfrm>
+            <a:off x="438912" y="3273552"/>
+            <a:ext cx="8266176" cy="365760"/>
+          </a:xfrm>
+          <a:prstGeom prst="rect">
+            <a:avLst/>
+          </a:prstGeom>
+          <a:solidFill>
+            <a:srgbClr val="F5F6FC"/>
+          </a:solidFill>
+          <a:ln/>
+        </p:spPr>
+      </p:sp>
+      <p:sp>
+        <p:nvSpPr>
+          <p:cNvPr id="16" name="Text 14"/>
+          <p:cNvSpPr/>
+          <p:nvPr/>
+        </p:nvSpPr>
+        <p:spPr>
+          <a:xfrm>
+            <a:off x="566928" y="3273552"/>
+            <a:ext cx="548640" cy="365760"/>
+          </a:xfrm>
+          <a:prstGeom prst="rect">
+            <a:avLst/>
+          </a:prstGeom>
+          <a:noFill/>
+          <a:ln/>
+        </p:spPr>
+        <p:txBody>
+          <a:bodyPr wrap="square" lIns="0" tIns="0" rIns="0" bIns="0" rtlCol="0" anchor="ctr"/>
+          <a:lstStyle/>
+          <a:p>
+            <a:pPr indent="0" marL="0">
+              <a:buNone/>
+            </a:pPr>
+            <a:r>
+              <a:rPr lang="en-US" sz="1200" b="1" dirty="0">
+                <a:solidFill>
+                  <a:srgbClr val="0F7C86"/>
+                </a:solidFill>
+                <a:latin typeface="Courier New" pitchFamily="34" charset="0"/>
+                <a:ea typeface="Courier New" pitchFamily="34" charset="-122"/>
+                <a:cs typeface="Courier New" pitchFamily="34" charset="-120"/>
+              </a:rPr>
+              <a:t>5</a:t>
+            </a:r>
+            <a:endParaRPr lang="en-US" sz="1200" dirty="0"/>
+          </a:p>
+        </p:txBody>
+      </p:sp>
+      <p:sp>
+        <p:nvSpPr>
+          <p:cNvPr id="17" name="Text 15"/>
+          <p:cNvSpPr/>
+          <p:nvPr/>
+        </p:nvSpPr>
+        <p:spPr>
+          <a:xfrm>
+            <a:off x="1115568" y="3273552"/>
+            <a:ext cx="7461504" cy="365760"/>
+          </a:xfrm>
+          <a:prstGeom prst="rect">
+            <a:avLst/>
+          </a:prstGeom>
+          <a:noFill/>
+          <a:ln/>
+        </p:spPr>
+        <p:txBody>
+          <a:bodyPr wrap="square" lIns="0" tIns="0" rIns="0" bIns="0" rtlCol="0" anchor="ctr"/>
+          <a:lstStyle/>
+          <a:p>
+            <a:pPr indent="0" marL="0">
+              <a:buNone/>
+            </a:pPr>
+            <a:r>
+              <a:rPr lang="en-US" sz="1200" dirty="0">
+                <a:solidFill>
+                  <a:srgbClr val="434A63"/>
+                </a:solidFill>
+                <a:latin typeface="Arial" pitchFamily="34" charset="0"/>
+                <a:ea typeface="Arial" pitchFamily="34" charset="-122"/>
+                <a:cs typeface="Arial" pitchFamily="34" charset="-120"/>
+              </a:rPr>
+              <a:t>Zählt eure Befehle von Volume bis Adminer. Merkt euch die Zahl für Mittwoch.</a:t>
+            </a:r>
+            <a:endParaRPr lang="en-US" sz="1200" dirty="0"/>
+          </a:p>
+        </p:txBody>
+      </p:sp>
+      <p:sp>
+        <p:nvSpPr>
+          <p:cNvPr id="18" name="Shape 16"/>
+          <p:cNvSpPr/>
+          <p:nvPr/>
+        </p:nvSpPr>
+        <p:spPr>
+          <a:xfrm>
+            <a:off x="566928" y="4069080"/>
+            <a:ext cx="32004" cy="256032"/>
+          </a:xfrm>
+          <a:prstGeom prst="rect">
+            <a:avLst/>
+          </a:prstGeom>
+          <a:solidFill>
+            <a:srgbClr val="0F7C86"/>
+          </a:solidFill>
+          <a:ln/>
+        </p:spPr>
+      </p:sp>
+      <p:sp>
+        <p:nvSpPr>
+          <p:cNvPr id="19" name="Text 17"/>
+          <p:cNvSpPr/>
+          <p:nvPr/>
+        </p:nvSpPr>
+        <p:spPr>
+          <a:xfrm>
+            <a:off x="749808" y="4023360"/>
+            <a:ext cx="7827264" cy="402336"/>
+          </a:xfrm>
+          <a:prstGeom prst="rect">
+            <a:avLst/>
+          </a:prstGeom>
+          <a:noFill/>
+          <a:ln/>
+        </p:spPr>
+        <p:txBody>
+          <a:bodyPr wrap="square" lIns="0" tIns="0" rIns="0" bIns="0" rtlCol="0" anchor="ctr"/>
+          <a:lstStyle/>
+          <a:p>
+            <a:pPr indent="0" marL="0">
+              <a:buNone/>
+            </a:pPr>
+            <a:r>
+              <a:rPr lang="en-US" sz="1200" b="1" dirty="0">
+                <a:solidFill>
+                  <a:srgbClr val="434A63"/>
+                </a:solidFill>
+                <a:latin typeface="Arial" pitchFamily="34" charset="0"/>
+                <a:ea typeface="Arial" pitchFamily="34" charset="-122"/>
+                <a:cs typeface="Arial" pitchFamily="34" charset="-120"/>
+              </a:rPr>
+              <a:t>Frage 5 ist der Cliffhanger: Mittwoch schrumpfen alle diese Befehle auf einen einzigen zusammen.</a:t>
+            </a:r>
+            <a:endParaRPr lang="en-US" sz="1200" dirty="0"/>
+          </a:p>
+        </p:txBody>
+      </p:sp>
+      <p:sp>
+        <p:nvSpPr>
+          <p:cNvPr id="20" name="Shape 18"/>
+          <p:cNvSpPr/>
+          <p:nvPr/>
+        </p:nvSpPr>
+        <p:spPr>
+          <a:xfrm>
+            <a:off x="566928" y="4631436"/>
+            <a:ext cx="8010144" cy="0"/>
+          </a:xfrm>
+          <a:prstGeom prst="line">
+            <a:avLst/>
+          </a:prstGeom>
+          <a:noFill/>
+          <a:ln w="9525">
+            <a:solidFill>
+              <a:srgbClr val="DFE3F0"/>
+            </a:solidFill>
+            <a:prstDash val="solid"/>
+          </a:ln>
+        </p:spPr>
+      </p:sp>
+      <p:sp>
+        <p:nvSpPr>
+          <p:cNvPr id="21" name="Text 19"/>
+          <p:cNvSpPr/>
+          <p:nvPr/>
+        </p:nvSpPr>
+        <p:spPr>
+          <a:xfrm>
+            <a:off x="566928" y="4722876"/>
+            <a:ext cx="5029200" cy="237744"/>
+          </a:xfrm>
+          <a:prstGeom prst="rect">
+            <a:avLst/>
+          </a:prstGeom>
+          <a:noFill/>
+          <a:ln/>
+        </p:spPr>
+        <p:txBody>
+          <a:bodyPr wrap="square" lIns="0" tIns="0" rIns="0" bIns="0" rtlCol="0" anchor="ctr"/>
+          <a:lstStyle/>
+          <a:p>
+            <a:pPr indent="0" marL="0">
+              <a:buNone/>
+            </a:pPr>
+            <a:r>
+              <a:rPr lang="en-US" sz="1050" spc="30" kern="0" dirty="0">
+                <a:solidFill>
+                  <a:srgbClr val="5C6377"/>
+                </a:solidFill>
+                <a:latin typeface="Arial" pitchFamily="34" charset="0"/>
+                <a:ea typeface="Arial" pitchFamily="34" charset="-122"/>
+                <a:cs typeface="Arial" pitchFamily="34" charset="-120"/>
+              </a:rPr>
+              <a:t>Auswertung</a:t>
+            </a:r>
+            <a:endParaRPr lang="en-US" sz="1050" dirty="0"/>
+          </a:p>
+        </p:txBody>
+      </p:sp>
+      <p:sp>
+        <p:nvSpPr>
+          <p:cNvPr id="22" name="Text 20"/>
+          <p:cNvSpPr/>
+          <p:nvPr/>
+        </p:nvSpPr>
+        <p:spPr>
+          <a:xfrm>
+            <a:off x="8028432" y="4722876"/>
+            <a:ext cx="548640" cy="237744"/>
+          </a:xfrm>
+          <a:prstGeom prst="rect">
+            <a:avLst/>
+          </a:prstGeom>
+          <a:noFill/>
+          <a:ln/>
+        </p:spPr>
+        <p:txBody>
+          <a:bodyPr wrap="square" lIns="0" tIns="0" rIns="0" bIns="0" rtlCol="0" anchor="ctr"/>
+          <a:lstStyle/>
+          <a:p>
+            <a:pPr algn="r" indent="0" marL="0">
+              <a:buNone/>
+            </a:pPr>
+            <a:r>
+              <a:rPr lang="en-US" sz="1050" dirty="0">
+                <a:solidFill>
+                  <a:srgbClr val="5C6377"/>
+                </a:solidFill>
+                <a:latin typeface="Arial" pitchFamily="34" charset="0"/>
+                <a:ea typeface="Arial" pitchFamily="34" charset="-122"/>
+                <a:cs typeface="Arial" pitchFamily="34" charset="-120"/>
+              </a:rPr>
+              <a:t>19/20</a:t>
+            </a:r>
+            <a:endParaRPr lang="en-US" sz="1050" dirty="0"/>
+          </a:p>
+        </p:txBody>
+      </p:sp>
+    </p:spTree>
+  </p:cSld>
+  <p:clrMapOvr>
+    <a:masterClrMapping/>
+  </p:clrMapOvr>
+</p:sld>
+</file>
+
+<file path=ppt/slides/slide23.xml><?xml version="1.0" encoding="utf-8"?>
+<p:sld xmlns:a="http://schemas.openxmlformats.org/drawingml/2006/main" xmlns:r="http://schemas.openxmlformats.org/officeDocument/2006/relationships" xmlns:p="http://schemas.openxmlformats.org/presentationml/2006/main">
+  <p:cSld name="Slide 23">
+    <p:bg>
+      <p:bgPr>
+        <a:solidFill>
+          <a:srgbClr val="FFFFFF"/>
+        </a:solidFill>
+      </p:bgPr>
+    </p:bg>
+    <p:spTree>
+      <p:nvGrpSpPr>
+        <p:cNvPr id="1" name=""/>
+        <p:cNvGrpSpPr/>
+        <p:nvPr/>
+      </p:nvGrpSpPr>
+      <p:grpSpPr>
+        <a:xfrm>
+          <a:off x="0" y="0"/>
+          <a:ext cx="0" cy="0"/>
+          <a:chOff x="0" y="0"/>
+          <a:chExt cx="0" cy="0"/>
+        </a:xfrm>
+      </p:grpSpPr>
+      <p:sp>
+        <p:nvSpPr>
+          <p:cNvPr id="2" name="Shape 0"/>
+          <p:cNvSpPr/>
+          <p:nvPr/>
+        </p:nvSpPr>
+        <p:spPr>
+          <a:xfrm>
+            <a:off x="566928" y="201168"/>
+            <a:ext cx="475488" cy="50292"/>
+          </a:xfrm>
+          <a:prstGeom prst="rect">
+            <a:avLst/>
+          </a:prstGeom>
+          <a:solidFill>
+            <a:srgbClr val="0F7C86"/>
+          </a:solidFill>
+          <a:ln/>
+        </p:spPr>
+      </p:sp>
+      <p:sp>
+        <p:nvSpPr>
+          <p:cNvPr id="3" name="Text 1"/>
+          <p:cNvSpPr/>
+          <p:nvPr/>
+        </p:nvSpPr>
+        <p:spPr>
+          <a:xfrm>
+            <a:off x="566928" y="384048"/>
+            <a:ext cx="8010144" cy="237744"/>
+          </a:xfrm>
+          <a:prstGeom prst="rect">
+            <a:avLst/>
+          </a:prstGeom>
+          <a:noFill/>
+          <a:ln/>
+        </p:spPr>
+        <p:txBody>
+          <a:bodyPr wrap="square" lIns="0" tIns="0" rIns="0" bIns="0" rtlCol="0" anchor="ctr"/>
+          <a:lstStyle/>
+          <a:p>
+            <a:pPr indent="0" marL="0">
+              <a:buNone/>
+            </a:pPr>
+            <a:r>
+              <a:rPr lang="en-US" sz="1150" b="1" spc="180" kern="0" dirty="0">
+                <a:solidFill>
+                  <a:srgbClr val="0F7C86"/>
+                </a:solidFill>
+                <a:latin typeface="Arial" pitchFamily="34" charset="0"/>
+                <a:ea typeface="Arial" pitchFamily="34" charset="-122"/>
+                <a:cs typeface="Arial" pitchFamily="34" charset="-120"/>
+              </a:rPr>
+              <a:t>AUSBLICK</a:t>
+            </a:r>
+            <a:endParaRPr lang="en-US" sz="1150" dirty="0"/>
+          </a:p>
+        </p:txBody>
+      </p:sp>
+      <p:sp>
+        <p:nvSpPr>
+          <p:cNvPr id="4" name="Text 2"/>
+          <p:cNvSpPr/>
+          <p:nvPr/>
+        </p:nvSpPr>
+        <p:spPr>
+          <a:xfrm>
+            <a:off x="566928" y="731520"/>
+            <a:ext cx="8010144" cy="603504"/>
+          </a:xfrm>
+          <a:prstGeom prst="rect">
+            <a:avLst/>
+          </a:prstGeom>
+          <a:noFill/>
+          <a:ln/>
+        </p:spPr>
+        <p:txBody>
+          <a:bodyPr wrap="square" lIns="0" tIns="0" rIns="0" bIns="0" rtlCol="0" anchor="t"/>
+          <a:lstStyle/>
+          <a:p>
+            <a:pPr indent="0" marL="0">
+              <a:buNone/>
+            </a:pPr>
+            <a:r>
+              <a:rPr lang="en-US" sz="2600" b="1" dirty="0">
+                <a:solidFill>
+                  <a:srgbClr val="272E52"/>
+                </a:solidFill>
+                <a:latin typeface="Arial" pitchFamily="34" charset="0"/>
+                <a:ea typeface="Arial" pitchFamily="34" charset="-122"/>
+                <a:cs typeface="Arial" pitchFamily="34" charset="-120"/>
+              </a:rPr>
+              <a:t>Bis Mittwoch</a:t>
+            </a:r>
+            <a:endParaRPr lang="en-US" sz="2600" dirty="0"/>
+          </a:p>
+        </p:txBody>
+      </p:sp>
+      <p:sp>
+        <p:nvSpPr>
+          <p:cNvPr id="5" name="Text 3"/>
+          <p:cNvSpPr/>
+          <p:nvPr/>
+        </p:nvSpPr>
+        <p:spPr>
+          <a:xfrm>
+            <a:off x="566928" y="1444752"/>
+            <a:ext cx="8010144" cy="438912"/>
+          </a:xfrm>
+          <a:prstGeom prst="rect">
+            <a:avLst/>
+          </a:prstGeom>
+          <a:noFill/>
+          <a:ln/>
+        </p:spPr>
+        <p:txBody>
+          <a:bodyPr wrap="square" lIns="0" tIns="0" rIns="0" bIns="0" rtlCol="0" anchor="t"/>
+          <a:lstStyle/>
+          <a:p>
+            <a:pPr indent="0" marL="0">
+              <a:buNone/>
+            </a:pPr>
+            <a:r>
+              <a:rPr lang="en-US" sz="1300" dirty="0">
+                <a:solidFill>
+                  <a:srgbClr val="5C6377"/>
+                </a:solidFill>
+                <a:latin typeface="Arial" pitchFamily="34" charset="0"/>
+                <a:ea typeface="Arial" pitchFamily="34" charset="-122"/>
+                <a:cs typeface="Arial" pitchFamily="34" charset="-120"/>
+              </a:rPr>
+              <a:t>Mittwoch verschwindet die Zettelwirtschaft: Der ganze Stack wandert in eine einzige Datei.</a:t>
+            </a:r>
+            <a:endParaRPr lang="en-US" sz="1300" dirty="0"/>
+          </a:p>
+        </p:txBody>
+      </p:sp>
+      <p:sp>
+        <p:nvSpPr>
+          <p:cNvPr id="6" name="Shape 4"/>
+          <p:cNvSpPr/>
+          <p:nvPr/>
+        </p:nvSpPr>
+        <p:spPr>
+          <a:xfrm>
+            <a:off x="566928" y="1975104"/>
+            <a:ext cx="2523744" cy="1920240"/>
+          </a:xfrm>
+          <a:prstGeom prst="rect">
+            <a:avLst/>
+          </a:prstGeom>
+          <a:solidFill>
+            <a:srgbClr val="F5F6FC"/>
+          </a:solidFill>
+          <a:ln/>
+        </p:spPr>
+      </p:sp>
+      <p:sp>
+        <p:nvSpPr>
+          <p:cNvPr id="7" name="Shape 5"/>
+          <p:cNvSpPr/>
+          <p:nvPr/>
+        </p:nvSpPr>
+        <p:spPr>
+          <a:xfrm>
+            <a:off x="566928" y="1975104"/>
+            <a:ext cx="41148" cy="1920240"/>
+          </a:xfrm>
+          <a:prstGeom prst="rect">
+            <a:avLst/>
+          </a:prstGeom>
+          <a:solidFill>
+            <a:srgbClr val="0F7C86"/>
+          </a:solidFill>
+          <a:ln/>
+        </p:spPr>
+      </p:sp>
+      <p:sp>
+        <p:nvSpPr>
+          <p:cNvPr id="8" name="Text 6"/>
+          <p:cNvSpPr/>
+          <p:nvPr/>
+        </p:nvSpPr>
+        <p:spPr>
+          <a:xfrm>
+            <a:off x="804672" y="2121408"/>
+            <a:ext cx="2121408" cy="256032"/>
+          </a:xfrm>
+          <a:prstGeom prst="rect">
+            <a:avLst/>
+          </a:prstGeom>
+          <a:noFill/>
+          <a:ln/>
+        </p:spPr>
+        <p:txBody>
+          <a:bodyPr wrap="square" lIns="0" tIns="0" rIns="0" bIns="0" rtlCol="0" anchor="t"/>
+          <a:lstStyle/>
+          <a:p>
+            <a:pPr indent="0" marL="0">
+              <a:buNone/>
+            </a:pPr>
+            <a:r>
+              <a:rPr lang="en-US" sz="1300" b="1" dirty="0">
+                <a:solidFill>
+                  <a:srgbClr val="272E52"/>
+                </a:solidFill>
+                <a:latin typeface="Arial" pitchFamily="34" charset="0"/>
+                <a:ea typeface="Arial" pitchFamily="34" charset="-122"/>
+                <a:cs typeface="Arial" pitchFamily="34" charset="-120"/>
+              </a:rPr>
+              <a:t>Docker Compose</a:t>
+            </a:r>
+            <a:endParaRPr lang="en-US" sz="1300" dirty="0"/>
+          </a:p>
+        </p:txBody>
+      </p:sp>
+      <p:sp>
+        <p:nvSpPr>
+          <p:cNvPr id="9" name="Text 7"/>
+          <p:cNvSpPr/>
+          <p:nvPr/>
+        </p:nvSpPr>
+        <p:spPr>
+          <a:xfrm>
+            <a:off x="804672" y="2423160"/>
+            <a:ext cx="2121408" cy="1353312"/>
+          </a:xfrm>
+          <a:prstGeom prst="rect">
+            <a:avLst/>
+          </a:prstGeom>
+          <a:noFill/>
+          <a:ln/>
+        </p:spPr>
+        <p:txBody>
+          <a:bodyPr wrap="square" lIns="0" tIns="0" rIns="0" bIns="0" rtlCol="0" anchor="t"/>
+          <a:lstStyle/>
+          <a:p>
+            <a:pPr indent="0" marL="0">
+              <a:lnSpc>
+                <a:spcPct val="92000"/>
+              </a:lnSpc>
+              <a:buNone/>
+            </a:pPr>
+            <a:r>
+              <a:rPr lang="en-US" sz="1150" dirty="0">
+                <a:solidFill>
+                  <a:srgbClr val="434A63"/>
+                </a:solidFill>
+                <a:latin typeface="Arial" pitchFamily="34" charset="0"/>
+                <a:ea typeface="Arial" pitchFamily="34" charset="-122"/>
+                <a:cs typeface="Arial" pitchFamily="34" charset="-120"/>
+              </a:rPr>
+              <a:t>Eine Datei beschreibt Volume, Netz und beide Container. Ein Befehl startet alles zusammen.</a:t>
+            </a:r>
+            <a:endParaRPr lang="en-US" sz="1150" dirty="0"/>
+          </a:p>
+        </p:txBody>
+      </p:sp>
+      <p:sp>
+        <p:nvSpPr>
+          <p:cNvPr id="10" name="Shape 8"/>
+          <p:cNvSpPr/>
+          <p:nvPr/>
+        </p:nvSpPr>
+        <p:spPr>
+          <a:xfrm>
+            <a:off x="3310128" y="1975104"/>
+            <a:ext cx="2523744" cy="1920240"/>
+          </a:xfrm>
+          <a:prstGeom prst="rect">
+            <a:avLst/>
+          </a:prstGeom>
+          <a:solidFill>
+            <a:srgbClr val="F5F6FC"/>
+          </a:solidFill>
+          <a:ln/>
+        </p:spPr>
+      </p:sp>
+      <p:sp>
+        <p:nvSpPr>
+          <p:cNvPr id="11" name="Shape 9"/>
+          <p:cNvSpPr/>
+          <p:nvPr/>
+        </p:nvSpPr>
+        <p:spPr>
+          <a:xfrm>
+            <a:off x="3310128" y="1975104"/>
+            <a:ext cx="41148" cy="1920240"/>
+          </a:xfrm>
+          <a:prstGeom prst="rect">
+            <a:avLst/>
+          </a:prstGeom>
+          <a:solidFill>
+            <a:srgbClr val="0F7C86"/>
+          </a:solidFill>
+          <a:ln/>
+        </p:spPr>
+      </p:sp>
+      <p:sp>
+        <p:nvSpPr>
+          <p:cNvPr id="12" name="Text 10"/>
+          <p:cNvSpPr/>
+          <p:nvPr/>
+        </p:nvSpPr>
+        <p:spPr>
+          <a:xfrm>
+            <a:off x="3547872" y="2121408"/>
+            <a:ext cx="2121408" cy="256032"/>
+          </a:xfrm>
+          <a:prstGeom prst="rect">
+            <a:avLst/>
+          </a:prstGeom>
+          <a:noFill/>
+          <a:ln/>
+        </p:spPr>
+        <p:txBody>
+          <a:bodyPr wrap="square" lIns="0" tIns="0" rIns="0" bIns="0" rtlCol="0" anchor="t"/>
+          <a:lstStyle/>
+          <a:p>
+            <a:pPr indent="0" marL="0">
+              <a:buNone/>
+            </a:pPr>
+            <a:r>
+              <a:rPr lang="en-US" sz="1300" b="1" dirty="0">
+                <a:solidFill>
+                  <a:srgbClr val="272E52"/>
+                </a:solidFill>
+                <a:latin typeface="Arial" pitchFamily="34" charset="0"/>
+                <a:ea typeface="Arial" pitchFamily="34" charset="-122"/>
+                <a:cs typeface="Arial" pitchFamily="34" charset="-120"/>
+              </a:rPr>
+              <a:t>Euer Vorteil</a:t>
+            </a:r>
+            <a:endParaRPr lang="en-US" sz="1300" dirty="0"/>
+          </a:p>
+        </p:txBody>
+      </p:sp>
+      <p:sp>
+        <p:nvSpPr>
+          <p:cNvPr id="13" name="Text 11"/>
+          <p:cNvSpPr/>
+          <p:nvPr/>
+        </p:nvSpPr>
+        <p:spPr>
+          <a:xfrm>
+            <a:off x="3547872" y="2423160"/>
+            <a:ext cx="2121408" cy="1353312"/>
+          </a:xfrm>
+          <a:prstGeom prst="rect">
+            <a:avLst/>
+          </a:prstGeom>
+          <a:noFill/>
+          <a:ln/>
+        </p:spPr>
+        <p:txBody>
+          <a:bodyPr wrap="square" lIns="0" tIns="0" rIns="0" bIns="0" rtlCol="0" anchor="t"/>
+          <a:lstStyle/>
+          <a:p>
+            <a:pPr indent="0" marL="0">
+              <a:lnSpc>
+                <a:spcPct val="92000"/>
+              </a:lnSpc>
+              <a:buNone/>
+            </a:pPr>
+            <a:r>
+              <a:rPr lang="en-US" sz="1150" dirty="0">
+                <a:solidFill>
+                  <a:srgbClr val="434A63"/>
+                </a:solidFill>
+                <a:latin typeface="Arial" pitchFamily="34" charset="0"/>
+                <a:ea typeface="Arial" pitchFamily="34" charset="-122"/>
+                <a:cs typeface="Arial" pitchFamily="34" charset="-120"/>
+              </a:rPr>
+              <a:t>Ihr kennt jede Zeile dieser Datei schon, denn heute habt ihr alles darin von Hand gebaut.</a:t>
+            </a:r>
+            <a:endParaRPr lang="en-US" sz="1150" dirty="0"/>
+          </a:p>
+        </p:txBody>
+      </p:sp>
+      <p:sp>
+        <p:nvSpPr>
+          <p:cNvPr id="14" name="Shape 12"/>
+          <p:cNvSpPr/>
+          <p:nvPr/>
+        </p:nvSpPr>
+        <p:spPr>
+          <a:xfrm>
+            <a:off x="6053328" y="1975104"/>
+            <a:ext cx="2523744" cy="1920240"/>
+          </a:xfrm>
+          <a:prstGeom prst="rect">
+            <a:avLst/>
+          </a:prstGeom>
+          <a:solidFill>
+            <a:srgbClr val="F5F6FC"/>
+          </a:solidFill>
+          <a:ln/>
+        </p:spPr>
+      </p:sp>
+      <p:sp>
+        <p:nvSpPr>
+          <p:cNvPr id="15" name="Shape 13"/>
+          <p:cNvSpPr/>
+          <p:nvPr/>
+        </p:nvSpPr>
+        <p:spPr>
+          <a:xfrm>
+            <a:off x="6053328" y="1975104"/>
+            <a:ext cx="41148" cy="1920240"/>
+          </a:xfrm>
+          <a:prstGeom prst="rect">
+            <a:avLst/>
+          </a:prstGeom>
+          <a:solidFill>
+            <a:srgbClr val="0F7C86"/>
+          </a:solidFill>
+          <a:ln/>
+        </p:spPr>
+      </p:sp>
+      <p:sp>
+        <p:nvSpPr>
+          <p:cNvPr id="16" name="Text 14"/>
+          <p:cNvSpPr/>
+          <p:nvPr/>
+        </p:nvSpPr>
+        <p:spPr>
+          <a:xfrm>
+            <a:off x="6291072" y="2121408"/>
+            <a:ext cx="2121408" cy="256032"/>
+          </a:xfrm>
+          <a:prstGeom prst="rect">
+            <a:avLst/>
+          </a:prstGeom>
+          <a:noFill/>
+          <a:ln/>
+        </p:spPr>
+        <p:txBody>
+          <a:bodyPr wrap="square" lIns="0" tIns="0" rIns="0" bIns="0" rtlCol="0" anchor="t"/>
+          <a:lstStyle/>
+          <a:p>
+            <a:pPr indent="0" marL="0">
+              <a:buNone/>
+            </a:pPr>
+            <a:r>
+              <a:rPr lang="en-US" sz="1300" b="1" dirty="0">
+                <a:solidFill>
+                  <a:srgbClr val="272E52"/>
+                </a:solidFill>
+                <a:latin typeface="Arial" pitchFamily="34" charset="0"/>
+                <a:ea typeface="Arial" pitchFamily="34" charset="-122"/>
+                <a:cs typeface="Arial" pitchFamily="34" charset="-120"/>
+              </a:rPr>
+              <a:t>Nichts vorbereiten</a:t>
+            </a:r>
+            <a:endParaRPr lang="en-US" sz="1300" dirty="0"/>
+          </a:p>
+        </p:txBody>
+      </p:sp>
+      <p:sp>
+        <p:nvSpPr>
+          <p:cNvPr id="17" name="Text 15"/>
+          <p:cNvSpPr/>
+          <p:nvPr/>
+        </p:nvSpPr>
+        <p:spPr>
+          <a:xfrm>
+            <a:off x="6291072" y="2423160"/>
+            <a:ext cx="2121408" cy="1353312"/>
+          </a:xfrm>
+          <a:prstGeom prst="rect">
+            <a:avLst/>
+          </a:prstGeom>
+          <a:noFill/>
+          <a:ln/>
+        </p:spPr>
+        <p:txBody>
+          <a:bodyPr wrap="square" lIns="0" tIns="0" rIns="0" bIns="0" rtlCol="0" anchor="t"/>
+          <a:lstStyle/>
+          <a:p>
+            <a:pPr indent="0" marL="0">
+              <a:lnSpc>
+                <a:spcPct val="92000"/>
+              </a:lnSpc>
+              <a:buNone/>
+            </a:pPr>
+            <a:r>
+              <a:rPr lang="en-US" sz="1150" dirty="0">
+                <a:solidFill>
+                  <a:srgbClr val="434A63"/>
+                </a:solidFill>
+                <a:latin typeface="Arial" pitchFamily="34" charset="0"/>
+                <a:ea typeface="Arial" pitchFamily="34" charset="-122"/>
+                <a:cs typeface="Arial" pitchFamily="34" charset="-120"/>
+              </a:rPr>
+              <a:t>Docker läuft, mehr braucht es nicht. Wer mag, wiederholt zu Hause den Härtetest.</a:t>
+            </a:r>
+            <a:endParaRPr lang="en-US" sz="1150" dirty="0"/>
+          </a:p>
+        </p:txBody>
+      </p:sp>
+      <p:sp>
+        <p:nvSpPr>
+          <p:cNvPr id="18" name="Shape 16"/>
+          <p:cNvSpPr/>
+          <p:nvPr/>
+        </p:nvSpPr>
+        <p:spPr>
+          <a:xfrm>
+            <a:off x="566928" y="4160520"/>
+            <a:ext cx="32004" cy="256032"/>
+          </a:xfrm>
+          <a:prstGeom prst="rect">
+            <a:avLst/>
+          </a:prstGeom>
+          <a:solidFill>
+            <a:srgbClr val="0F7C86"/>
+          </a:solidFill>
+          <a:ln/>
+        </p:spPr>
+      </p:sp>
+      <p:sp>
+        <p:nvSpPr>
+          <p:cNvPr id="19" name="Text 17"/>
+          <p:cNvSpPr/>
+          <p:nvPr/>
+        </p:nvSpPr>
+        <p:spPr>
+          <a:xfrm>
+            <a:off x="749808" y="4114800"/>
+            <a:ext cx="7827264" cy="402336"/>
+          </a:xfrm>
+          <a:prstGeom prst="rect">
+            <a:avLst/>
+          </a:prstGeom>
+          <a:noFill/>
+          <a:ln/>
+        </p:spPr>
+        <p:txBody>
+          <a:bodyPr wrap="square" lIns="0" tIns="0" rIns="0" bIns="0" rtlCol="0" anchor="ctr"/>
+          <a:lstStyle/>
+          <a:p>
+            <a:pPr indent="0" marL="0">
+              <a:buNone/>
+            </a:pPr>
+            <a:r>
+              <a:rPr lang="en-US" sz="1200" b="1" dirty="0">
+                <a:solidFill>
+                  <a:srgbClr val="434A63"/>
+                </a:solidFill>
+                <a:latin typeface="Arial" pitchFamily="34" charset="0"/>
+                <a:ea typeface="Arial" pitchFamily="34" charset="-122"/>
+                <a:cs typeface="Arial" pitchFamily="34" charset="-120"/>
+              </a:rPr>
+              <a:t>Nächster Termin: Mittwoch, 16. September um 18:00 Uhr mit Docker Compose.</a:t>
+            </a:r>
+            <a:endParaRPr lang="en-US" sz="1200" dirty="0"/>
+          </a:p>
+        </p:txBody>
+      </p:sp>
+      <p:sp>
+        <p:nvSpPr>
+          <p:cNvPr id="20" name="Shape 18"/>
+          <p:cNvSpPr/>
+          <p:nvPr/>
+        </p:nvSpPr>
+        <p:spPr>
+          <a:xfrm>
+            <a:off x="566928" y="4631436"/>
+            <a:ext cx="8010144" cy="0"/>
+          </a:xfrm>
+          <a:prstGeom prst="line">
+            <a:avLst/>
+          </a:prstGeom>
+          <a:noFill/>
+          <a:ln w="9525">
+            <a:solidFill>
+              <a:srgbClr val="DFE3F0"/>
+            </a:solidFill>
+            <a:prstDash val="solid"/>
+          </a:ln>
+        </p:spPr>
+      </p:sp>
+      <p:sp>
+        <p:nvSpPr>
+          <p:cNvPr id="21" name="Text 19"/>
+          <p:cNvSpPr/>
+          <p:nvPr/>
+        </p:nvSpPr>
+        <p:spPr>
+          <a:xfrm>
+            <a:off x="566928" y="4722876"/>
+            <a:ext cx="5029200" cy="237744"/>
+          </a:xfrm>
+          <a:prstGeom prst="rect">
+            <a:avLst/>
+          </a:prstGeom>
+          <a:noFill/>
+          <a:ln/>
+        </p:spPr>
+        <p:txBody>
+          <a:bodyPr wrap="square" lIns="0" tIns="0" rIns="0" bIns="0" rtlCol="0" anchor="ctr"/>
+          <a:lstStyle/>
+          <a:p>
+            <a:pPr indent="0" marL="0">
+              <a:buNone/>
+            </a:pPr>
+            <a:r>
+              <a:rPr lang="en-US" sz="1050" spc="30" kern="0" dirty="0">
+                <a:solidFill>
+                  <a:srgbClr val="5C6377"/>
+                </a:solidFill>
+                <a:latin typeface="Arial" pitchFamily="34" charset="0"/>
+                <a:ea typeface="Arial" pitchFamily="34" charset="-122"/>
+                <a:cs typeface="Arial" pitchFamily="34" charset="-120"/>
+              </a:rPr>
+              <a:t>Abschluss</a:t>
+            </a:r>
+            <a:endParaRPr lang="en-US" sz="1050" dirty="0"/>
+          </a:p>
+        </p:txBody>
+      </p:sp>
+      <p:sp>
+        <p:nvSpPr>
+          <p:cNvPr id="22" name="Text 20"/>
+          <p:cNvSpPr/>
+          <p:nvPr/>
+        </p:nvSpPr>
+        <p:spPr>
+          <a:xfrm>
+            <a:off x="8028432" y="4722876"/>
+            <a:ext cx="548640" cy="237744"/>
+          </a:xfrm>
+          <a:prstGeom prst="rect">
+            <a:avLst/>
+          </a:prstGeom>
+          <a:noFill/>
+          <a:ln/>
+        </p:spPr>
+        <p:txBody>
+          <a:bodyPr wrap="square" lIns="0" tIns="0" rIns="0" bIns="0" rtlCol="0" anchor="ctr"/>
+          <a:lstStyle/>
+          <a:p>
+            <a:pPr algn="r" indent="0" marL="0">
+              <a:buNone/>
+            </a:pPr>
+            <a:r>
+              <a:rPr lang="en-US" sz="1050" dirty="0">
+                <a:solidFill>
+                  <a:srgbClr val="5C6377"/>
+                </a:solidFill>
+                <a:latin typeface="Arial" pitchFamily="34" charset="0"/>
+                <a:ea typeface="Arial" pitchFamily="34" charset="-122"/>
+                <a:cs typeface="Arial" pitchFamily="34" charset="-120"/>
+              </a:rPr>
+              <a:t>20/20</a:t>
+            </a:r>
+            <a:endParaRPr lang="en-US" sz="1050" dirty="0"/>
+          </a:p>
+        </p:txBody>
+      </p:sp>
+    </p:spTree>
+  </p:cSld>
+  <p:clrMapOvr>
+    <a:masterClrMapping/>
+  </p:clrMapOvr>
+</p:sld>
+</file>
+
+<file path=ppt/slides/slide24.xml><?xml version="1.0" encoding="utf-8"?>
+<p:sld xmlns:a="http://schemas.openxmlformats.org/drawingml/2006/main" xmlns:r="http://schemas.openxmlformats.org/officeDocument/2006/relationships" xmlns:p="http://schemas.openxmlformats.org/presentationml/2006/main">
+  <p:cSld name="Slide 24">
+    <p:bg>
+      <p:bgPr>
+        <a:solidFill>
+          <a:srgbClr val="F5F6FC"/>
+        </a:solidFill>
+      </p:bgPr>
+    </p:bg>
+    <p:spTree>
+      <p:nvGrpSpPr>
+        <p:cNvPr id="1" name=""/>
+        <p:cNvGrpSpPr/>
+        <p:nvPr/>
+      </p:nvGrpSpPr>
+      <p:grpSpPr>
+        <a:xfrm>
+          <a:off x="0" y="0"/>
+          <a:ext cx="0" cy="0"/>
+          <a:chOff x="0" y="0"/>
+          <a:chExt cx="0" cy="0"/>
+        </a:xfrm>
+      </p:grpSpPr>
+      <p:sp>
+        <p:nvSpPr>
+          <p:cNvPr id="2" name="Shape 0"/>
+          <p:cNvSpPr/>
+          <p:nvPr/>
+        </p:nvSpPr>
+        <p:spPr>
+          <a:xfrm>
+            <a:off x="0" y="5015484"/>
+            <a:ext cx="9144000" cy="128016"/>
+          </a:xfrm>
+          <a:prstGeom prst="rect">
+            <a:avLst/>
+          </a:prstGeom>
+          <a:solidFill>
+            <a:srgbClr val="0F7C86"/>
+          </a:solidFill>
+          <a:ln/>
+        </p:spPr>
+      </p:sp>
+      <p:sp>
+        <p:nvSpPr>
+          <p:cNvPr id="3" name="Text 1"/>
+          <p:cNvSpPr/>
+          <p:nvPr/>
+        </p:nvSpPr>
+        <p:spPr>
+          <a:xfrm>
+            <a:off x="566928" y="1828800"/>
+            <a:ext cx="8010144" cy="914400"/>
+          </a:xfrm>
+          <a:prstGeom prst="rect">
+            <a:avLst/>
+          </a:prstGeom>
+          <a:noFill/>
+          <a:ln/>
+        </p:spPr>
+        <p:txBody>
+          <a:bodyPr wrap="square" lIns="0" tIns="0" rIns="0" bIns="0" rtlCol="0" anchor="ctr"/>
+          <a:lstStyle/>
+          <a:p>
+            <a:pPr algn="ctr" indent="0" marL="0">
+              <a:buNone/>
+            </a:pPr>
+            <a:r>
+              <a:rPr lang="en-US" sz="3200" b="1" dirty="0">
+                <a:solidFill>
+                  <a:srgbClr val="272E52"/>
+                </a:solidFill>
+                <a:latin typeface="Arial" pitchFamily="34" charset="0"/>
+                <a:ea typeface="Arial" pitchFamily="34" charset="-122"/>
+                <a:cs typeface="Arial" pitchFamily="34" charset="-120"/>
+              </a:rPr>
+              <a:t>Härtetest bestanden.</a:t>
+            </a:r>
+            <a:endParaRPr lang="en-US" sz="3200" dirty="0"/>
+          </a:p>
+        </p:txBody>
+      </p:sp>
+      <p:sp>
+        <p:nvSpPr>
+          <p:cNvPr id="4" name="Text 2"/>
+          <p:cNvSpPr/>
+          <p:nvPr/>
+        </p:nvSpPr>
+        <p:spPr>
+          <a:xfrm>
+            <a:off x="566928" y="2788920"/>
+            <a:ext cx="8010144" cy="457200"/>
+          </a:xfrm>
+          <a:prstGeom prst="rect">
+            <a:avLst/>
+          </a:prstGeom>
+          <a:noFill/>
+          <a:ln/>
+        </p:spPr>
+        <p:txBody>
+          <a:bodyPr wrap="square" lIns="0" tIns="0" rIns="0" bIns="0" rtlCol="0" anchor="t"/>
+          <a:lstStyle/>
+          <a:p>
+            <a:pPr algn="ctr" indent="0" marL="0">
+              <a:buNone/>
+            </a:pPr>
+            <a:r>
+              <a:rPr lang="en-US" sz="1400" dirty="0">
+                <a:solidFill>
+                  <a:srgbClr val="5C6377"/>
+                </a:solidFill>
+                <a:latin typeface="Arial" pitchFamily="34" charset="0"/>
+                <a:ea typeface="Arial" pitchFamily="34" charset="-122"/>
+                <a:cs typeface="Arial" pitchFamily="34" charset="-120"/>
+              </a:rPr>
+              <a:t>Alle Befehle, die Erklärungen und die Stolpersteine stehen zum Nachlesen auf der Kursseite.</a:t>
+            </a:r>
+            <a:endParaRPr lang="en-US" sz="1400" dirty="0"/>
+          </a:p>
+        </p:txBody>
+      </p:sp>
+      <p:sp>
+        <p:nvSpPr>
+          <p:cNvPr id="5" name="Text 3"/>
+          <p:cNvSpPr/>
+          <p:nvPr/>
+        </p:nvSpPr>
+        <p:spPr>
+          <a:xfrm>
+            <a:off x="566928" y="3401568"/>
+            <a:ext cx="8010144" cy="457200"/>
+          </a:xfrm>
+          <a:prstGeom prst="rect">
+            <a:avLst/>
+          </a:prstGeom>
+          <a:noFill/>
+          <a:ln/>
+        </p:spPr>
+        <p:txBody>
+          <a:bodyPr wrap="square" lIns="0" tIns="0" rIns="0" bIns="0" rtlCol="0" anchor="t"/>
+          <a:lstStyle/>
+          <a:p>
+            <a:pPr algn="ctr" indent="0" marL="0">
+              <a:buNone/>
+            </a:pPr>
+            <a:r>
+              <a:rPr lang="en-US" sz="1600" b="1" dirty="0">
+                <a:solidFill>
+                  <a:srgbClr val="0F7C86"/>
+                </a:solidFill>
+                <a:latin typeface="Arial" pitchFamily="34" charset="0"/>
+                <a:ea typeface="Arial" pitchFamily="34" charset="-122"/>
+                <a:cs typeface="Arial" pitchFamily="34" charset="-120"/>
+              </a:rPr>
+              <a:t>Mittwoch, 16. September · Docker Compose</a:t>
+            </a:r>
+            <a:endParaRPr lang="en-US" sz="1600" dirty="0"/>
           </a:p>
         </p:txBody>
       </p:sp>
@@ -8017,7 +10435,7 @@
                 <a:ea typeface="Arial" pitchFamily="34" charset="-122"/>
                 <a:cs typeface="Arial" pitchFamily="34" charset="-120"/>
               </a:rPr>
-              <a:t>Mittwoch im Bonus: Datei im laufenden Container geändert,</a:t>
+              <a:t>Mittwochs Experiment: Datei im Container geändert,</a:t>
             </a:r>
             <a:endParaRPr lang="en-US" sz="2200" dirty="0"/>
           </a:p>
@@ -8034,7 +10452,7 @@
                 <a:ea typeface="Arial" pitchFamily="34" charset="-122"/>
                 <a:cs typeface="Arial" pitchFamily="34" charset="-120"/>
               </a:rPr>
-              <a:t>Container gelöscht, neuen gestartet.</a:t>
+              <a:t>Container gelöscht und neu gestartet.</a:t>
             </a:r>
             <a:endParaRPr lang="en-US" sz="2200" dirty="0"/>
           </a:p>
@@ -8211,7 +10629,7 @@
                 <a:ea typeface="Arial" pitchFamily="34" charset="-122"/>
                 <a:cs typeface="Arial" pitchFamily="34" charset="-120"/>
               </a:rPr>
-              <a:t>2/14</a:t>
+              <a:t>2/20</a:t>
             </a:r>
             <a:endParaRPr lang="en-US" sz="1050" dirty="0"/>
           </a:p>
@@ -8525,7 +10943,7 @@
                 <a:ea typeface="Arial" pitchFamily="34" charset="-122"/>
                 <a:cs typeface="Arial" pitchFamily="34" charset="-120"/>
               </a:rPr>
-              <a:t>3/14</a:t>
+              <a:t>3/20</a:t>
             </a:r>
             <a:endParaRPr lang="en-US" sz="1050" dirty="0"/>
           </a:p>
@@ -8571,28 +10989,8 @@
         </p:nvSpPr>
         <p:spPr>
           <a:xfrm>
-            <a:off x="6355080" y="0"/>
-            <a:ext cx="2788920" cy="5143500"/>
-          </a:xfrm>
-          <a:prstGeom prst="rect">
-            <a:avLst/>
-          </a:prstGeom>
-          <a:solidFill>
-            <a:srgbClr val="E6F4F5"/>
-          </a:solidFill>
-          <a:ln/>
-        </p:spPr>
-      </p:sp>
-      <p:sp>
-        <p:nvSpPr>
-          <p:cNvPr id="3" name="Shape 1"/>
-          <p:cNvSpPr/>
-          <p:nvPr/>
-        </p:nvSpPr>
-        <p:spPr>
-          <a:xfrm>
-            <a:off x="6355080" y="0"/>
-            <a:ext cx="45720" cy="5143500"/>
+            <a:off x="566928" y="201168"/>
+            <a:ext cx="475488" cy="50292"/>
           </a:xfrm>
           <a:prstGeom prst="rect">
             <a:avLst/>
@@ -8605,53 +11003,116 @@
       </p:sp>
       <p:sp>
         <p:nvSpPr>
+          <p:cNvPr id="3" name="Text 1"/>
+          <p:cNvSpPr/>
+          <p:nvPr/>
+        </p:nvSpPr>
+        <p:spPr>
+          <a:xfrm>
+            <a:off x="566928" y="384048"/>
+            <a:ext cx="8010144" cy="237744"/>
+          </a:xfrm>
+          <a:prstGeom prst="rect">
+            <a:avLst/>
+          </a:prstGeom>
+          <a:noFill/>
+          <a:ln/>
+        </p:spPr>
+        <p:txBody>
+          <a:bodyPr wrap="square" lIns="0" tIns="0" rIns="0" bIns="0" rtlCol="0" anchor="ctr"/>
+          <a:lstStyle/>
+          <a:p>
+            <a:pPr indent="0" marL="0">
+              <a:buNone/>
+            </a:pPr>
+            <a:r>
+              <a:rPr lang="en-US" sz="1150" b="1" spc="180" kern="0" dirty="0">
+                <a:solidFill>
+                  <a:srgbClr val="0F7C86"/>
+                </a:solidFill>
+                <a:latin typeface="Arial" pitchFamily="34" charset="0"/>
+                <a:ea typeface="Arial" pitchFamily="34" charset="-122"/>
+                <a:cs typeface="Arial" pitchFamily="34" charset="-120"/>
+              </a:rPr>
+              <a:t>DIE HANDGRIFFE VON MITTWOCH</a:t>
+            </a:r>
+            <a:endParaRPr lang="en-US" sz="1150" dirty="0"/>
+          </a:p>
+        </p:txBody>
+      </p:sp>
+      <p:sp>
+        <p:nvSpPr>
           <p:cNvPr id="4" name="Text 2"/>
           <p:cNvSpPr/>
           <p:nvPr/>
         </p:nvSpPr>
         <p:spPr>
           <a:xfrm>
-            <a:off x="6629400" y="1463040"/>
-            <a:ext cx="2194560" cy="1737360"/>
-          </a:xfrm>
-          <a:prstGeom prst="rect">
-            <a:avLst/>
-          </a:prstGeom>
-          <a:noFill/>
-          <a:ln/>
-        </p:spPr>
-        <p:txBody>
-          <a:bodyPr wrap="square" lIns="0" tIns="0" rIns="0" bIns="0" rtlCol="0" anchor="ctr"/>
-          <a:lstStyle/>
-          <a:p>
-            <a:pPr algn="ctr" indent="0" marL="0">
-              <a:buNone/>
-            </a:pPr>
-            <a:r>
-              <a:rPr lang="en-US" sz="8400" b="1" dirty="0">
-                <a:solidFill>
-                  <a:srgbClr val="0F7C86"/>
-                </a:solidFill>
-                <a:latin typeface="Arial" pitchFamily="34" charset="0"/>
-                <a:ea typeface="Arial" pitchFamily="34" charset="-122"/>
-                <a:cs typeface="Arial" pitchFamily="34" charset="-120"/>
-              </a:rPr>
-              <a:t>01</a:t>
-            </a:r>
-            <a:endParaRPr lang="en-US" sz="8400" dirty="0"/>
-          </a:p>
-        </p:txBody>
-      </p:sp>
-      <p:sp>
-        <p:nvSpPr>
-          <p:cNvPr id="5" name="Shape 3"/>
-          <p:cNvSpPr/>
-          <p:nvPr/>
-        </p:nvSpPr>
-        <p:spPr>
-          <a:xfrm>
-            <a:off x="566928" y="1883664"/>
-            <a:ext cx="475488" cy="50292"/>
+            <a:off x="566928" y="731520"/>
+            <a:ext cx="8010144" cy="603504"/>
+          </a:xfrm>
+          <a:prstGeom prst="rect">
+            <a:avLst/>
+          </a:prstGeom>
+          <a:noFill/>
+          <a:ln/>
+        </p:spPr>
+        <p:txBody>
+          <a:bodyPr wrap="square" lIns="0" tIns="0" rIns="0" bIns="0" rtlCol="0" anchor="t"/>
+          <a:lstStyle/>
+          <a:p>
+            <a:pPr indent="0" marL="0">
+              <a:buNone/>
+            </a:pPr>
+            <a:r>
+              <a:rPr lang="en-US" sz="2600" b="1" dirty="0">
+                <a:solidFill>
+                  <a:srgbClr val="272E52"/>
+                </a:solidFill>
+                <a:latin typeface="Arial" pitchFamily="34" charset="0"/>
+                <a:ea typeface="Arial" pitchFamily="34" charset="-122"/>
+                <a:cs typeface="Arial" pitchFamily="34" charset="-120"/>
+              </a:rPr>
+              <a:t>Live am Terminal</a:t>
+            </a:r>
+            <a:endParaRPr lang="en-US" sz="2600" dirty="0"/>
+          </a:p>
+        </p:txBody>
+      </p:sp>
+      <p:pic>
+        <p:nvPicPr>
+          <p:cNvPr id="5" name="Image 0" descr="/Users/jacobmenge/Desktop/kurs-26.2b-orga/folienwerkstatt/assets/diagramme/demo-fahrplan.png">    </p:cNvPr>
+          <p:cNvPicPr>
+            <a:picLocks noChangeAspect="1"/>
+          </p:cNvPicPr>
+          <p:nvPr/>
+        </p:nvPicPr>
+        <p:blipFill>
+          <a:blip r:embed="rId1"/>
+          <a:stretch>
+            <a:fillRect/>
+          </a:stretch>
+        </p:blipFill>
+        <p:spPr>
+          <a:xfrm>
+            <a:off x="566928" y="1463040"/>
+            <a:ext cx="8010144" cy="2414016"/>
+          </a:xfrm>
+          <a:prstGeom prst="rect">
+            <a:avLst/>
+          </a:prstGeom>
+        </p:spPr>
+      </p:pic>
+      <p:sp>
+        <p:nvSpPr>
+          <p:cNvPr id="6" name="Shape 3"/>
+          <p:cNvSpPr/>
+          <p:nvPr/>
+        </p:nvSpPr>
+        <p:spPr>
+          <a:xfrm>
+            <a:off x="566928" y="4087368"/>
+            <a:ext cx="32004" cy="256032"/>
           </a:xfrm>
           <a:prstGeom prst="rect">
             <a:avLst/>
@@ -8664,69 +11125,92 @@
       </p:sp>
       <p:sp>
         <p:nvSpPr>
-          <p:cNvPr id="6" name="Text 4"/>
-          <p:cNvSpPr/>
-          <p:nvPr/>
-        </p:nvSpPr>
-        <p:spPr>
-          <a:xfrm>
-            <a:off x="566928" y="2084832"/>
-            <a:ext cx="5394960" cy="868680"/>
-          </a:xfrm>
-          <a:prstGeom prst="rect">
-            <a:avLst/>
-          </a:prstGeom>
-          <a:noFill/>
-          <a:ln/>
-        </p:spPr>
-        <p:txBody>
-          <a:bodyPr wrap="square" lIns="0" tIns="0" rIns="0" bIns="0" rtlCol="0" anchor="t"/>
-          <a:lstStyle/>
-          <a:p>
-            <a:pPr indent="0" marL="0">
-              <a:buNone/>
-            </a:pPr>
-            <a:r>
-              <a:rPr lang="en-US" sz="3000" b="1" dirty="0">
-                <a:solidFill>
-                  <a:srgbClr val="272E52"/>
-                </a:solidFill>
-                <a:latin typeface="Arial" pitchFamily="34" charset="0"/>
-                <a:ea typeface="Arial" pitchFamily="34" charset="-122"/>
-                <a:cs typeface="Arial" pitchFamily="34" charset="-120"/>
-              </a:rPr>
-              <a:t>Drei Bausteine für echte Dienste</a:t>
-            </a:r>
-            <a:endParaRPr lang="en-US" sz="3000" dirty="0"/>
-          </a:p>
-        </p:txBody>
-      </p:sp>
-      <p:sp>
-        <p:nvSpPr>
-          <p:cNvPr id="7" name="Text 5"/>
-          <p:cNvSpPr/>
-          <p:nvPr/>
-        </p:nvSpPr>
-        <p:spPr>
-          <a:xfrm>
-            <a:off x="566928" y="3017520"/>
-            <a:ext cx="5394960" cy="548640"/>
-          </a:xfrm>
-          <a:prstGeom prst="rect">
-            <a:avLst/>
-          </a:prstGeom>
-          <a:noFill/>
-          <a:ln/>
-        </p:spPr>
-        <p:txBody>
-          <a:bodyPr wrap="square" lIns="0" tIns="0" rIns="0" bIns="0" rtlCol="0" anchor="t"/>
-          <a:lstStyle/>
-          <a:p>
-            <a:pPr indent="0" marL="0">
-              <a:buNone/>
-            </a:pPr>
-            <a:r>
-              <a:rPr lang="en-US" sz="1350" dirty="0">
+          <p:cNvPr id="7" name="Text 4"/>
+          <p:cNvSpPr/>
+          <p:nvPr/>
+        </p:nvSpPr>
+        <p:spPr>
+          <a:xfrm>
+            <a:off x="749808" y="4041648"/>
+            <a:ext cx="7827264" cy="402336"/>
+          </a:xfrm>
+          <a:prstGeom prst="rect">
+            <a:avLst/>
+          </a:prstGeom>
+          <a:noFill/>
+          <a:ln/>
+        </p:spPr>
+        <p:txBody>
+          <a:bodyPr wrap="square" lIns="0" tIns="0" rIns="0" bIns="0" rtlCol="0" anchor="ctr"/>
+          <a:lstStyle/>
+          <a:p>
+            <a:pPr indent="0" marL="0">
+              <a:buNone/>
+            </a:pPr>
+            <a:r>
+              <a:rPr lang="en-US" sz="1200" b="1" dirty="0">
+                <a:solidFill>
+                  <a:srgbClr val="434A63"/>
+                </a:solidFill>
+                <a:latin typeface="Arial" pitchFamily="34" charset="0"/>
+                <a:ea typeface="Arial" pitchFamily="34" charset="-122"/>
+                <a:cs typeface="Arial" pitchFamily="34" charset="-120"/>
+              </a:rPr>
+              <a:t>Die Befehle sind auf Windows, macOS und Linux identisch. Wer mag, tippt in der eigenen Shell parallel mit.</a:t>
+            </a:r>
+            <a:endParaRPr lang="en-US" sz="1200" dirty="0"/>
+          </a:p>
+        </p:txBody>
+      </p:sp>
+      <p:sp>
+        <p:nvSpPr>
+          <p:cNvPr id="8" name="Shape 5"/>
+          <p:cNvSpPr/>
+          <p:nvPr/>
+        </p:nvSpPr>
+        <p:spPr>
+          <a:xfrm>
+            <a:off x="566928" y="4631436"/>
+            <a:ext cx="8010144" cy="0"/>
+          </a:xfrm>
+          <a:prstGeom prst="line">
+            <a:avLst/>
+          </a:prstGeom>
+          <a:noFill/>
+          <a:ln w="9525">
+            <a:solidFill>
+              <a:srgbClr val="DFE3F0"/>
+            </a:solidFill>
+            <a:prstDash val="solid"/>
+          </a:ln>
+        </p:spPr>
+      </p:sp>
+      <p:sp>
+        <p:nvSpPr>
+          <p:cNvPr id="9" name="Text 6"/>
+          <p:cNvSpPr/>
+          <p:nvPr/>
+        </p:nvSpPr>
+        <p:spPr>
+          <a:xfrm>
+            <a:off x="566928" y="4722876"/>
+            <a:ext cx="5029200" cy="237744"/>
+          </a:xfrm>
+          <a:prstGeom prst="rect">
+            <a:avLst/>
+          </a:prstGeom>
+          <a:noFill/>
+          <a:ln/>
+        </p:spPr>
+        <p:txBody>
+          <a:bodyPr wrap="square" lIns="0" tIns="0" rIns="0" bIns="0" rtlCol="0" anchor="ctr"/>
+          <a:lstStyle/>
+          <a:p>
+            <a:pPr indent="0" marL="0">
+              <a:buNone/>
+            </a:pPr>
+            <a:r>
+              <a:rPr lang="en-US" sz="1050" spc="30" kern="0" dirty="0">
                 <a:solidFill>
                   <a:srgbClr val="5C6377"/>
                 </a:solidFill>
@@ -8734,9 +11218,48 @@
                 <a:ea typeface="Arial" pitchFamily="34" charset="-122"/>
                 <a:cs typeface="Arial" pitchFamily="34" charset="-120"/>
               </a:rPr>
-              <a:t>Volumes · Netze · Umgebungsvariablen</a:t>
-            </a:r>
-            <a:endParaRPr lang="en-US" sz="1350" dirty="0"/>
+              <a:t>Einstieg</a:t>
+            </a:r>
+            <a:endParaRPr lang="en-US" sz="1050" dirty="0"/>
+          </a:p>
+        </p:txBody>
+      </p:sp>
+      <p:sp>
+        <p:nvSpPr>
+          <p:cNvPr id="10" name="Text 7"/>
+          <p:cNvSpPr/>
+          <p:nvPr/>
+        </p:nvSpPr>
+        <p:spPr>
+          <a:xfrm>
+            <a:off x="8028432" y="4722876"/>
+            <a:ext cx="548640" cy="237744"/>
+          </a:xfrm>
+          <a:prstGeom prst="rect">
+            <a:avLst/>
+          </a:prstGeom>
+          <a:noFill/>
+          <a:ln/>
+        </p:spPr>
+        <p:txBody>
+          <a:bodyPr wrap="square" lIns="0" tIns="0" rIns="0" bIns="0" rtlCol="0" anchor="ctr"/>
+          <a:lstStyle/>
+          <a:p>
+            <a:pPr algn="r" indent="0" marL="0">
+              <a:buNone/>
+            </a:pPr>
+            <a:r>
+              <a:rPr lang="en-US" sz="1050" dirty="0">
+                <a:solidFill>
+                  <a:srgbClr val="5C6377"/>
+                </a:solidFill>
+                <a:latin typeface="Arial" pitchFamily="34" charset="0"/>
+                <a:ea typeface="Arial" pitchFamily="34" charset="-122"/>
+                <a:cs typeface="Arial" pitchFamily="34" charset="-120"/>
+              </a:rPr>
+              <a:t>4/20</a:t>
+            </a:r>
+            <a:endParaRPr lang="en-US" sz="1050" dirty="0"/>
           </a:p>
         </p:txBody>
       </p:sp>
@@ -8780,8 +11303,28 @@
         </p:nvSpPr>
         <p:spPr>
           <a:xfrm>
-            <a:off x="566928" y="201168"/>
-            <a:ext cx="475488" cy="50292"/>
+            <a:off x="6355080" y="0"/>
+            <a:ext cx="2788920" cy="5143500"/>
+          </a:xfrm>
+          <a:prstGeom prst="rect">
+            <a:avLst/>
+          </a:prstGeom>
+          <a:solidFill>
+            <a:srgbClr val="E6F4F5"/>
+          </a:solidFill>
+          <a:ln/>
+        </p:spPr>
+      </p:sp>
+      <p:sp>
+        <p:nvSpPr>
+          <p:cNvPr id="3" name="Shape 1"/>
+          <p:cNvSpPr/>
+          <p:nvPr/>
+        </p:nvSpPr>
+        <p:spPr>
+          <a:xfrm>
+            <a:off x="6355080" y="0"/>
+            <a:ext cx="45720" cy="5143500"/>
           </a:xfrm>
           <a:prstGeom prst="rect">
             <a:avLst/>
@@ -8794,14 +11337,14 @@
       </p:sp>
       <p:sp>
         <p:nvSpPr>
-          <p:cNvPr id="3" name="Text 1"/>
-          <p:cNvSpPr/>
-          <p:nvPr/>
-        </p:nvSpPr>
-        <p:spPr>
-          <a:xfrm>
-            <a:off x="566928" y="384048"/>
-            <a:ext cx="8010144" cy="237744"/>
+          <p:cNvPr id="4" name="Text 2"/>
+          <p:cNvSpPr/>
+          <p:nvPr/>
+        </p:nvSpPr>
+        <p:spPr>
+          <a:xfrm>
+            <a:off x="6629400" y="1463040"/>
+            <a:ext cx="2194560" cy="1737360"/>
           </a:xfrm>
           <a:prstGeom prst="rect">
             <a:avLst/>
@@ -8813,11 +11356,11 @@
           <a:bodyPr wrap="square" lIns="0" tIns="0" rIns="0" bIns="0" rtlCol="0" anchor="ctr"/>
           <a:lstStyle/>
           <a:p>
-            <a:pPr indent="0" marL="0">
-              <a:buNone/>
-            </a:pPr>
-            <a:r>
-              <a:rPr lang="en-US" sz="1150" b="1" spc="180" kern="0" dirty="0">
+            <a:pPr algn="ctr" indent="0" marL="0">
+              <a:buNone/>
+            </a:pPr>
+            <a:r>
+              <a:rPr lang="en-US" sz="8400" b="1" dirty="0">
                 <a:solidFill>
                   <a:srgbClr val="0F7C86"/>
                 </a:solidFill>
@@ -8825,85 +11368,22 @@
                 <a:ea typeface="Arial" pitchFamily="34" charset="-122"/>
                 <a:cs typeface="Arial" pitchFamily="34" charset="-120"/>
               </a:rPr>
-              <a:t>DAS VOLUME</a:t>
-            </a:r>
-            <a:endParaRPr lang="en-US" sz="1150" dirty="0"/>
-          </a:p>
-        </p:txBody>
-      </p:sp>
-      <p:sp>
-        <p:nvSpPr>
-          <p:cNvPr id="4" name="Text 2"/>
-          <p:cNvSpPr/>
-          <p:nvPr/>
-        </p:nvSpPr>
-        <p:spPr>
-          <a:xfrm>
-            <a:off x="566928" y="731520"/>
-            <a:ext cx="8010144" cy="603504"/>
-          </a:xfrm>
-          <a:prstGeom prst="rect">
-            <a:avLst/>
-          </a:prstGeom>
-          <a:noFill/>
-          <a:ln/>
-        </p:spPr>
-        <p:txBody>
-          <a:bodyPr wrap="square" lIns="0" tIns="0" rIns="0" bIns="0" rtlCol="0" anchor="t"/>
-          <a:lstStyle/>
-          <a:p>
-            <a:pPr indent="0" marL="0">
-              <a:buNone/>
-            </a:pPr>
-            <a:r>
-              <a:rPr lang="en-US" sz="2600" b="1" dirty="0">
-                <a:solidFill>
-                  <a:srgbClr val="272E52"/>
-                </a:solidFill>
-                <a:latin typeface="Arial" pitchFamily="34" charset="0"/>
-                <a:ea typeface="Arial" pitchFamily="34" charset="-122"/>
-                <a:cs typeface="Arial" pitchFamily="34" charset="-120"/>
-              </a:rPr>
-              <a:t>Ein Zuhause außerhalb des Containers</a:t>
-            </a:r>
-            <a:endParaRPr lang="en-US" sz="2600" dirty="0"/>
-          </a:p>
-        </p:txBody>
-      </p:sp>
-      <p:pic>
-        <p:nvPicPr>
-          <p:cNvPr id="5" name="Image 0" descr="/Users/jacobmenge/Desktop/kurs-26.2b-orga/folienwerkstatt/assets/diagramme/volume-bild-1.png">    </p:cNvPr>
-          <p:cNvPicPr>
-            <a:picLocks noChangeAspect="1"/>
-          </p:cNvPicPr>
-          <p:nvPr/>
-        </p:nvPicPr>
-        <p:blipFill>
-          <a:blip r:embed="rId1"/>
-          <a:stretch>
-            <a:fillRect/>
-          </a:stretch>
-        </p:blipFill>
-        <p:spPr>
-          <a:xfrm>
-            <a:off x="566928" y="1481328"/>
-            <a:ext cx="8010144" cy="2304288"/>
-          </a:xfrm>
-          <a:prstGeom prst="rect">
-            <a:avLst/>
-          </a:prstGeom>
-        </p:spPr>
-      </p:pic>
-      <p:sp>
-        <p:nvSpPr>
-          <p:cNvPr id="6" name="Shape 3"/>
-          <p:cNvSpPr/>
-          <p:nvPr/>
-        </p:nvSpPr>
-        <p:spPr>
-          <a:xfrm>
-            <a:off x="566928" y="4069080"/>
-            <a:ext cx="32004" cy="256032"/>
+              <a:t>01</a:t>
+            </a:r>
+            <a:endParaRPr lang="en-US" sz="8400" dirty="0"/>
+          </a:p>
+        </p:txBody>
+      </p:sp>
+      <p:sp>
+        <p:nvSpPr>
+          <p:cNvPr id="5" name="Shape 3"/>
+          <p:cNvSpPr/>
+          <p:nvPr/>
+        </p:nvSpPr>
+        <p:spPr>
+          <a:xfrm>
+            <a:off x="566928" y="1883664"/>
+            <a:ext cx="475488" cy="50292"/>
           </a:xfrm>
           <a:prstGeom prst="rect">
             <a:avLst/>
@@ -8916,92 +11396,69 @@
       </p:sp>
       <p:sp>
         <p:nvSpPr>
-          <p:cNvPr id="7" name="Text 4"/>
-          <p:cNvSpPr/>
-          <p:nvPr/>
-        </p:nvSpPr>
-        <p:spPr>
-          <a:xfrm>
-            <a:off x="749808" y="4023360"/>
-            <a:ext cx="7827264" cy="402336"/>
-          </a:xfrm>
-          <a:prstGeom prst="rect">
-            <a:avLst/>
-          </a:prstGeom>
-          <a:noFill/>
-          <a:ln/>
-        </p:spPr>
-        <p:txBody>
-          <a:bodyPr wrap="square" lIns="0" tIns="0" rIns="0" bIns="0" rtlCol="0" anchor="ctr"/>
-          <a:lstStyle/>
-          <a:p>
-            <a:pPr indent="0" marL="0">
-              <a:buNone/>
-            </a:pPr>
-            <a:r>
-              <a:rPr lang="en-US" sz="1200" b="1" dirty="0">
-                <a:solidFill>
-                  <a:srgbClr val="434A63"/>
-                </a:solidFill>
-                <a:latin typeface="Arial" pitchFamily="34" charset="0"/>
-                <a:ea typeface="Arial" pitchFamily="34" charset="-122"/>
-                <a:cs typeface="Arial" pitchFamily="34" charset="-120"/>
-              </a:rPr>
-              <a:t>-v verbindet Volume und Containerpfad. Genau dieses Volume legt ihr gleich selbst an.</a:t>
-            </a:r>
-            <a:endParaRPr lang="en-US" sz="1200" dirty="0"/>
-          </a:p>
-        </p:txBody>
-      </p:sp>
-      <p:sp>
-        <p:nvSpPr>
-          <p:cNvPr id="8" name="Shape 5"/>
-          <p:cNvSpPr/>
-          <p:nvPr/>
-        </p:nvSpPr>
-        <p:spPr>
-          <a:xfrm>
-            <a:off x="566928" y="4631436"/>
-            <a:ext cx="8010144" cy="0"/>
-          </a:xfrm>
-          <a:prstGeom prst="line">
-            <a:avLst/>
-          </a:prstGeom>
-          <a:noFill/>
-          <a:ln w="9525">
-            <a:solidFill>
-              <a:srgbClr val="DFE3F0"/>
-            </a:solidFill>
-            <a:prstDash val="solid"/>
-          </a:ln>
-        </p:spPr>
-      </p:sp>
-      <p:sp>
-        <p:nvSpPr>
-          <p:cNvPr id="9" name="Text 6"/>
-          <p:cNvSpPr/>
-          <p:nvPr/>
-        </p:nvSpPr>
-        <p:spPr>
-          <a:xfrm>
-            <a:off x="566928" y="4722876"/>
-            <a:ext cx="5029200" cy="237744"/>
-          </a:xfrm>
-          <a:prstGeom prst="rect">
-            <a:avLst/>
-          </a:prstGeom>
-          <a:noFill/>
-          <a:ln/>
-        </p:spPr>
-        <p:txBody>
-          <a:bodyPr wrap="square" lIns="0" tIns="0" rIns="0" bIns="0" rtlCol="0" anchor="ctr"/>
-          <a:lstStyle/>
-          <a:p>
-            <a:pPr indent="0" marL="0">
-              <a:buNone/>
-            </a:pPr>
-            <a:r>
-              <a:rPr lang="en-US" sz="1050" spc="30" kern="0" dirty="0">
+          <p:cNvPr id="6" name="Text 4"/>
+          <p:cNvSpPr/>
+          <p:nvPr/>
+        </p:nvSpPr>
+        <p:spPr>
+          <a:xfrm>
+            <a:off x="566928" y="2084832"/>
+            <a:ext cx="5394960" cy="868680"/>
+          </a:xfrm>
+          <a:prstGeom prst="rect">
+            <a:avLst/>
+          </a:prstGeom>
+          <a:noFill/>
+          <a:ln/>
+        </p:spPr>
+        <p:txBody>
+          <a:bodyPr wrap="square" lIns="0" tIns="0" rIns="0" bIns="0" rtlCol="0" anchor="t"/>
+          <a:lstStyle/>
+          <a:p>
+            <a:pPr indent="0" marL="0">
+              <a:buNone/>
+            </a:pPr>
+            <a:r>
+              <a:rPr lang="en-US" sz="3000" b="1" dirty="0">
+                <a:solidFill>
+                  <a:srgbClr val="272E52"/>
+                </a:solidFill>
+                <a:latin typeface="Arial" pitchFamily="34" charset="0"/>
+                <a:ea typeface="Arial" pitchFamily="34" charset="-122"/>
+                <a:cs typeface="Arial" pitchFamily="34" charset="-120"/>
+              </a:rPr>
+              <a:t>Drei Bausteine für echte Dienste</a:t>
+            </a:r>
+            <a:endParaRPr lang="en-US" sz="3000" dirty="0"/>
+          </a:p>
+        </p:txBody>
+      </p:sp>
+      <p:sp>
+        <p:nvSpPr>
+          <p:cNvPr id="7" name="Text 5"/>
+          <p:cNvSpPr/>
+          <p:nvPr/>
+        </p:nvSpPr>
+        <p:spPr>
+          <a:xfrm>
+            <a:off x="566928" y="3017520"/>
+            <a:ext cx="5394960" cy="548640"/>
+          </a:xfrm>
+          <a:prstGeom prst="rect">
+            <a:avLst/>
+          </a:prstGeom>
+          <a:noFill/>
+          <a:ln/>
+        </p:spPr>
+        <p:txBody>
+          <a:bodyPr wrap="square" lIns="0" tIns="0" rIns="0" bIns="0" rtlCol="0" anchor="t"/>
+          <a:lstStyle/>
+          <a:p>
+            <a:pPr indent="0" marL="0">
+              <a:buNone/>
+            </a:pPr>
+            <a:r>
+              <a:rPr lang="en-US" sz="1350" dirty="0">
                 <a:solidFill>
                   <a:srgbClr val="5C6377"/>
                 </a:solidFill>
@@ -9009,48 +11466,9 @@
                 <a:ea typeface="Arial" pitchFamily="34" charset="-122"/>
                 <a:cs typeface="Arial" pitchFamily="34" charset="-120"/>
               </a:rPr>
-              <a:t>Daten, die bleiben</a:t>
-            </a:r>
-            <a:endParaRPr lang="en-US" sz="1050" dirty="0"/>
-          </a:p>
-        </p:txBody>
-      </p:sp>
-      <p:sp>
-        <p:nvSpPr>
-          <p:cNvPr id="10" name="Text 7"/>
-          <p:cNvSpPr/>
-          <p:nvPr/>
-        </p:nvSpPr>
-        <p:spPr>
-          <a:xfrm>
-            <a:off x="8028432" y="4722876"/>
-            <a:ext cx="548640" cy="237744"/>
-          </a:xfrm>
-          <a:prstGeom prst="rect">
-            <a:avLst/>
-          </a:prstGeom>
-          <a:noFill/>
-          <a:ln/>
-        </p:spPr>
-        <p:txBody>
-          <a:bodyPr wrap="square" lIns="0" tIns="0" rIns="0" bIns="0" rtlCol="0" anchor="ctr"/>
-          <a:lstStyle/>
-          <a:p>
-            <a:pPr algn="r" indent="0" marL="0">
-              <a:buNone/>
-            </a:pPr>
-            <a:r>
-              <a:rPr lang="en-US" sz="1050" dirty="0">
-                <a:solidFill>
-                  <a:srgbClr val="5C6377"/>
-                </a:solidFill>
-                <a:latin typeface="Arial" pitchFamily="34" charset="0"/>
-                <a:ea typeface="Arial" pitchFamily="34" charset="-122"/>
-                <a:cs typeface="Arial" pitchFamily="34" charset="-120"/>
-              </a:rPr>
-              <a:t>4/14</a:t>
-            </a:r>
-            <a:endParaRPr lang="en-US" sz="1050" dirty="0"/>
+              <a:t>Volumes · Netze · Umgebungsvariablen</a:t>
+            </a:r>
+            <a:endParaRPr lang="en-US" sz="1350" dirty="0"/>
           </a:p>
         </p:txBody>
       </p:sp>
@@ -9186,7 +11604,7 @@
       </p:sp>
       <p:pic>
         <p:nvPicPr>
-          <p:cNvPr id="5" name="Image 0" descr="/Users/jacobmenge/Desktop/kurs-26.2b-orga/folienwerkstatt/assets/diagramme/volume-bild-2.png">    </p:cNvPr>
+          <p:cNvPr id="5" name="Image 0" descr="/Users/jacobmenge/Desktop/kurs-26.2b-orga/folienwerkstatt/assets/diagramme/volume-bild-1.png">    </p:cNvPr>
           <p:cNvPicPr>
             <a:picLocks noChangeAspect="1"/>
           </p:cNvPicPr>
@@ -9200,8 +11618,8 @@
         </p:blipFill>
         <p:spPr>
           <a:xfrm>
-            <a:off x="566928" y="1481328"/>
-            <a:ext cx="8010144" cy="2304288"/>
+            <a:off x="566928" y="1426464"/>
+            <a:ext cx="8010144" cy="2450592"/>
           </a:xfrm>
           <a:prstGeom prst="rect">
             <a:avLst/>
@@ -9216,7 +11634,7 @@
         </p:nvSpPr>
         <p:spPr>
           <a:xfrm>
-            <a:off x="566928" y="4069080"/>
+            <a:off x="566928" y="4087368"/>
             <a:ext cx="32004" cy="256032"/>
           </a:xfrm>
           <a:prstGeom prst="rect">
@@ -9236,7 +11654,7 @@
         </p:nvSpPr>
         <p:spPr>
           <a:xfrm>
-            <a:off x="749808" y="4023360"/>
+            <a:off x="749808" y="4041648"/>
             <a:ext cx="7827264" cy="402336"/>
           </a:xfrm>
           <a:prstGeom prst="rect">
@@ -9261,7 +11679,7 @@
                 <a:ea typeface="Arial" pitchFamily="34" charset="-122"/>
                 <a:cs typeface="Arial" pitchFamily="34" charset="-120"/>
               </a:rPr>
-              <a:t>Der Härtetest beginnt: Container absichtlich zerstören. In der Übung macht ihr das wirklich.</a:t>
+              <a:t>Oben der Befehl, unten seine Wirkung: -v verbindet Volume und Containerpfad. Der Schrägstrich-Pfad liegt im Container, denn dort steckt immer ein kleines Linux.</a:t>
             </a:r>
             <a:endParaRPr lang="en-US" sz="1200" dirty="0"/>
           </a:p>
@@ -9362,7 +11780,7 @@
                 <a:ea typeface="Arial" pitchFamily="34" charset="-122"/>
                 <a:cs typeface="Arial" pitchFamily="34" charset="-120"/>
               </a:rPr>
-              <a:t>5/14</a:t>
+              <a:t>5/20</a:t>
             </a:r>
             <a:endParaRPr lang="en-US" sz="1050" dirty="0"/>
           </a:p>
@@ -9500,7 +11918,7 @@
       </p:sp>
       <p:pic>
         <p:nvPicPr>
-          <p:cNvPr id="5" name="Image 0" descr="/Users/jacobmenge/Desktop/kurs-26.2b-orga/folienwerkstatt/assets/diagramme/volume-bild-3.png">    </p:cNvPr>
+          <p:cNvPr id="5" name="Image 0" descr="/Users/jacobmenge/Desktop/kurs-26.2b-orga/folienwerkstatt/assets/diagramme/volume-bild-2.png">    </p:cNvPr>
           <p:cNvPicPr>
             <a:picLocks noChangeAspect="1"/>
           </p:cNvPicPr>
@@ -9514,8 +11932,8 @@
         </p:blipFill>
         <p:spPr>
           <a:xfrm>
-            <a:off x="566928" y="1481328"/>
-            <a:ext cx="8010144" cy="2304288"/>
+            <a:off x="566928" y="1426464"/>
+            <a:ext cx="8010144" cy="2450592"/>
           </a:xfrm>
           <a:prstGeom prst="rect">
             <a:avLst/>
@@ -9575,7 +11993,7 @@
                 <a:ea typeface="Arial" pitchFamily="34" charset="-122"/>
                 <a:cs typeface="Arial" pitchFamily="34" charset="-120"/>
               </a:rPr>
-              <a:t>Neuer Container, gleiches Volume: Die Tabellen sind noch da. Diesen Beweis führt ihr heute selbst.</a:t>
+              <a:t>Der Härtetest beginnt: Container absichtlich zerstören. In der Übung macht ihr das wirklich.</a:t>
             </a:r>
             <a:endParaRPr lang="en-US" sz="1200" dirty="0"/>
           </a:p>
@@ -9676,7 +12094,7 @@
                 <a:ea typeface="Arial" pitchFamily="34" charset="-122"/>
                 <a:cs typeface="Arial" pitchFamily="34" charset="-120"/>
               </a:rPr>
-              <a:t>6/14</a:t>
+              <a:t>6/20</a:t>
             </a:r>
             <a:endParaRPr lang="en-US" sz="1050" dirty="0"/>
           </a:p>
@@ -9767,7 +12185,7 @@
                 <a:ea typeface="Arial" pitchFamily="34" charset="-122"/>
                 <a:cs typeface="Arial" pitchFamily="34" charset="-120"/>
               </a:rPr>
-              <a:t>NAMED VOLUME UND BIND MOUNT</a:t>
+              <a:t>DAS VOLUME</a:t>
             </a:r>
             <a:endParaRPr lang="en-US" sz="1150" dirty="0"/>
           </a:p>
@@ -9806,7 +12224,7 @@
                 <a:ea typeface="Arial" pitchFamily="34" charset="-122"/>
                 <a:cs typeface="Arial" pitchFamily="34" charset="-120"/>
               </a:rPr>
-              <a:t>Volume oder eigener Ordner?</a:t>
+              <a:t>Ein Zuhause außerhalb des Containers</a:t>
             </a:r>
             <a:endParaRPr lang="en-US" sz="2600" dirty="0"/>
           </a:p>
@@ -9814,7 +12232,7 @@
       </p:sp>
       <p:pic>
         <p:nvPicPr>
-          <p:cNvPr id="5" name="Image 0" descr="/Users/jacobmenge/Desktop/kurs-26.2b-orga/folienwerkstatt/assets/diagramme/bind-vs-volume.png">    </p:cNvPr>
+          <p:cNvPr id="5" name="Image 0" descr="/Users/jacobmenge/Desktop/kurs-26.2b-orga/folienwerkstatt/assets/diagramme/volume-bild-3.png">    </p:cNvPr>
           <p:cNvPicPr>
             <a:picLocks noChangeAspect="1"/>
           </p:cNvPicPr>
@@ -9828,8 +12246,8 @@
         </p:blipFill>
         <p:spPr>
           <a:xfrm>
-            <a:off x="566928" y="1481328"/>
-            <a:ext cx="8010144" cy="2304288"/>
+            <a:off x="566928" y="1426464"/>
+            <a:ext cx="8010144" cy="2450592"/>
           </a:xfrm>
           <a:prstGeom prst="rect">
             <a:avLst/>
@@ -9889,7 +12307,7 @@
                 <a:ea typeface="Arial" pitchFamily="34" charset="-122"/>
                 <a:cs typeface="Arial" pitchFamily="34" charset="-120"/>
               </a:rPr>
-              <a:t>Heute Abend nutzt ihr das Volume. Der Bind Mount kommt wieder, sobald ihr eigenen Code in Container bringt.</a:t>
+              <a:t>Neuer Container, gleiches Volume: Die Tabellen sind noch da. Diesen Beweis führt ihr heute selbst.</a:t>
             </a:r>
             <a:endParaRPr lang="en-US" sz="1200" dirty="0"/>
           </a:p>
@@ -9990,7 +12408,7 @@
                 <a:ea typeface="Arial" pitchFamily="34" charset="-122"/>
                 <a:cs typeface="Arial" pitchFamily="34" charset="-120"/>
               </a:rPr>
-              <a:t>7/14</a:t>
+              <a:t>7/20</a:t>
             </a:r>
             <a:endParaRPr lang="en-US" sz="1050" dirty="0"/>
           </a:p>
